--- a/szerkesztendo_dokumentumok/prezentacio_REKA.pptx
+++ b/szerkesztendo_dokumentumok/prezentacio_REKA.pptx
@@ -8,7 +8,17 @@
     <p:sldId id="256" r:id="rId2"/>
     <p:sldId id="257" r:id="rId3"/>
     <p:sldId id="259" r:id="rId4"/>
-    <p:sldId id="258" r:id="rId5"/>
+    <p:sldId id="263" r:id="rId5"/>
+    <p:sldId id="269" r:id="rId6"/>
+    <p:sldId id="265" r:id="rId7"/>
+    <p:sldId id="258" r:id="rId8"/>
+    <p:sldId id="260" r:id="rId9"/>
+    <p:sldId id="261" r:id="rId10"/>
+    <p:sldId id="262" r:id="rId11"/>
+    <p:sldId id="264" r:id="rId12"/>
+    <p:sldId id="266" r:id="rId13"/>
+    <p:sldId id="267" r:id="rId14"/>
+    <p:sldId id="268" r:id="rId15"/>
   </p:sldIdLst>
   <p:sldSz cx="12192000" cy="6858000"/>
   <p:notesSz cx="6858000" cy="9144000"/>
@@ -107,6 +117,11 @@
       </a:defRPr>
     </a:lvl9pPr>
   </p:defaultTextStyle>
+  <p:extLst>
+    <p:ext uri="{EFAFB233-063F-42B5-8137-9DF3F51BA10A}">
+      <p15:sldGuideLst xmlns:p15="http://schemas.microsoft.com/office/powerpoint/2012/main"/>
+    </p:ext>
+  </p:extLst>
 </p:presentation>
 </file>
 
@@ -286,7 +301,7 @@
           <a:p>
             <a:fld id="{96DFF08F-DC6B-4601-B491-B0F83F6DD2DA}" type="datetimeFigureOut">
               <a:rPr lang="en-US" smtClean="0"/>
-              <a:t>3/3/2026</a:t>
+              <a:t>3/4/2026</a:t>
             </a:fld>
             <a:endParaRPr lang="en-US" dirty="0"/>
           </a:p>
@@ -456,7 +471,7 @@
           <a:p>
             <a:fld id="{96DFF08F-DC6B-4601-B491-B0F83F6DD2DA}" type="datetimeFigureOut">
               <a:rPr lang="en-US" smtClean="0"/>
-              <a:t>3/3/2026</a:t>
+              <a:t>3/4/2026</a:t>
             </a:fld>
             <a:endParaRPr lang="en-US" dirty="0"/>
           </a:p>
@@ -679,7 +694,7 @@
           <a:p>
             <a:fld id="{96DFF08F-DC6B-4601-B491-B0F83F6DD2DA}" type="datetimeFigureOut">
               <a:rPr lang="en-US" smtClean="0"/>
-              <a:t>3/3/2026</a:t>
+              <a:t>3/4/2026</a:t>
             </a:fld>
             <a:endParaRPr lang="en-US" dirty="0"/>
           </a:p>
@@ -859,7 +874,7 @@
           <a:p>
             <a:fld id="{96DFF08F-DC6B-4601-B491-B0F83F6DD2DA}" type="datetimeFigureOut">
               <a:rPr lang="en-US" smtClean="0"/>
-              <a:t>3/3/2026</a:t>
+              <a:t>3/4/2026</a:t>
             </a:fld>
             <a:endParaRPr lang="en-US" dirty="0"/>
           </a:p>
@@ -1166,7 +1181,7 @@
             <a:fld id="{96DFF08F-DC6B-4601-B491-B0F83F6DD2DA}" type="datetimeFigureOut">
               <a:rPr lang="en-US" smtClean="0"/>
               <a:pPr/>
-              <a:t>3/3/2026</a:t>
+              <a:t>3/4/2026</a:t>
             </a:fld>
             <a:endParaRPr lang="en-US" dirty="0"/>
           </a:p>
@@ -1471,7 +1486,7 @@
           <a:p>
             <a:fld id="{96DFF08F-DC6B-4601-B491-B0F83F6DD2DA}" type="datetimeFigureOut">
               <a:rPr lang="en-US" smtClean="0"/>
-              <a:t>3/3/2026</a:t>
+              <a:t>3/4/2026</a:t>
             </a:fld>
             <a:endParaRPr lang="en-US" dirty="0"/>
           </a:p>
@@ -1893,7 +1908,7 @@
           <a:p>
             <a:fld id="{96DFF08F-DC6B-4601-B491-B0F83F6DD2DA}" type="datetimeFigureOut">
               <a:rPr lang="en-US" smtClean="0"/>
-              <a:t>3/3/2026</a:t>
+              <a:t>3/4/2026</a:t>
             </a:fld>
             <a:endParaRPr lang="en-US" dirty="0"/>
           </a:p>
@@ -2011,7 +2026,7 @@
           <a:p>
             <a:fld id="{96DFF08F-DC6B-4601-B491-B0F83F6DD2DA}" type="datetimeFigureOut">
               <a:rPr lang="en-US" smtClean="0"/>
-              <a:t>3/3/2026</a:t>
+              <a:t>3/4/2026</a:t>
             </a:fld>
             <a:endParaRPr lang="en-US" dirty="0"/>
           </a:p>
@@ -2106,7 +2121,7 @@
           <a:p>
             <a:fld id="{96DFF08F-DC6B-4601-B491-B0F83F6DD2DA}" type="datetimeFigureOut">
               <a:rPr lang="en-US" smtClean="0"/>
-              <a:t>3/3/2026</a:t>
+              <a:t>3/4/2026</a:t>
             </a:fld>
             <a:endParaRPr lang="en-US" dirty="0"/>
           </a:p>
@@ -2379,7 +2394,7 @@
           <a:p>
             <a:fld id="{96DFF08F-DC6B-4601-B491-B0F83F6DD2DA}" type="datetimeFigureOut">
               <a:rPr lang="en-US" smtClean="0"/>
-              <a:t>3/3/2026</a:t>
+              <a:t>3/4/2026</a:t>
             </a:fld>
             <a:endParaRPr lang="en-US" dirty="0"/>
           </a:p>
@@ -2644,7 +2659,7 @@
           <a:p>
             <a:fld id="{96DFF08F-DC6B-4601-B491-B0F83F6DD2DA}" type="datetimeFigureOut">
               <a:rPr lang="en-US" smtClean="0"/>
-              <a:t>3/3/2026</a:t>
+              <a:t>3/4/2026</a:t>
             </a:fld>
             <a:endParaRPr lang="en-US" dirty="0"/>
           </a:p>
@@ -2894,7 +2909,7 @@
             <a:fld id="{96DFF08F-DC6B-4601-B491-B0F83F6DD2DA}" type="datetimeFigureOut">
               <a:rPr lang="en-US" smtClean="0"/>
               <a:pPr/>
-              <a:t>3/3/2026</a:t>
+              <a:t>3/4/2026</a:t>
             </a:fld>
             <a:endParaRPr lang="en-US" dirty="0"/>
           </a:p>
@@ -3476,6 +3491,481 @@
   <p:clrMapOvr>
     <a:masterClrMapping/>
   </p:clrMapOvr>
+  <mc:AlternateContent xmlns:mc="http://schemas.openxmlformats.org/markup-compatibility/2006" xmlns:p159="http://schemas.microsoft.com/office/powerpoint/2015/09/main">
+    <mc:Choice Requires="p159">
+      <p:transition xmlns:p14="http://schemas.microsoft.com/office/powerpoint/2010/main" spd="slow" p14:dur="2000">
+        <p159:morph option="byObject"/>
+      </p:transition>
+    </mc:Choice>
+    <mc:Fallback xmlns="">
+      <p:transition spd="slow">
+        <p:fade/>
+      </p:transition>
+    </mc:Fallback>
+  </mc:AlternateContent>
+</p:sld>
+</file>
+
+<file path=ppt/slides/slide10.xml><?xml version="1.0" encoding="utf-8"?>
+<p:sld xmlns:a="http://schemas.openxmlformats.org/drawingml/2006/main" xmlns:r="http://schemas.openxmlformats.org/officeDocument/2006/relationships" xmlns:p="http://schemas.openxmlformats.org/presentationml/2006/main">
+  <p:cSld>
+    <p:spTree>
+      <p:nvGrpSpPr>
+        <p:cNvPr id="1" name=""/>
+        <p:cNvGrpSpPr/>
+        <p:nvPr/>
+      </p:nvGrpSpPr>
+      <p:grpSpPr>
+        <a:xfrm>
+          <a:off x="0" y="0"/>
+          <a:ext cx="0" cy="0"/>
+          <a:chOff x="0" y="0"/>
+          <a:chExt cx="0" cy="0"/>
+        </a:xfrm>
+      </p:grpSpPr>
+      <p:sp>
+        <p:nvSpPr>
+          <p:cNvPr id="2" name="Cím 1">
+            <a:extLst>
+              <a:ext uri="{FF2B5EF4-FFF2-40B4-BE49-F238E27FC236}">
+                <a16:creationId xmlns:a16="http://schemas.microsoft.com/office/drawing/2014/main" id="{6F96F8A1-EA73-49F9-8B46-ADC46DCBF05B}"/>
+              </a:ext>
+            </a:extLst>
+          </p:cNvPr>
+          <p:cNvSpPr>
+            <a:spLocks noGrp="1"/>
+          </p:cNvSpPr>
+          <p:nvPr>
+            <p:ph type="title"/>
+          </p:nvPr>
+        </p:nvSpPr>
+        <p:spPr/>
+        <p:txBody>
+          <a:bodyPr/>
+          <a:lstStyle/>
+          <a:p>
+            <a:r>
+              <a:rPr lang="hu-HU" dirty="0"/>
+              <a:t>Adatbázis</a:t>
+            </a:r>
+          </a:p>
+        </p:txBody>
+      </p:sp>
+      <p:sp>
+        <p:nvSpPr>
+          <p:cNvPr id="3" name="Tartalom helye 2">
+            <a:extLst>
+              <a:ext uri="{FF2B5EF4-FFF2-40B4-BE49-F238E27FC236}">
+                <a16:creationId xmlns:a16="http://schemas.microsoft.com/office/drawing/2014/main" id="{F812DF51-D2E3-4591-B5F0-331637F7C8F8}"/>
+              </a:ext>
+            </a:extLst>
+          </p:cNvPr>
+          <p:cNvSpPr>
+            <a:spLocks noGrp="1"/>
+          </p:cNvSpPr>
+          <p:nvPr>
+            <p:ph idx="1"/>
+          </p:nvPr>
+        </p:nvSpPr>
+        <p:spPr/>
+        <p:txBody>
+          <a:bodyPr/>
+          <a:lstStyle/>
+          <a:p>
+            <a:endParaRPr lang="hu-HU"/>
+          </a:p>
+        </p:txBody>
+      </p:sp>
+    </p:spTree>
+    <p:extLst>
+      <p:ext uri="{BB962C8B-B14F-4D97-AF65-F5344CB8AC3E}">
+        <p14:creationId xmlns:p14="http://schemas.microsoft.com/office/powerpoint/2010/main" val="3374574969"/>
+      </p:ext>
+    </p:extLst>
+  </p:cSld>
+  <p:clrMapOvr>
+    <a:masterClrMapping/>
+  </p:clrMapOvr>
+  <mc:AlternateContent xmlns:mc="http://schemas.openxmlformats.org/markup-compatibility/2006">
+    <mc:Choice xmlns:p159="http://schemas.microsoft.com/office/powerpoint/2015/09/main" Requires="p159">
+      <p:transition xmlns:p14="http://schemas.microsoft.com/office/powerpoint/2010/main" spd="slow" p14:dur="2000">
+        <p159:morph option="byObject"/>
+      </p:transition>
+    </mc:Choice>
+    <mc:Fallback>
+      <p:transition spd="slow">
+        <p:fade/>
+      </p:transition>
+    </mc:Fallback>
+  </mc:AlternateContent>
+</p:sld>
+</file>
+
+<file path=ppt/slides/slide11.xml><?xml version="1.0" encoding="utf-8"?>
+<p:sld xmlns:a="http://schemas.openxmlformats.org/drawingml/2006/main" xmlns:r="http://schemas.openxmlformats.org/officeDocument/2006/relationships" xmlns:p="http://schemas.openxmlformats.org/presentationml/2006/main">
+  <p:cSld>
+    <p:spTree>
+      <p:nvGrpSpPr>
+        <p:cNvPr id="1" name=""/>
+        <p:cNvGrpSpPr/>
+        <p:nvPr/>
+      </p:nvGrpSpPr>
+      <p:grpSpPr>
+        <a:xfrm>
+          <a:off x="0" y="0"/>
+          <a:ext cx="0" cy="0"/>
+          <a:chOff x="0" y="0"/>
+          <a:chExt cx="0" cy="0"/>
+        </a:xfrm>
+      </p:grpSpPr>
+      <p:sp>
+        <p:nvSpPr>
+          <p:cNvPr id="2" name="Cím 1">
+            <a:extLst>
+              <a:ext uri="{FF2B5EF4-FFF2-40B4-BE49-F238E27FC236}">
+                <a16:creationId xmlns:a16="http://schemas.microsoft.com/office/drawing/2014/main" id="{0E90F1C4-F976-42A1-97ED-66D6B6097870}"/>
+              </a:ext>
+            </a:extLst>
+          </p:cNvPr>
+          <p:cNvSpPr>
+            <a:spLocks noGrp="1"/>
+          </p:cNvSpPr>
+          <p:nvPr>
+            <p:ph type="title"/>
+          </p:nvPr>
+        </p:nvSpPr>
+        <p:spPr/>
+        <p:txBody>
+          <a:bodyPr/>
+          <a:lstStyle/>
+          <a:p>
+            <a:r>
+              <a:rPr lang="hu-HU" dirty="0"/>
+              <a:t>Teszt</a:t>
+            </a:r>
+          </a:p>
+        </p:txBody>
+      </p:sp>
+      <p:sp>
+        <p:nvSpPr>
+          <p:cNvPr id="4" name="Szöveg helye 3">
+            <a:extLst>
+              <a:ext uri="{FF2B5EF4-FFF2-40B4-BE49-F238E27FC236}">
+                <a16:creationId xmlns:a16="http://schemas.microsoft.com/office/drawing/2014/main" id="{23F902DA-9191-4CBE-A40F-1673EBC757F6}"/>
+              </a:ext>
+            </a:extLst>
+          </p:cNvPr>
+          <p:cNvSpPr>
+            <a:spLocks noGrp="1"/>
+          </p:cNvSpPr>
+          <p:nvPr>
+            <p:ph type="body" idx="1"/>
+          </p:nvPr>
+        </p:nvSpPr>
+        <p:spPr/>
+        <p:txBody>
+          <a:bodyPr/>
+          <a:lstStyle/>
+          <a:p>
+            <a:endParaRPr lang="hu-HU"/>
+          </a:p>
+        </p:txBody>
+      </p:sp>
+    </p:spTree>
+    <p:extLst>
+      <p:ext uri="{BB962C8B-B14F-4D97-AF65-F5344CB8AC3E}">
+        <p14:creationId xmlns:p14="http://schemas.microsoft.com/office/powerpoint/2010/main" val="2929083256"/>
+      </p:ext>
+    </p:extLst>
+  </p:cSld>
+  <p:clrMapOvr>
+    <a:masterClrMapping/>
+  </p:clrMapOvr>
+  <mc:AlternateContent xmlns:mc="http://schemas.openxmlformats.org/markup-compatibility/2006">
+    <mc:Choice xmlns:p159="http://schemas.microsoft.com/office/powerpoint/2015/09/main" Requires="p159">
+      <p:transition xmlns:p14="http://schemas.microsoft.com/office/powerpoint/2010/main" spd="slow" p14:dur="2000">
+        <p159:morph option="byObject"/>
+      </p:transition>
+    </mc:Choice>
+    <mc:Fallback>
+      <p:transition spd="slow">
+        <p:fade/>
+      </p:transition>
+    </mc:Fallback>
+  </mc:AlternateContent>
+</p:sld>
+</file>
+
+<file path=ppt/slides/slide12.xml><?xml version="1.0" encoding="utf-8"?>
+<p:sld xmlns:a="http://schemas.openxmlformats.org/drawingml/2006/main" xmlns:r="http://schemas.openxmlformats.org/officeDocument/2006/relationships" xmlns:p="http://schemas.openxmlformats.org/presentationml/2006/main">
+  <p:cSld>
+    <p:spTree>
+      <p:nvGrpSpPr>
+        <p:cNvPr id="1" name=""/>
+        <p:cNvGrpSpPr/>
+        <p:nvPr/>
+      </p:nvGrpSpPr>
+      <p:grpSpPr>
+        <a:xfrm>
+          <a:off x="0" y="0"/>
+          <a:ext cx="0" cy="0"/>
+          <a:chOff x="0" y="0"/>
+          <a:chExt cx="0" cy="0"/>
+        </a:xfrm>
+      </p:grpSpPr>
+      <p:sp>
+        <p:nvSpPr>
+          <p:cNvPr id="2" name="Cím 1">
+            <a:extLst>
+              <a:ext uri="{FF2B5EF4-FFF2-40B4-BE49-F238E27FC236}">
+                <a16:creationId xmlns:a16="http://schemas.microsoft.com/office/drawing/2014/main" id="{2B1B7EAA-8ED1-4108-B800-32C6CC05FB05}"/>
+              </a:ext>
+            </a:extLst>
+          </p:cNvPr>
+          <p:cNvSpPr>
+            <a:spLocks noGrp="1"/>
+          </p:cNvSpPr>
+          <p:nvPr>
+            <p:ph type="title"/>
+          </p:nvPr>
+        </p:nvSpPr>
+        <p:spPr/>
+        <p:txBody>
+          <a:bodyPr/>
+          <a:lstStyle/>
+          <a:p>
+            <a:r>
+              <a:rPr lang="hu-HU" dirty="0"/>
+              <a:t>Frontend</a:t>
+            </a:r>
+          </a:p>
+        </p:txBody>
+      </p:sp>
+      <p:sp>
+        <p:nvSpPr>
+          <p:cNvPr id="3" name="Tartalom helye 2">
+            <a:extLst>
+              <a:ext uri="{FF2B5EF4-FFF2-40B4-BE49-F238E27FC236}">
+                <a16:creationId xmlns:a16="http://schemas.microsoft.com/office/drawing/2014/main" id="{197E9A83-9A18-4295-9977-1301A8B2A1B2}"/>
+              </a:ext>
+            </a:extLst>
+          </p:cNvPr>
+          <p:cNvSpPr>
+            <a:spLocks noGrp="1"/>
+          </p:cNvSpPr>
+          <p:nvPr>
+            <p:ph idx="1"/>
+          </p:nvPr>
+        </p:nvSpPr>
+        <p:spPr/>
+        <p:txBody>
+          <a:bodyPr/>
+          <a:lstStyle/>
+          <a:p>
+            <a:endParaRPr lang="hu-HU"/>
+          </a:p>
+        </p:txBody>
+      </p:sp>
+    </p:spTree>
+    <p:extLst>
+      <p:ext uri="{BB962C8B-B14F-4D97-AF65-F5344CB8AC3E}">
+        <p14:creationId xmlns:p14="http://schemas.microsoft.com/office/powerpoint/2010/main" val="1558163181"/>
+      </p:ext>
+    </p:extLst>
+  </p:cSld>
+  <p:clrMapOvr>
+    <a:masterClrMapping/>
+  </p:clrMapOvr>
+  <mc:AlternateContent xmlns:mc="http://schemas.openxmlformats.org/markup-compatibility/2006">
+    <mc:Choice xmlns:p159="http://schemas.microsoft.com/office/powerpoint/2015/09/main" Requires="p159">
+      <p:transition xmlns:p14="http://schemas.microsoft.com/office/powerpoint/2010/main" spd="slow" p14:dur="2000">
+        <p159:morph option="byObject"/>
+      </p:transition>
+    </mc:Choice>
+    <mc:Fallback>
+      <p:transition spd="slow">
+        <p:fade/>
+      </p:transition>
+    </mc:Fallback>
+  </mc:AlternateContent>
+</p:sld>
+</file>
+
+<file path=ppt/slides/slide13.xml><?xml version="1.0" encoding="utf-8"?>
+<p:sld xmlns:a="http://schemas.openxmlformats.org/drawingml/2006/main" xmlns:r="http://schemas.openxmlformats.org/officeDocument/2006/relationships" xmlns:p="http://schemas.openxmlformats.org/presentationml/2006/main">
+  <p:cSld>
+    <p:spTree>
+      <p:nvGrpSpPr>
+        <p:cNvPr id="1" name=""/>
+        <p:cNvGrpSpPr/>
+        <p:nvPr/>
+      </p:nvGrpSpPr>
+      <p:grpSpPr>
+        <a:xfrm>
+          <a:off x="0" y="0"/>
+          <a:ext cx="0" cy="0"/>
+          <a:chOff x="0" y="0"/>
+          <a:chExt cx="0" cy="0"/>
+        </a:xfrm>
+      </p:grpSpPr>
+      <p:sp>
+        <p:nvSpPr>
+          <p:cNvPr id="2" name="Cím 1">
+            <a:extLst>
+              <a:ext uri="{FF2B5EF4-FFF2-40B4-BE49-F238E27FC236}">
+                <a16:creationId xmlns:a16="http://schemas.microsoft.com/office/drawing/2014/main" id="{AE7A394C-08C6-4733-8683-DF32A5E3D9A1}"/>
+              </a:ext>
+            </a:extLst>
+          </p:cNvPr>
+          <p:cNvSpPr>
+            <a:spLocks noGrp="1"/>
+          </p:cNvSpPr>
+          <p:nvPr>
+            <p:ph type="title"/>
+          </p:nvPr>
+        </p:nvSpPr>
+        <p:spPr/>
+        <p:txBody>
+          <a:bodyPr/>
+          <a:lstStyle/>
+          <a:p>
+            <a:r>
+              <a:rPr lang="hu-HU" dirty="0"/>
+              <a:t>Backend</a:t>
+            </a:r>
+          </a:p>
+        </p:txBody>
+      </p:sp>
+      <p:sp>
+        <p:nvSpPr>
+          <p:cNvPr id="3" name="Tartalom helye 2">
+            <a:extLst>
+              <a:ext uri="{FF2B5EF4-FFF2-40B4-BE49-F238E27FC236}">
+                <a16:creationId xmlns:a16="http://schemas.microsoft.com/office/drawing/2014/main" id="{FE580785-C82D-4D70-8F17-4BD29507C6AB}"/>
+              </a:ext>
+            </a:extLst>
+          </p:cNvPr>
+          <p:cNvSpPr>
+            <a:spLocks noGrp="1"/>
+          </p:cNvSpPr>
+          <p:nvPr>
+            <p:ph idx="1"/>
+          </p:nvPr>
+        </p:nvSpPr>
+        <p:spPr/>
+        <p:txBody>
+          <a:bodyPr/>
+          <a:lstStyle/>
+          <a:p>
+            <a:endParaRPr lang="hu-HU"/>
+          </a:p>
+        </p:txBody>
+      </p:sp>
+    </p:spTree>
+    <p:extLst>
+      <p:ext uri="{BB962C8B-B14F-4D97-AF65-F5344CB8AC3E}">
+        <p14:creationId xmlns:p14="http://schemas.microsoft.com/office/powerpoint/2010/main" val="2782414"/>
+      </p:ext>
+    </p:extLst>
+  </p:cSld>
+  <p:clrMapOvr>
+    <a:masterClrMapping/>
+  </p:clrMapOvr>
+  <mc:AlternateContent xmlns:mc="http://schemas.openxmlformats.org/markup-compatibility/2006">
+    <mc:Choice xmlns:p159="http://schemas.microsoft.com/office/powerpoint/2015/09/main" Requires="p159">
+      <p:transition xmlns:p14="http://schemas.microsoft.com/office/powerpoint/2010/main" spd="slow" p14:dur="2000">
+        <p159:morph option="byObject"/>
+      </p:transition>
+    </mc:Choice>
+    <mc:Fallback>
+      <p:transition spd="slow">
+        <p:fade/>
+      </p:transition>
+    </mc:Fallback>
+  </mc:AlternateContent>
+</p:sld>
+</file>
+
+<file path=ppt/slides/slide14.xml><?xml version="1.0" encoding="utf-8"?>
+<p:sld xmlns:a="http://schemas.openxmlformats.org/drawingml/2006/main" xmlns:r="http://schemas.openxmlformats.org/officeDocument/2006/relationships" xmlns:p="http://schemas.openxmlformats.org/presentationml/2006/main">
+  <p:cSld>
+    <p:spTree>
+      <p:nvGrpSpPr>
+        <p:cNvPr id="1" name=""/>
+        <p:cNvGrpSpPr/>
+        <p:nvPr/>
+      </p:nvGrpSpPr>
+      <p:grpSpPr>
+        <a:xfrm>
+          <a:off x="0" y="0"/>
+          <a:ext cx="0" cy="0"/>
+          <a:chOff x="0" y="0"/>
+          <a:chExt cx="0" cy="0"/>
+        </a:xfrm>
+      </p:grpSpPr>
+      <p:sp>
+        <p:nvSpPr>
+          <p:cNvPr id="2" name="Cím 1">
+            <a:extLst>
+              <a:ext uri="{FF2B5EF4-FFF2-40B4-BE49-F238E27FC236}">
+                <a16:creationId xmlns:a16="http://schemas.microsoft.com/office/drawing/2014/main" id="{5284D067-9050-4E87-80B9-A68BE769E3DD}"/>
+              </a:ext>
+            </a:extLst>
+          </p:cNvPr>
+          <p:cNvSpPr>
+            <a:spLocks noGrp="1"/>
+          </p:cNvSpPr>
+          <p:nvPr>
+            <p:ph type="title"/>
+          </p:nvPr>
+        </p:nvSpPr>
+        <p:spPr/>
+        <p:txBody>
+          <a:bodyPr/>
+          <a:lstStyle/>
+          <a:p>
+            <a:r>
+              <a:rPr lang="hu-HU" dirty="0"/>
+              <a:t>Köszönjük a Figyelmet!</a:t>
+            </a:r>
+          </a:p>
+        </p:txBody>
+      </p:sp>
+      <p:sp>
+        <p:nvSpPr>
+          <p:cNvPr id="3" name="Szöveg helye 2">
+            <a:extLst>
+              <a:ext uri="{FF2B5EF4-FFF2-40B4-BE49-F238E27FC236}">
+                <a16:creationId xmlns:a16="http://schemas.microsoft.com/office/drawing/2014/main" id="{2CF6A9AC-FC66-46C4-8BD8-5A4026D333D3}"/>
+              </a:ext>
+            </a:extLst>
+          </p:cNvPr>
+          <p:cNvSpPr>
+            <a:spLocks noGrp="1"/>
+          </p:cNvSpPr>
+          <p:nvPr>
+            <p:ph type="body" idx="1"/>
+          </p:nvPr>
+        </p:nvSpPr>
+        <p:spPr/>
+        <p:txBody>
+          <a:bodyPr/>
+          <a:lstStyle/>
+          <a:p>
+            <a:endParaRPr lang="hu-HU"/>
+          </a:p>
+        </p:txBody>
+      </p:sp>
+    </p:spTree>
+    <p:extLst>
+      <p:ext uri="{BB962C8B-B14F-4D97-AF65-F5344CB8AC3E}">
+        <p14:creationId xmlns:p14="http://schemas.microsoft.com/office/powerpoint/2010/main" val="602628300"/>
+      </p:ext>
+    </p:extLst>
+  </p:cSld>
+  <p:clrMapOvr>
+    <a:masterClrMapping/>
+  </p:clrMapOvr>
   <mc:AlternateContent xmlns:mc="http://schemas.openxmlformats.org/markup-compatibility/2006">
     <mc:Choice xmlns:p159="http://schemas.microsoft.com/office/powerpoint/2015/09/main" Requires="p159">
       <p:transition xmlns:p14="http://schemas.microsoft.com/office/powerpoint/2010/main" spd="slow" p14:dur="2000">
@@ -3529,7 +4019,10 @@
           <a:bodyPr/>
           <a:lstStyle/>
           <a:p>
-            <a:endParaRPr lang="hu-HU" dirty="0"/>
+            <a:r>
+              <a:rPr lang="hu-HU" dirty="0"/>
+              <a:t>Probléma </a:t>
+            </a:r>
           </a:p>
         </p:txBody>
       </p:sp>
@@ -3568,13 +4061,13 @@
   <p:clrMapOvr>
     <a:masterClrMapping/>
   </p:clrMapOvr>
-  <mc:AlternateContent xmlns:mc="http://schemas.openxmlformats.org/markup-compatibility/2006">
-    <mc:Choice xmlns:p159="http://schemas.microsoft.com/office/powerpoint/2015/09/main" Requires="p159">
+  <mc:AlternateContent xmlns:mc="http://schemas.openxmlformats.org/markup-compatibility/2006" xmlns:p159="http://schemas.microsoft.com/office/powerpoint/2015/09/main">
+    <mc:Choice Requires="p159">
       <p:transition xmlns:p14="http://schemas.microsoft.com/office/powerpoint/2010/main" spd="slow" p14:dur="2000">
         <p159:morph option="byObject"/>
       </p:transition>
     </mc:Choice>
-    <mc:Fallback>
+    <mc:Fallback xmlns="">
       <p:transition spd="slow">
         <p:fade/>
       </p:transition>
@@ -3621,7 +4114,10 @@
           <a:bodyPr/>
           <a:lstStyle/>
           <a:p>
-            <a:endParaRPr lang="hu-HU" dirty="0"/>
+            <a:r>
+              <a:rPr lang="hu-HU" dirty="0"/>
+              <a:t>Funkciók</a:t>
+            </a:r>
           </a:p>
         </p:txBody>
       </p:sp>
@@ -3660,13 +4156,13 @@
   <p:clrMapOvr>
     <a:masterClrMapping/>
   </p:clrMapOvr>
-  <mc:AlternateContent xmlns:mc="http://schemas.openxmlformats.org/markup-compatibility/2006">
-    <mc:Choice xmlns:p159="http://schemas.microsoft.com/office/powerpoint/2015/09/main" Requires="p159">
+  <mc:AlternateContent xmlns:mc="http://schemas.openxmlformats.org/markup-compatibility/2006" xmlns:p159="http://schemas.microsoft.com/office/powerpoint/2015/09/main">
+    <mc:Choice Requires="p159">
       <p:transition xmlns:p14="http://schemas.microsoft.com/office/powerpoint/2010/main" spd="slow" p14:dur="2000">
         <p159:morph option="byObject"/>
       </p:transition>
     </mc:Choice>
-    <mc:Fallback>
+    <mc:Fallback xmlns="">
       <p:transition spd="slow">
         <p:fade/>
       </p:transition>
@@ -3697,6 +4193,372 @@
           <p:cNvPr id="2" name="Cím 1">
             <a:extLst>
               <a:ext uri="{FF2B5EF4-FFF2-40B4-BE49-F238E27FC236}">
+                <a16:creationId xmlns:a16="http://schemas.microsoft.com/office/drawing/2014/main" id="{87A2C625-E5D0-4D57-9344-D960B3267BAB}"/>
+              </a:ext>
+            </a:extLst>
+          </p:cNvPr>
+          <p:cNvSpPr>
+            <a:spLocks noGrp="1"/>
+          </p:cNvSpPr>
+          <p:nvPr>
+            <p:ph type="title"/>
+          </p:nvPr>
+        </p:nvSpPr>
+        <p:spPr/>
+        <p:txBody>
+          <a:bodyPr/>
+          <a:lstStyle/>
+          <a:p>
+            <a:r>
+              <a:rPr lang="hu-HU" dirty="0"/>
+              <a:t>Csapatmunka</a:t>
+            </a:r>
+          </a:p>
+        </p:txBody>
+      </p:sp>
+      <p:sp>
+        <p:nvSpPr>
+          <p:cNvPr id="3" name="Szöveg helye 2">
+            <a:extLst>
+              <a:ext uri="{FF2B5EF4-FFF2-40B4-BE49-F238E27FC236}">
+                <a16:creationId xmlns:a16="http://schemas.microsoft.com/office/drawing/2014/main" id="{E41DC482-5184-4D16-8171-23C6C886A424}"/>
+              </a:ext>
+            </a:extLst>
+          </p:cNvPr>
+          <p:cNvSpPr>
+            <a:spLocks noGrp="1"/>
+          </p:cNvSpPr>
+          <p:nvPr>
+            <p:ph type="body" idx="1"/>
+          </p:nvPr>
+        </p:nvSpPr>
+        <p:spPr/>
+        <p:txBody>
+          <a:bodyPr/>
+          <a:lstStyle/>
+          <a:p>
+            <a:endParaRPr lang="hu-HU"/>
+          </a:p>
+        </p:txBody>
+      </p:sp>
+    </p:spTree>
+    <p:extLst>
+      <p:ext uri="{BB962C8B-B14F-4D97-AF65-F5344CB8AC3E}">
+        <p14:creationId xmlns:p14="http://schemas.microsoft.com/office/powerpoint/2010/main" val="1091898434"/>
+      </p:ext>
+    </p:extLst>
+  </p:cSld>
+  <p:clrMapOvr>
+    <a:masterClrMapping/>
+  </p:clrMapOvr>
+  <mc:AlternateContent xmlns:mc="http://schemas.openxmlformats.org/markup-compatibility/2006">
+    <mc:Choice xmlns:p159="http://schemas.microsoft.com/office/powerpoint/2015/09/main" Requires="p159">
+      <p:transition xmlns:p14="http://schemas.microsoft.com/office/powerpoint/2010/main" spd="slow" p14:dur="2000">
+        <p159:morph option="byObject"/>
+      </p:transition>
+    </mc:Choice>
+    <mc:Fallback>
+      <p:transition spd="slow">
+        <p:fade/>
+      </p:transition>
+    </mc:Fallback>
+  </mc:AlternateContent>
+</p:sld>
+</file>
+
+<file path=ppt/slides/slide5.xml><?xml version="1.0" encoding="utf-8"?>
+<p:sld xmlns:a="http://schemas.openxmlformats.org/drawingml/2006/main" xmlns:r="http://schemas.openxmlformats.org/officeDocument/2006/relationships" xmlns:p="http://schemas.openxmlformats.org/presentationml/2006/main">
+  <p:cSld>
+    <p:spTree>
+      <p:nvGrpSpPr>
+        <p:cNvPr id="1" name=""/>
+        <p:cNvGrpSpPr/>
+        <p:nvPr/>
+      </p:nvGrpSpPr>
+      <p:grpSpPr>
+        <a:xfrm>
+          <a:off x="0" y="0"/>
+          <a:ext cx="0" cy="0"/>
+          <a:chOff x="0" y="0"/>
+          <a:chExt cx="0" cy="0"/>
+        </a:xfrm>
+      </p:grpSpPr>
+      <p:sp>
+        <p:nvSpPr>
+          <p:cNvPr id="2" name="Cím 1">
+            <a:extLst>
+              <a:ext uri="{FF2B5EF4-FFF2-40B4-BE49-F238E27FC236}">
+                <a16:creationId xmlns:a16="http://schemas.microsoft.com/office/drawing/2014/main" id="{A7B0A38C-899F-4809-9705-76A0B6F226E7}"/>
+              </a:ext>
+            </a:extLst>
+          </p:cNvPr>
+          <p:cNvSpPr>
+            <a:spLocks noGrp="1"/>
+          </p:cNvSpPr>
+          <p:nvPr>
+            <p:ph type="title"/>
+          </p:nvPr>
+        </p:nvSpPr>
+        <p:spPr/>
+        <p:txBody>
+          <a:bodyPr/>
+          <a:lstStyle/>
+          <a:p>
+            <a:r>
+              <a:rPr lang="hu-HU" dirty="0"/>
+              <a:t>Megvalósítás</a:t>
+            </a:r>
+          </a:p>
+        </p:txBody>
+      </p:sp>
+      <p:sp>
+        <p:nvSpPr>
+          <p:cNvPr id="3" name="Tartalom helye 2">
+            <a:extLst>
+              <a:ext uri="{FF2B5EF4-FFF2-40B4-BE49-F238E27FC236}">
+                <a16:creationId xmlns:a16="http://schemas.microsoft.com/office/drawing/2014/main" id="{6AB234CC-4FAD-4202-B150-304D9532890F}"/>
+              </a:ext>
+            </a:extLst>
+          </p:cNvPr>
+          <p:cNvSpPr>
+            <a:spLocks noGrp="1"/>
+          </p:cNvSpPr>
+          <p:nvPr>
+            <p:ph idx="1"/>
+          </p:nvPr>
+        </p:nvSpPr>
+        <p:spPr/>
+        <p:txBody>
+          <a:bodyPr/>
+          <a:lstStyle/>
+          <a:p>
+            <a:endParaRPr lang="hu-HU"/>
+          </a:p>
+        </p:txBody>
+      </p:sp>
+    </p:spTree>
+    <p:extLst>
+      <p:ext uri="{BB962C8B-B14F-4D97-AF65-F5344CB8AC3E}">
+        <p14:creationId xmlns:p14="http://schemas.microsoft.com/office/powerpoint/2010/main" val="2953559893"/>
+      </p:ext>
+    </p:extLst>
+  </p:cSld>
+  <p:clrMapOvr>
+    <a:masterClrMapping/>
+  </p:clrMapOvr>
+  <mc:AlternateContent xmlns:mc="http://schemas.openxmlformats.org/markup-compatibility/2006">
+    <mc:Choice xmlns:p159="http://schemas.microsoft.com/office/powerpoint/2015/09/main" Requires="p159">
+      <p:transition xmlns:p14="http://schemas.microsoft.com/office/powerpoint/2010/main" spd="slow" p14:dur="2000">
+        <p159:morph option="byObject"/>
+      </p:transition>
+    </mc:Choice>
+    <mc:Fallback>
+      <p:transition spd="slow">
+        <p:fade/>
+      </p:transition>
+    </mc:Fallback>
+  </mc:AlternateContent>
+</p:sld>
+</file>
+
+<file path=ppt/slides/slide6.xml><?xml version="1.0" encoding="utf-8"?>
+<p:sld xmlns:a="http://schemas.openxmlformats.org/drawingml/2006/main" xmlns:r="http://schemas.openxmlformats.org/officeDocument/2006/relationships" xmlns:p="http://schemas.openxmlformats.org/presentationml/2006/main">
+  <p:cSld>
+    <p:spTree>
+      <p:nvGrpSpPr>
+        <p:cNvPr id="1" name=""/>
+        <p:cNvGrpSpPr/>
+        <p:nvPr/>
+      </p:nvGrpSpPr>
+      <p:grpSpPr>
+        <a:xfrm>
+          <a:off x="0" y="0"/>
+          <a:ext cx="0" cy="0"/>
+          <a:chOff x="0" y="0"/>
+          <a:chExt cx="0" cy="0"/>
+        </a:xfrm>
+      </p:grpSpPr>
+      <p:sp>
+        <p:nvSpPr>
+          <p:cNvPr id="2" name="Cím 1">
+            <a:extLst>
+              <a:ext uri="{FF2B5EF4-FFF2-40B4-BE49-F238E27FC236}">
+                <a16:creationId xmlns:a16="http://schemas.microsoft.com/office/drawing/2014/main" id="{57CCEA94-6D2B-4544-8D09-128CB9A0B3F2}"/>
+              </a:ext>
+            </a:extLst>
+          </p:cNvPr>
+          <p:cNvSpPr>
+            <a:spLocks noGrp="1"/>
+          </p:cNvSpPr>
+          <p:nvPr>
+            <p:ph type="title"/>
+          </p:nvPr>
+        </p:nvSpPr>
+        <p:spPr/>
+        <p:txBody>
+          <a:bodyPr/>
+          <a:lstStyle/>
+          <a:p>
+            <a:r>
+              <a:rPr lang="hu-HU" dirty="0"/>
+              <a:t>Feladatok felosztása</a:t>
+            </a:r>
+          </a:p>
+        </p:txBody>
+      </p:sp>
+      <p:sp>
+        <p:nvSpPr>
+          <p:cNvPr id="9" name="Szöveg helye 8">
+            <a:extLst>
+              <a:ext uri="{FF2B5EF4-FFF2-40B4-BE49-F238E27FC236}">
+                <a16:creationId xmlns:a16="http://schemas.microsoft.com/office/drawing/2014/main" id="{F7DF4516-0EEF-4AFC-9EC0-BFE62AA0C32B}"/>
+              </a:ext>
+            </a:extLst>
+          </p:cNvPr>
+          <p:cNvSpPr>
+            <a:spLocks noGrp="1"/>
+          </p:cNvSpPr>
+          <p:nvPr>
+            <p:ph type="body" idx="1"/>
+          </p:nvPr>
+        </p:nvSpPr>
+        <p:spPr/>
+        <p:txBody>
+          <a:bodyPr/>
+          <a:lstStyle/>
+          <a:p>
+            <a:r>
+              <a:rPr lang="hu-HU" dirty="0"/>
+              <a:t>Csuka Tamás József</a:t>
+            </a:r>
+          </a:p>
+        </p:txBody>
+      </p:sp>
+      <p:sp>
+        <p:nvSpPr>
+          <p:cNvPr id="10" name="Tartalom helye 9">
+            <a:extLst>
+              <a:ext uri="{FF2B5EF4-FFF2-40B4-BE49-F238E27FC236}">
+                <a16:creationId xmlns:a16="http://schemas.microsoft.com/office/drawing/2014/main" id="{B13D6331-A17C-43C2-90FE-C03EDC171D8B}"/>
+              </a:ext>
+            </a:extLst>
+          </p:cNvPr>
+          <p:cNvSpPr>
+            <a:spLocks noGrp="1"/>
+          </p:cNvSpPr>
+          <p:nvPr>
+            <p:ph sz="half" idx="2"/>
+          </p:nvPr>
+        </p:nvSpPr>
+        <p:spPr/>
+        <p:txBody>
+          <a:bodyPr/>
+          <a:lstStyle/>
+          <a:p>
+            <a:endParaRPr lang="hu-HU"/>
+          </a:p>
+        </p:txBody>
+      </p:sp>
+      <p:sp>
+        <p:nvSpPr>
+          <p:cNvPr id="11" name="Szöveg helye 10">
+            <a:extLst>
+              <a:ext uri="{FF2B5EF4-FFF2-40B4-BE49-F238E27FC236}">
+                <a16:creationId xmlns:a16="http://schemas.microsoft.com/office/drawing/2014/main" id="{B73DDD0E-4E99-4524-8866-62B68A816A52}"/>
+              </a:ext>
+            </a:extLst>
+          </p:cNvPr>
+          <p:cNvSpPr>
+            <a:spLocks noGrp="1"/>
+          </p:cNvSpPr>
+          <p:nvPr>
+            <p:ph type="body" sz="quarter" idx="3"/>
+          </p:nvPr>
+        </p:nvSpPr>
+        <p:spPr/>
+        <p:txBody>
+          <a:bodyPr/>
+          <a:lstStyle/>
+          <a:p>
+            <a:r>
+              <a:rPr lang="hu-HU" dirty="0"/>
+              <a:t>Paller Péter Décse</a:t>
+            </a:r>
+          </a:p>
+        </p:txBody>
+      </p:sp>
+      <p:sp>
+        <p:nvSpPr>
+          <p:cNvPr id="12" name="Tartalom helye 11">
+            <a:extLst>
+              <a:ext uri="{FF2B5EF4-FFF2-40B4-BE49-F238E27FC236}">
+                <a16:creationId xmlns:a16="http://schemas.microsoft.com/office/drawing/2014/main" id="{A5E46CDC-E251-459C-AF7F-2ECE7D8E2261}"/>
+              </a:ext>
+            </a:extLst>
+          </p:cNvPr>
+          <p:cNvSpPr>
+            <a:spLocks noGrp="1"/>
+          </p:cNvSpPr>
+          <p:nvPr>
+            <p:ph sz="quarter" idx="4"/>
+          </p:nvPr>
+        </p:nvSpPr>
+        <p:spPr/>
+        <p:txBody>
+          <a:bodyPr/>
+          <a:lstStyle/>
+          <a:p>
+            <a:endParaRPr lang="hu-HU"/>
+          </a:p>
+        </p:txBody>
+      </p:sp>
+    </p:spTree>
+    <p:extLst>
+      <p:ext uri="{BB962C8B-B14F-4D97-AF65-F5344CB8AC3E}">
+        <p14:creationId xmlns:p14="http://schemas.microsoft.com/office/powerpoint/2010/main" val="4048327611"/>
+      </p:ext>
+    </p:extLst>
+  </p:cSld>
+  <p:clrMapOvr>
+    <a:masterClrMapping/>
+  </p:clrMapOvr>
+  <mc:AlternateContent xmlns:mc="http://schemas.openxmlformats.org/markup-compatibility/2006">
+    <mc:Choice xmlns:p159="http://schemas.microsoft.com/office/powerpoint/2015/09/main" Requires="p159">
+      <p:transition xmlns:p14="http://schemas.microsoft.com/office/powerpoint/2010/main" spd="slow" p14:dur="2000">
+        <p159:morph option="byObject"/>
+      </p:transition>
+    </mc:Choice>
+    <mc:Fallback>
+      <p:transition spd="slow">
+        <p:fade/>
+      </p:transition>
+    </mc:Fallback>
+  </mc:AlternateContent>
+</p:sld>
+</file>
+
+<file path=ppt/slides/slide7.xml><?xml version="1.0" encoding="utf-8"?>
+<p:sld xmlns:a="http://schemas.openxmlformats.org/drawingml/2006/main" xmlns:r="http://schemas.openxmlformats.org/officeDocument/2006/relationships" xmlns:p="http://schemas.openxmlformats.org/presentationml/2006/main">
+  <p:cSld>
+    <p:spTree>
+      <p:nvGrpSpPr>
+        <p:cNvPr id="1" name=""/>
+        <p:cNvGrpSpPr/>
+        <p:nvPr/>
+      </p:nvGrpSpPr>
+      <p:grpSpPr>
+        <a:xfrm>
+          <a:off x="0" y="0"/>
+          <a:ext cx="0" cy="0"/>
+          <a:chOff x="0" y="0"/>
+          <a:chExt cx="0" cy="0"/>
+        </a:xfrm>
+      </p:grpSpPr>
+      <p:sp>
+        <p:nvSpPr>
+          <p:cNvPr id="2" name="Cím 1">
+            <a:extLst>
+              <a:ext uri="{FF2B5EF4-FFF2-40B4-BE49-F238E27FC236}">
                 <a16:creationId xmlns:a16="http://schemas.microsoft.com/office/drawing/2014/main" id="{E9DBFA4C-6CAA-4062-8EE9-523E5349E2EF}"/>
               </a:ext>
             </a:extLst>
@@ -3713,16 +4575,19 @@
           <a:bodyPr/>
           <a:lstStyle/>
           <a:p>
-            <a:endParaRPr lang="hu-HU"/>
-          </a:p>
-        </p:txBody>
-      </p:sp>
-      <p:sp>
-        <p:nvSpPr>
-          <p:cNvPr id="3" name="Tartalom helye 2">
+            <a:r>
+              <a:rPr lang="hu-HU" dirty="0"/>
+              <a:t>Program felépítése</a:t>
+            </a:r>
+          </a:p>
+        </p:txBody>
+      </p:sp>
+      <p:sp>
+        <p:nvSpPr>
+          <p:cNvPr id="4" name="Szöveg helye 3">
             <a:extLst>
               <a:ext uri="{FF2B5EF4-FFF2-40B4-BE49-F238E27FC236}">
-                <a16:creationId xmlns:a16="http://schemas.microsoft.com/office/drawing/2014/main" id="{BF4F6E75-52FF-4804-B040-4D9F99B67E0A}"/>
+                <a16:creationId xmlns:a16="http://schemas.microsoft.com/office/drawing/2014/main" id="{50CACD6F-F174-42E1-8AB0-586B6384C31E}"/>
               </a:ext>
             </a:extLst>
           </p:cNvPr>
@@ -3730,7 +4595,7 @@
             <a:spLocks noGrp="1"/>
           </p:cNvSpPr>
           <p:nvPr>
-            <p:ph idx="1"/>
+            <p:ph type="body" idx="1"/>
           </p:nvPr>
         </p:nvSpPr>
         <p:spPr/>
@@ -3752,6 +4617,208 @@
   <p:clrMapOvr>
     <a:masterClrMapping/>
   </p:clrMapOvr>
+  <mc:AlternateContent xmlns:mc="http://schemas.openxmlformats.org/markup-compatibility/2006">
+    <mc:Choice xmlns:p159="http://schemas.microsoft.com/office/powerpoint/2015/09/main" Requires="p159">
+      <p:transition xmlns:p14="http://schemas.microsoft.com/office/powerpoint/2010/main" spd="slow" p14:dur="2000">
+        <p159:morph option="byObject"/>
+      </p:transition>
+    </mc:Choice>
+    <mc:Fallback>
+      <p:transition spd="slow">
+        <p:fade/>
+      </p:transition>
+    </mc:Fallback>
+  </mc:AlternateContent>
+</p:sld>
+</file>
+
+<file path=ppt/slides/slide8.xml><?xml version="1.0" encoding="utf-8"?>
+<p:sld xmlns:a="http://schemas.openxmlformats.org/drawingml/2006/main" xmlns:r="http://schemas.openxmlformats.org/officeDocument/2006/relationships" xmlns:p="http://schemas.openxmlformats.org/presentationml/2006/main">
+  <p:cSld>
+    <p:spTree>
+      <p:nvGrpSpPr>
+        <p:cNvPr id="1" name=""/>
+        <p:cNvGrpSpPr/>
+        <p:nvPr/>
+      </p:nvGrpSpPr>
+      <p:grpSpPr>
+        <a:xfrm>
+          <a:off x="0" y="0"/>
+          <a:ext cx="0" cy="0"/>
+          <a:chOff x="0" y="0"/>
+          <a:chExt cx="0" cy="0"/>
+        </a:xfrm>
+      </p:grpSpPr>
+      <p:sp>
+        <p:nvSpPr>
+          <p:cNvPr id="2" name="Cím 1">
+            <a:extLst>
+              <a:ext uri="{FF2B5EF4-FFF2-40B4-BE49-F238E27FC236}">
+                <a16:creationId xmlns:a16="http://schemas.microsoft.com/office/drawing/2014/main" id="{2B1B7EAA-8ED1-4108-B800-32C6CC05FB05}"/>
+              </a:ext>
+            </a:extLst>
+          </p:cNvPr>
+          <p:cNvSpPr>
+            <a:spLocks noGrp="1"/>
+          </p:cNvSpPr>
+          <p:nvPr>
+            <p:ph type="title"/>
+          </p:nvPr>
+        </p:nvSpPr>
+        <p:spPr/>
+        <p:txBody>
+          <a:bodyPr/>
+          <a:lstStyle/>
+          <a:p>
+            <a:r>
+              <a:rPr lang="hu-HU" dirty="0"/>
+              <a:t>Frontend</a:t>
+            </a:r>
+          </a:p>
+        </p:txBody>
+      </p:sp>
+      <p:sp>
+        <p:nvSpPr>
+          <p:cNvPr id="3" name="Tartalom helye 2">
+            <a:extLst>
+              <a:ext uri="{FF2B5EF4-FFF2-40B4-BE49-F238E27FC236}">
+                <a16:creationId xmlns:a16="http://schemas.microsoft.com/office/drawing/2014/main" id="{197E9A83-9A18-4295-9977-1301A8B2A1B2}"/>
+              </a:ext>
+            </a:extLst>
+          </p:cNvPr>
+          <p:cNvSpPr>
+            <a:spLocks noGrp="1"/>
+          </p:cNvSpPr>
+          <p:nvPr>
+            <p:ph idx="1"/>
+          </p:nvPr>
+        </p:nvSpPr>
+        <p:spPr/>
+        <p:txBody>
+          <a:bodyPr/>
+          <a:lstStyle/>
+          <a:p>
+            <a:endParaRPr lang="hu-HU"/>
+          </a:p>
+        </p:txBody>
+      </p:sp>
+    </p:spTree>
+    <p:extLst>
+      <p:ext uri="{BB962C8B-B14F-4D97-AF65-F5344CB8AC3E}">
+        <p14:creationId xmlns:p14="http://schemas.microsoft.com/office/powerpoint/2010/main" val="1051907204"/>
+      </p:ext>
+    </p:extLst>
+  </p:cSld>
+  <p:clrMapOvr>
+    <a:masterClrMapping/>
+  </p:clrMapOvr>
+  <mc:AlternateContent xmlns:mc="http://schemas.openxmlformats.org/markup-compatibility/2006">
+    <mc:Choice xmlns:p159="http://schemas.microsoft.com/office/powerpoint/2015/09/main" Requires="p159">
+      <p:transition xmlns:p14="http://schemas.microsoft.com/office/powerpoint/2010/main" spd="slow" p14:dur="2000">
+        <p159:morph option="byObject"/>
+      </p:transition>
+    </mc:Choice>
+    <mc:Fallback>
+      <p:transition spd="slow">
+        <p:fade/>
+      </p:transition>
+    </mc:Fallback>
+  </mc:AlternateContent>
+</p:sld>
+</file>
+
+<file path=ppt/slides/slide9.xml><?xml version="1.0" encoding="utf-8"?>
+<p:sld xmlns:a="http://schemas.openxmlformats.org/drawingml/2006/main" xmlns:r="http://schemas.openxmlformats.org/officeDocument/2006/relationships" xmlns:p="http://schemas.openxmlformats.org/presentationml/2006/main">
+  <p:cSld>
+    <p:spTree>
+      <p:nvGrpSpPr>
+        <p:cNvPr id="1" name=""/>
+        <p:cNvGrpSpPr/>
+        <p:nvPr/>
+      </p:nvGrpSpPr>
+      <p:grpSpPr>
+        <a:xfrm>
+          <a:off x="0" y="0"/>
+          <a:ext cx="0" cy="0"/>
+          <a:chOff x="0" y="0"/>
+          <a:chExt cx="0" cy="0"/>
+        </a:xfrm>
+      </p:grpSpPr>
+      <p:sp>
+        <p:nvSpPr>
+          <p:cNvPr id="2" name="Cím 1">
+            <a:extLst>
+              <a:ext uri="{FF2B5EF4-FFF2-40B4-BE49-F238E27FC236}">
+                <a16:creationId xmlns:a16="http://schemas.microsoft.com/office/drawing/2014/main" id="{AE7A394C-08C6-4733-8683-DF32A5E3D9A1}"/>
+              </a:ext>
+            </a:extLst>
+          </p:cNvPr>
+          <p:cNvSpPr>
+            <a:spLocks noGrp="1"/>
+          </p:cNvSpPr>
+          <p:nvPr>
+            <p:ph type="title"/>
+          </p:nvPr>
+        </p:nvSpPr>
+        <p:spPr/>
+        <p:txBody>
+          <a:bodyPr/>
+          <a:lstStyle/>
+          <a:p>
+            <a:r>
+              <a:rPr lang="hu-HU" dirty="0"/>
+              <a:t>Backend</a:t>
+            </a:r>
+          </a:p>
+        </p:txBody>
+      </p:sp>
+      <p:sp>
+        <p:nvSpPr>
+          <p:cNvPr id="3" name="Tartalom helye 2">
+            <a:extLst>
+              <a:ext uri="{FF2B5EF4-FFF2-40B4-BE49-F238E27FC236}">
+                <a16:creationId xmlns:a16="http://schemas.microsoft.com/office/drawing/2014/main" id="{FE580785-C82D-4D70-8F17-4BD29507C6AB}"/>
+              </a:ext>
+            </a:extLst>
+          </p:cNvPr>
+          <p:cNvSpPr>
+            <a:spLocks noGrp="1"/>
+          </p:cNvSpPr>
+          <p:nvPr>
+            <p:ph idx="1"/>
+          </p:nvPr>
+        </p:nvSpPr>
+        <p:spPr/>
+        <p:txBody>
+          <a:bodyPr/>
+          <a:lstStyle/>
+          <a:p>
+            <a:endParaRPr lang="hu-HU"/>
+          </a:p>
+        </p:txBody>
+      </p:sp>
+    </p:spTree>
+    <p:extLst>
+      <p:ext uri="{BB962C8B-B14F-4D97-AF65-F5344CB8AC3E}">
+        <p14:creationId xmlns:p14="http://schemas.microsoft.com/office/powerpoint/2010/main" val="2862999257"/>
+      </p:ext>
+    </p:extLst>
+  </p:cSld>
+  <p:clrMapOvr>
+    <a:masterClrMapping/>
+  </p:clrMapOvr>
+  <mc:AlternateContent xmlns:mc="http://schemas.openxmlformats.org/markup-compatibility/2006">
+    <mc:Choice xmlns:p159="http://schemas.microsoft.com/office/powerpoint/2015/09/main" Requires="p159">
+      <p:transition xmlns:p14="http://schemas.microsoft.com/office/powerpoint/2010/main" spd="slow" p14:dur="2000">
+        <p159:morph option="byObject"/>
+      </p:transition>
+    </mc:Choice>
+    <mc:Fallback>
+      <p:transition spd="slow">
+        <p:fade/>
+      </p:transition>
+    </mc:Fallback>
+  </mc:AlternateContent>
 </p:sld>
 </file>
 

--- a/szerkesztendo_dokumentumok/prezentacio_REKA.pptx
+++ b/szerkesztendo_dokumentumok/prezentacio_REKA.pptx
@@ -4,6 +4,9 @@
   <p:sldMasterIdLst>
     <p:sldMasterId id="2147483660" r:id="rId1"/>
   </p:sldMasterIdLst>
+  <p:notesMasterIdLst>
+    <p:notesMasterId r:id="rId16"/>
+  </p:notesMasterIdLst>
   <p:sldIdLst>
     <p:sldId id="256" r:id="rId2"/>
     <p:sldId id="257" r:id="rId3"/>
@@ -125,6 +128,562 @@
 </p:presentation>
 </file>
 
+<file path=ppt/notesMasters/notesMaster1.xml><?xml version="1.0" encoding="utf-8"?>
+<p:notesMaster xmlns:a="http://schemas.openxmlformats.org/drawingml/2006/main" xmlns:r="http://schemas.openxmlformats.org/officeDocument/2006/relationships" xmlns:p="http://schemas.openxmlformats.org/presentationml/2006/main">
+  <p:cSld>
+    <p:bg>
+      <p:bgRef idx="1001">
+        <a:schemeClr val="bg1"/>
+      </p:bgRef>
+    </p:bg>
+    <p:spTree>
+      <p:nvGrpSpPr>
+        <p:cNvPr id="1" name=""/>
+        <p:cNvGrpSpPr/>
+        <p:nvPr/>
+      </p:nvGrpSpPr>
+      <p:grpSpPr>
+        <a:xfrm>
+          <a:off x="0" y="0"/>
+          <a:ext cx="0" cy="0"/>
+          <a:chOff x="0" y="0"/>
+          <a:chExt cx="0" cy="0"/>
+        </a:xfrm>
+      </p:grpSpPr>
+      <p:sp>
+        <p:nvSpPr>
+          <p:cNvPr id="2" name="Élőfej helye 1"/>
+          <p:cNvSpPr>
+            <a:spLocks noGrp="1"/>
+          </p:cNvSpPr>
+          <p:nvPr>
+            <p:ph type="hdr" sz="quarter"/>
+          </p:nvPr>
+        </p:nvSpPr>
+        <p:spPr>
+          <a:xfrm>
+            <a:off x="0" y="0"/>
+            <a:ext cx="2971800" cy="458788"/>
+          </a:xfrm>
+          <a:prstGeom prst="rect">
+            <a:avLst/>
+          </a:prstGeom>
+        </p:spPr>
+        <p:txBody>
+          <a:bodyPr vert="horz" lIns="91440" tIns="45720" rIns="91440" bIns="45720" rtlCol="0"/>
+          <a:lstStyle>
+            <a:lvl1pPr algn="l">
+              <a:defRPr sz="1200"/>
+            </a:lvl1pPr>
+          </a:lstStyle>
+          <a:p>
+            <a:endParaRPr lang="hu-HU"/>
+          </a:p>
+        </p:txBody>
+      </p:sp>
+      <p:sp>
+        <p:nvSpPr>
+          <p:cNvPr id="3" name="Dátum helye 2"/>
+          <p:cNvSpPr>
+            <a:spLocks noGrp="1"/>
+          </p:cNvSpPr>
+          <p:nvPr>
+            <p:ph type="dt" idx="1"/>
+          </p:nvPr>
+        </p:nvSpPr>
+        <p:spPr>
+          <a:xfrm>
+            <a:off x="3884613" y="0"/>
+            <a:ext cx="2971800" cy="458788"/>
+          </a:xfrm>
+          <a:prstGeom prst="rect">
+            <a:avLst/>
+          </a:prstGeom>
+        </p:spPr>
+        <p:txBody>
+          <a:bodyPr vert="horz" lIns="91440" tIns="45720" rIns="91440" bIns="45720" rtlCol="0"/>
+          <a:lstStyle>
+            <a:lvl1pPr algn="r">
+              <a:defRPr sz="1200"/>
+            </a:lvl1pPr>
+          </a:lstStyle>
+          <a:p>
+            <a:fld id="{5EB04AAB-0187-4F39-A3C3-445085015435}" type="datetimeFigureOut">
+              <a:rPr lang="hu-HU" smtClean="0"/>
+              <a:t>2026. 03. 06.</a:t>
+            </a:fld>
+            <a:endParaRPr lang="hu-HU"/>
+          </a:p>
+        </p:txBody>
+      </p:sp>
+      <p:sp>
+        <p:nvSpPr>
+          <p:cNvPr id="4" name="Diakép helye 3"/>
+          <p:cNvSpPr>
+            <a:spLocks noGrp="1" noRot="1" noChangeAspect="1"/>
+          </p:cNvSpPr>
+          <p:nvPr>
+            <p:ph type="sldImg" idx="2"/>
+          </p:nvPr>
+        </p:nvSpPr>
+        <p:spPr>
+          <a:xfrm>
+            <a:off x="685800" y="1143000"/>
+            <a:ext cx="5486400" cy="3086100"/>
+          </a:xfrm>
+          <a:prstGeom prst="rect">
+            <a:avLst/>
+          </a:prstGeom>
+          <a:noFill/>
+          <a:ln w="12700">
+            <a:solidFill>
+              <a:prstClr val="black"/>
+            </a:solidFill>
+          </a:ln>
+        </p:spPr>
+        <p:txBody>
+          <a:bodyPr vert="horz" lIns="91440" tIns="45720" rIns="91440" bIns="45720" rtlCol="0" anchor="ctr"/>
+          <a:lstStyle/>
+          <a:p>
+            <a:endParaRPr lang="hu-HU"/>
+          </a:p>
+        </p:txBody>
+      </p:sp>
+      <p:sp>
+        <p:nvSpPr>
+          <p:cNvPr id="5" name="Jegyzetek helye 4"/>
+          <p:cNvSpPr>
+            <a:spLocks noGrp="1"/>
+          </p:cNvSpPr>
+          <p:nvPr>
+            <p:ph type="body" sz="quarter" idx="3"/>
+          </p:nvPr>
+        </p:nvSpPr>
+        <p:spPr>
+          <a:xfrm>
+            <a:off x="685800" y="4400550"/>
+            <a:ext cx="5486400" cy="3600450"/>
+          </a:xfrm>
+          <a:prstGeom prst="rect">
+            <a:avLst/>
+          </a:prstGeom>
+        </p:spPr>
+        <p:txBody>
+          <a:bodyPr vert="horz" lIns="91440" tIns="45720" rIns="91440" bIns="45720" rtlCol="0"/>
+          <a:lstStyle/>
+          <a:p>
+            <a:pPr lvl="0"/>
+            <a:r>
+              <a:rPr lang="hu-HU"/>
+              <a:t>Mintaszöveg szerkesztése</a:t>
+            </a:r>
+          </a:p>
+          <a:p>
+            <a:pPr lvl="1"/>
+            <a:r>
+              <a:rPr lang="hu-HU"/>
+              <a:t>Második szint</a:t>
+            </a:r>
+          </a:p>
+          <a:p>
+            <a:pPr lvl="2"/>
+            <a:r>
+              <a:rPr lang="hu-HU"/>
+              <a:t>Harmadik szint</a:t>
+            </a:r>
+          </a:p>
+          <a:p>
+            <a:pPr lvl="3"/>
+            <a:r>
+              <a:rPr lang="hu-HU"/>
+              <a:t>Negyedik szint</a:t>
+            </a:r>
+          </a:p>
+          <a:p>
+            <a:pPr lvl="4"/>
+            <a:r>
+              <a:rPr lang="hu-HU"/>
+              <a:t>Ötödik szint</a:t>
+            </a:r>
+          </a:p>
+        </p:txBody>
+      </p:sp>
+      <p:sp>
+        <p:nvSpPr>
+          <p:cNvPr id="6" name="Élőláb helye 5"/>
+          <p:cNvSpPr>
+            <a:spLocks noGrp="1"/>
+          </p:cNvSpPr>
+          <p:nvPr>
+            <p:ph type="ftr" sz="quarter" idx="4"/>
+          </p:nvPr>
+        </p:nvSpPr>
+        <p:spPr>
+          <a:xfrm>
+            <a:off x="0" y="8685213"/>
+            <a:ext cx="2971800" cy="458787"/>
+          </a:xfrm>
+          <a:prstGeom prst="rect">
+            <a:avLst/>
+          </a:prstGeom>
+        </p:spPr>
+        <p:txBody>
+          <a:bodyPr vert="horz" lIns="91440" tIns="45720" rIns="91440" bIns="45720" rtlCol="0" anchor="b"/>
+          <a:lstStyle>
+            <a:lvl1pPr algn="l">
+              <a:defRPr sz="1200"/>
+            </a:lvl1pPr>
+          </a:lstStyle>
+          <a:p>
+            <a:endParaRPr lang="hu-HU"/>
+          </a:p>
+        </p:txBody>
+      </p:sp>
+      <p:sp>
+        <p:nvSpPr>
+          <p:cNvPr id="7" name="Dia számának helye 6"/>
+          <p:cNvSpPr>
+            <a:spLocks noGrp="1"/>
+          </p:cNvSpPr>
+          <p:nvPr>
+            <p:ph type="sldNum" sz="quarter" idx="5"/>
+          </p:nvPr>
+        </p:nvSpPr>
+        <p:spPr>
+          <a:xfrm>
+            <a:off x="3884613" y="8685213"/>
+            <a:ext cx="2971800" cy="458787"/>
+          </a:xfrm>
+          <a:prstGeom prst="rect">
+            <a:avLst/>
+          </a:prstGeom>
+        </p:spPr>
+        <p:txBody>
+          <a:bodyPr vert="horz" lIns="91440" tIns="45720" rIns="91440" bIns="45720" rtlCol="0" anchor="b"/>
+          <a:lstStyle>
+            <a:lvl1pPr algn="r">
+              <a:defRPr sz="1200"/>
+            </a:lvl1pPr>
+          </a:lstStyle>
+          <a:p>
+            <a:fld id="{A6A89ECC-2295-4F7B-B00D-8E6011BB80FB}" type="slidenum">
+              <a:rPr lang="hu-HU" smtClean="0"/>
+              <a:t>‹#›</a:t>
+            </a:fld>
+            <a:endParaRPr lang="hu-HU"/>
+          </a:p>
+        </p:txBody>
+      </p:sp>
+    </p:spTree>
+    <p:extLst>
+      <p:ext uri="{BB962C8B-B14F-4D97-AF65-F5344CB8AC3E}">
+        <p14:creationId xmlns:p14="http://schemas.microsoft.com/office/powerpoint/2010/main" val="3365823935"/>
+      </p:ext>
+    </p:extLst>
+  </p:cSld>
+  <p:clrMap bg1="lt1" tx1="dk1" bg2="lt2" tx2="dk2" accent1="accent1" accent2="accent2" accent3="accent3" accent4="accent4" accent5="accent5" accent6="accent6" hlink="hlink" folHlink="folHlink"/>
+  <p:notesStyle>
+    <a:lvl1pPr marL="0" algn="l" defTabSz="914400" rtl="0" eaLnBrk="1" latinLnBrk="0" hangingPunct="1">
+      <a:defRPr sz="1200" kern="1200">
+        <a:solidFill>
+          <a:schemeClr val="tx1"/>
+        </a:solidFill>
+        <a:latin typeface="+mn-lt"/>
+        <a:ea typeface="+mn-ea"/>
+        <a:cs typeface="+mn-cs"/>
+      </a:defRPr>
+    </a:lvl1pPr>
+    <a:lvl2pPr marL="457200" algn="l" defTabSz="914400" rtl="0" eaLnBrk="1" latinLnBrk="0" hangingPunct="1">
+      <a:defRPr sz="1200" kern="1200">
+        <a:solidFill>
+          <a:schemeClr val="tx1"/>
+        </a:solidFill>
+        <a:latin typeface="+mn-lt"/>
+        <a:ea typeface="+mn-ea"/>
+        <a:cs typeface="+mn-cs"/>
+      </a:defRPr>
+    </a:lvl2pPr>
+    <a:lvl3pPr marL="914400" algn="l" defTabSz="914400" rtl="0" eaLnBrk="1" latinLnBrk="0" hangingPunct="1">
+      <a:defRPr sz="1200" kern="1200">
+        <a:solidFill>
+          <a:schemeClr val="tx1"/>
+        </a:solidFill>
+        <a:latin typeface="+mn-lt"/>
+        <a:ea typeface="+mn-ea"/>
+        <a:cs typeface="+mn-cs"/>
+      </a:defRPr>
+    </a:lvl3pPr>
+    <a:lvl4pPr marL="1371600" algn="l" defTabSz="914400" rtl="0" eaLnBrk="1" latinLnBrk="0" hangingPunct="1">
+      <a:defRPr sz="1200" kern="1200">
+        <a:solidFill>
+          <a:schemeClr val="tx1"/>
+        </a:solidFill>
+        <a:latin typeface="+mn-lt"/>
+        <a:ea typeface="+mn-ea"/>
+        <a:cs typeface="+mn-cs"/>
+      </a:defRPr>
+    </a:lvl4pPr>
+    <a:lvl5pPr marL="1828800" algn="l" defTabSz="914400" rtl="0" eaLnBrk="1" latinLnBrk="0" hangingPunct="1">
+      <a:defRPr sz="1200" kern="1200">
+        <a:solidFill>
+          <a:schemeClr val="tx1"/>
+        </a:solidFill>
+        <a:latin typeface="+mn-lt"/>
+        <a:ea typeface="+mn-ea"/>
+        <a:cs typeface="+mn-cs"/>
+      </a:defRPr>
+    </a:lvl5pPr>
+    <a:lvl6pPr marL="2286000" algn="l" defTabSz="914400" rtl="0" eaLnBrk="1" latinLnBrk="0" hangingPunct="1">
+      <a:defRPr sz="1200" kern="1200">
+        <a:solidFill>
+          <a:schemeClr val="tx1"/>
+        </a:solidFill>
+        <a:latin typeface="+mn-lt"/>
+        <a:ea typeface="+mn-ea"/>
+        <a:cs typeface="+mn-cs"/>
+      </a:defRPr>
+    </a:lvl6pPr>
+    <a:lvl7pPr marL="2743200" algn="l" defTabSz="914400" rtl="0" eaLnBrk="1" latinLnBrk="0" hangingPunct="1">
+      <a:defRPr sz="1200" kern="1200">
+        <a:solidFill>
+          <a:schemeClr val="tx1"/>
+        </a:solidFill>
+        <a:latin typeface="+mn-lt"/>
+        <a:ea typeface="+mn-ea"/>
+        <a:cs typeface="+mn-cs"/>
+      </a:defRPr>
+    </a:lvl7pPr>
+    <a:lvl8pPr marL="3200400" algn="l" defTabSz="914400" rtl="0" eaLnBrk="1" latinLnBrk="0" hangingPunct="1">
+      <a:defRPr sz="1200" kern="1200">
+        <a:solidFill>
+          <a:schemeClr val="tx1"/>
+        </a:solidFill>
+        <a:latin typeface="+mn-lt"/>
+        <a:ea typeface="+mn-ea"/>
+        <a:cs typeface="+mn-cs"/>
+      </a:defRPr>
+    </a:lvl8pPr>
+    <a:lvl9pPr marL="3657600" algn="l" defTabSz="914400" rtl="0" eaLnBrk="1" latinLnBrk="0" hangingPunct="1">
+      <a:defRPr sz="1200" kern="1200">
+        <a:solidFill>
+          <a:schemeClr val="tx1"/>
+        </a:solidFill>
+        <a:latin typeface="+mn-lt"/>
+        <a:ea typeface="+mn-ea"/>
+        <a:cs typeface="+mn-cs"/>
+      </a:defRPr>
+    </a:lvl9pPr>
+  </p:notesStyle>
+</p:notesMaster>
+</file>
+
+<file path=ppt/notesSlides/notesSlide1.xml><?xml version="1.0" encoding="utf-8"?>
+<p:notes xmlns:a="http://schemas.openxmlformats.org/drawingml/2006/main" xmlns:r="http://schemas.openxmlformats.org/officeDocument/2006/relationships" xmlns:p="http://schemas.openxmlformats.org/presentationml/2006/main">
+  <p:cSld>
+    <p:spTree>
+      <p:nvGrpSpPr>
+        <p:cNvPr id="1" name=""/>
+        <p:cNvGrpSpPr/>
+        <p:nvPr/>
+      </p:nvGrpSpPr>
+      <p:grpSpPr>
+        <a:xfrm>
+          <a:off x="0" y="0"/>
+          <a:ext cx="0" cy="0"/>
+          <a:chOff x="0" y="0"/>
+          <a:chExt cx="0" cy="0"/>
+        </a:xfrm>
+      </p:grpSpPr>
+      <p:sp>
+        <p:nvSpPr>
+          <p:cNvPr id="2" name="Diakép helye 1"/>
+          <p:cNvSpPr>
+            <a:spLocks noGrp="1" noRot="1" noChangeAspect="1"/>
+          </p:cNvSpPr>
+          <p:nvPr>
+            <p:ph type="sldImg"/>
+          </p:nvPr>
+        </p:nvSpPr>
+        <p:spPr/>
+      </p:sp>
+      <p:sp>
+        <p:nvSpPr>
+          <p:cNvPr id="3" name="Jegyzetek helye 2"/>
+          <p:cNvSpPr>
+            <a:spLocks noGrp="1"/>
+          </p:cNvSpPr>
+          <p:nvPr>
+            <p:ph type="body" idx="1"/>
+          </p:nvPr>
+        </p:nvSpPr>
+        <p:spPr/>
+        <p:txBody>
+          <a:bodyPr/>
+          <a:lstStyle/>
+          <a:p>
+            <a:r>
+              <a:rPr lang="hu-HU" dirty="0"/>
+              <a:t>2026-ban számos kereskedelemmel foglalkozó KKV papíralapon vagy elavult táblázatkezelőkben végzi adminisztrációs feladatait.</a:t>
+            </a:r>
+          </a:p>
+          <a:p>
+            <a:r>
+              <a:rPr lang="hu-HU" dirty="0"/>
+              <a:t>Ide tartozik a rendelések rögzítése, összekészítése és a fuvarlevek kiállítása.</a:t>
+            </a:r>
+          </a:p>
+          <a:p>
+            <a:r>
+              <a:rPr lang="hu-HU" dirty="0"/>
+              <a:t>Ezek a folyamatok időigényesek, hibalehetőségekkel terheltek és a növekvő cégeknél nehezen átláthatóak</a:t>
+            </a:r>
+          </a:p>
+          <a:p>
+            <a:endParaRPr lang="hu-HU" dirty="0"/>
+          </a:p>
+        </p:txBody>
+      </p:sp>
+      <p:sp>
+        <p:nvSpPr>
+          <p:cNvPr id="4" name="Dia számának helye 3"/>
+          <p:cNvSpPr>
+            <a:spLocks noGrp="1"/>
+          </p:cNvSpPr>
+          <p:nvPr>
+            <p:ph type="sldNum" sz="quarter" idx="5"/>
+          </p:nvPr>
+        </p:nvSpPr>
+        <p:spPr/>
+        <p:txBody>
+          <a:bodyPr/>
+          <a:lstStyle/>
+          <a:p>
+            <a:fld id="{A6A89ECC-2295-4F7B-B00D-8E6011BB80FB}" type="slidenum">
+              <a:rPr lang="hu-HU" smtClean="0"/>
+              <a:t>2</a:t>
+            </a:fld>
+            <a:endParaRPr lang="hu-HU"/>
+          </a:p>
+        </p:txBody>
+      </p:sp>
+    </p:spTree>
+    <p:extLst>
+      <p:ext uri="{BB962C8B-B14F-4D97-AF65-F5344CB8AC3E}">
+        <p14:creationId xmlns:p14="http://schemas.microsoft.com/office/powerpoint/2010/main" val="3817140689"/>
+      </p:ext>
+    </p:extLst>
+  </p:cSld>
+  <p:clrMapOvr>
+    <a:masterClrMapping/>
+  </p:clrMapOvr>
+</p:notes>
+</file>
+
+<file path=ppt/notesSlides/notesSlide2.xml><?xml version="1.0" encoding="utf-8"?>
+<p:notes xmlns:a="http://schemas.openxmlformats.org/drawingml/2006/main" xmlns:r="http://schemas.openxmlformats.org/officeDocument/2006/relationships" xmlns:p="http://schemas.openxmlformats.org/presentationml/2006/main">
+  <p:cSld>
+    <p:spTree>
+      <p:nvGrpSpPr>
+        <p:cNvPr id="1" name=""/>
+        <p:cNvGrpSpPr/>
+        <p:nvPr/>
+      </p:nvGrpSpPr>
+      <p:grpSpPr>
+        <a:xfrm>
+          <a:off x="0" y="0"/>
+          <a:ext cx="0" cy="0"/>
+          <a:chOff x="0" y="0"/>
+          <a:chExt cx="0" cy="0"/>
+        </a:xfrm>
+      </p:grpSpPr>
+      <p:sp>
+        <p:nvSpPr>
+          <p:cNvPr id="2" name="Diakép helye 1"/>
+          <p:cNvSpPr>
+            <a:spLocks noGrp="1" noRot="1" noChangeAspect="1"/>
+          </p:cNvSpPr>
+          <p:nvPr>
+            <p:ph type="sldImg"/>
+          </p:nvPr>
+        </p:nvSpPr>
+        <p:spPr/>
+      </p:sp>
+      <p:sp>
+        <p:nvSpPr>
+          <p:cNvPr id="3" name="Jegyzetek helye 2"/>
+          <p:cNvSpPr>
+            <a:spLocks noGrp="1"/>
+          </p:cNvSpPr>
+          <p:nvPr>
+            <p:ph type="body" idx="1"/>
+          </p:nvPr>
+        </p:nvSpPr>
+        <p:spPr/>
+        <p:txBody>
+          <a:bodyPr/>
+          <a:lstStyle/>
+          <a:p>
+            <a:r>
+              <a:rPr lang="hu-HU" dirty="0"/>
+              <a:t>Rendeléskezelés: Új rendelés rögzítése, Rendelések státuszainak követése, Rendelések összekészítési listájának automatikus generálása, számlázási és szállítási adatok kezelése </a:t>
+            </a:r>
+          </a:p>
+          <a:p>
+            <a:r>
+              <a:rPr lang="hu-HU" dirty="0"/>
+              <a:t>Katalóguskezelés: Termékek adatainak tárolása, Termékkategóriák létrehozása és karbantartása, Keresés és szűrés termékek között </a:t>
+            </a:r>
+          </a:p>
+          <a:p>
+            <a:r>
+              <a:rPr lang="hu-HU" dirty="0"/>
+              <a:t>Készletezés: Leltárkezelés, Automatikus készletcsökkentés rendelés teljesítésekor, Minimum készletszint figyelés, riasztás </a:t>
+            </a:r>
+          </a:p>
+          <a:p>
+            <a:r>
+              <a:rPr lang="hu-HU" dirty="0"/>
+              <a:t>Adminisztráció: Felhasználói jogosultságkezelés, Riportok és statisztikák</a:t>
+            </a:r>
+          </a:p>
+        </p:txBody>
+      </p:sp>
+      <p:sp>
+        <p:nvSpPr>
+          <p:cNvPr id="4" name="Dia számának helye 3"/>
+          <p:cNvSpPr>
+            <a:spLocks noGrp="1"/>
+          </p:cNvSpPr>
+          <p:nvPr>
+            <p:ph type="sldNum" sz="quarter" idx="5"/>
+          </p:nvPr>
+        </p:nvSpPr>
+        <p:spPr/>
+        <p:txBody>
+          <a:bodyPr/>
+          <a:lstStyle/>
+          <a:p>
+            <a:fld id="{A6A89ECC-2295-4F7B-B00D-8E6011BB80FB}" type="slidenum">
+              <a:rPr lang="hu-HU" smtClean="0"/>
+              <a:t>3</a:t>
+            </a:fld>
+            <a:endParaRPr lang="hu-HU"/>
+          </a:p>
+        </p:txBody>
+      </p:sp>
+    </p:spTree>
+    <p:extLst>
+      <p:ext uri="{BB962C8B-B14F-4D97-AF65-F5344CB8AC3E}">
+        <p14:creationId xmlns:p14="http://schemas.microsoft.com/office/powerpoint/2010/main" val="159847480"/>
+      </p:ext>
+    </p:extLst>
+  </p:cSld>
+  <p:clrMapOvr>
+    <a:masterClrMapping/>
+  </p:clrMapOvr>
+</p:notes>
+</file>
+
 <file path=ppt/slideLayouts/slideLayout1.xml><?xml version="1.0" encoding="utf-8"?>
 <p:sldLayout xmlns:a="http://schemas.openxmlformats.org/drawingml/2006/main" xmlns:r="http://schemas.openxmlformats.org/officeDocument/2006/relationships" xmlns:p="http://schemas.openxmlformats.org/presentationml/2006/main" showMasterSp="0" type="title" preserve="1">
   <p:cSld name="Címdia">
@@ -301,7 +860,7 @@
           <a:p>
             <a:fld id="{96DFF08F-DC6B-4601-B491-B0F83F6DD2DA}" type="datetimeFigureOut">
               <a:rPr lang="en-US" smtClean="0"/>
-              <a:t>3/4/2026</a:t>
+              <a:t>3/6/2026</a:t>
             </a:fld>
             <a:endParaRPr lang="en-US" dirty="0"/>
           </a:p>
@@ -471,7 +1030,7 @@
           <a:p>
             <a:fld id="{96DFF08F-DC6B-4601-B491-B0F83F6DD2DA}" type="datetimeFigureOut">
               <a:rPr lang="en-US" smtClean="0"/>
-              <a:t>3/4/2026</a:t>
+              <a:t>3/6/2026</a:t>
             </a:fld>
             <a:endParaRPr lang="en-US" dirty="0"/>
           </a:p>
@@ -694,7 +1253,7 @@
           <a:p>
             <a:fld id="{96DFF08F-DC6B-4601-B491-B0F83F6DD2DA}" type="datetimeFigureOut">
               <a:rPr lang="en-US" smtClean="0"/>
-              <a:t>3/4/2026</a:t>
+              <a:t>3/6/2026</a:t>
             </a:fld>
             <a:endParaRPr lang="en-US" dirty="0"/>
           </a:p>
@@ -874,7 +1433,7 @@
           <a:p>
             <a:fld id="{96DFF08F-DC6B-4601-B491-B0F83F6DD2DA}" type="datetimeFigureOut">
               <a:rPr lang="en-US" smtClean="0"/>
-              <a:t>3/4/2026</a:t>
+              <a:t>3/6/2026</a:t>
             </a:fld>
             <a:endParaRPr lang="en-US" dirty="0"/>
           </a:p>
@@ -1181,7 +1740,7 @@
             <a:fld id="{96DFF08F-DC6B-4601-B491-B0F83F6DD2DA}" type="datetimeFigureOut">
               <a:rPr lang="en-US" smtClean="0"/>
               <a:pPr/>
-              <a:t>3/4/2026</a:t>
+              <a:t>3/6/2026</a:t>
             </a:fld>
             <a:endParaRPr lang="en-US" dirty="0"/>
           </a:p>
@@ -1486,7 +2045,7 @@
           <a:p>
             <a:fld id="{96DFF08F-DC6B-4601-B491-B0F83F6DD2DA}" type="datetimeFigureOut">
               <a:rPr lang="en-US" smtClean="0"/>
-              <a:t>3/4/2026</a:t>
+              <a:t>3/6/2026</a:t>
             </a:fld>
             <a:endParaRPr lang="en-US" dirty="0"/>
           </a:p>
@@ -1908,7 +2467,7 @@
           <a:p>
             <a:fld id="{96DFF08F-DC6B-4601-B491-B0F83F6DD2DA}" type="datetimeFigureOut">
               <a:rPr lang="en-US" smtClean="0"/>
-              <a:t>3/4/2026</a:t>
+              <a:t>3/6/2026</a:t>
             </a:fld>
             <a:endParaRPr lang="en-US" dirty="0"/>
           </a:p>
@@ -2026,7 +2585,7 @@
           <a:p>
             <a:fld id="{96DFF08F-DC6B-4601-B491-B0F83F6DD2DA}" type="datetimeFigureOut">
               <a:rPr lang="en-US" smtClean="0"/>
-              <a:t>3/4/2026</a:t>
+              <a:t>3/6/2026</a:t>
             </a:fld>
             <a:endParaRPr lang="en-US" dirty="0"/>
           </a:p>
@@ -2121,7 +2680,7 @@
           <a:p>
             <a:fld id="{96DFF08F-DC6B-4601-B491-B0F83F6DD2DA}" type="datetimeFigureOut">
               <a:rPr lang="en-US" smtClean="0"/>
-              <a:t>3/4/2026</a:t>
+              <a:t>3/6/2026</a:t>
             </a:fld>
             <a:endParaRPr lang="en-US" dirty="0"/>
           </a:p>
@@ -2394,7 +2953,7 @@
           <a:p>
             <a:fld id="{96DFF08F-DC6B-4601-B491-B0F83F6DD2DA}" type="datetimeFigureOut">
               <a:rPr lang="en-US" smtClean="0"/>
-              <a:t>3/4/2026</a:t>
+              <a:t>3/6/2026</a:t>
             </a:fld>
             <a:endParaRPr lang="en-US" dirty="0"/>
           </a:p>
@@ -2659,7 +3218,7 @@
           <a:p>
             <a:fld id="{96DFF08F-DC6B-4601-B491-B0F83F6DD2DA}" type="datetimeFigureOut">
               <a:rPr lang="en-US" smtClean="0"/>
-              <a:t>3/4/2026</a:t>
+              <a:t>3/6/2026</a:t>
             </a:fld>
             <a:endParaRPr lang="en-US" dirty="0"/>
           </a:p>
@@ -2909,7 +3468,7 @@
             <a:fld id="{96DFF08F-DC6B-4601-B491-B0F83F6DD2DA}" type="datetimeFigureOut">
               <a:rPr lang="en-US" smtClean="0"/>
               <a:pPr/>
-              <a:t>3/4/2026</a:t>
+              <a:t>3/6/2026</a:t>
             </a:fld>
             <a:endParaRPr lang="en-US" dirty="0"/>
           </a:p>
@@ -3586,13 +4145,13 @@
   <p:clrMapOvr>
     <a:masterClrMapping/>
   </p:clrMapOvr>
-  <mc:AlternateContent xmlns:mc="http://schemas.openxmlformats.org/markup-compatibility/2006">
-    <mc:Choice xmlns:p159="http://schemas.microsoft.com/office/powerpoint/2015/09/main" Requires="p159">
+  <mc:AlternateContent xmlns:mc="http://schemas.openxmlformats.org/markup-compatibility/2006" xmlns:p159="http://schemas.microsoft.com/office/powerpoint/2015/09/main">
+    <mc:Choice Requires="p159">
       <p:transition xmlns:p14="http://schemas.microsoft.com/office/powerpoint/2010/main" spd="slow" p14:dur="2000">
         <p159:morph option="byObject"/>
       </p:transition>
     </mc:Choice>
-    <mc:Fallback>
+    <mc:Fallback xmlns="">
       <p:transition spd="slow">
         <p:fade/>
       </p:transition>
@@ -3681,13 +4240,13 @@
   <p:clrMapOvr>
     <a:masterClrMapping/>
   </p:clrMapOvr>
-  <mc:AlternateContent xmlns:mc="http://schemas.openxmlformats.org/markup-compatibility/2006">
-    <mc:Choice xmlns:p159="http://schemas.microsoft.com/office/powerpoint/2015/09/main" Requires="p159">
+  <mc:AlternateContent xmlns:mc="http://schemas.openxmlformats.org/markup-compatibility/2006" xmlns:p159="http://schemas.microsoft.com/office/powerpoint/2015/09/main">
+    <mc:Choice Requires="p159">
       <p:transition xmlns:p14="http://schemas.microsoft.com/office/powerpoint/2010/main" spd="slow" p14:dur="2000">
         <p159:morph option="byObject"/>
       </p:transition>
     </mc:Choice>
-    <mc:Fallback>
+    <mc:Fallback xmlns="">
       <p:transition spd="slow">
         <p:fade/>
       </p:transition>
@@ -3762,7 +4321,32 @@
           <a:bodyPr/>
           <a:lstStyle/>
           <a:p>
-            <a:endParaRPr lang="hu-HU"/>
+            <a:r>
+              <a:rPr lang="hu-HU" dirty="0" err="1"/>
+              <a:t>Selenium-WebDriver</a:t>
+            </a:r>
+            <a:r>
+              <a:rPr lang="hu-HU" dirty="0"/>
+              <a:t>: automatizált tesztelés</a:t>
+            </a:r>
+          </a:p>
+          <a:p>
+            <a:r>
+              <a:rPr lang="hu-HU" dirty="0"/>
+              <a:t>Firefoxban futó tesztesetek</a:t>
+            </a:r>
+          </a:p>
+          <a:p>
+            <a:r>
+              <a:rPr lang="hu-HU" dirty="0"/>
+              <a:t>Cél: funkciók és a felület tesztelése</a:t>
+            </a:r>
+          </a:p>
+          <a:p>
+            <a:r>
+              <a:rPr lang="hu-HU" dirty="0"/>
+              <a:t>Tesztelésre került pl. regisztráció vagy oldal menüpontok</a:t>
+            </a:r>
           </a:p>
         </p:txBody>
       </p:sp>
@@ -3776,13 +4360,13 @@
   <p:clrMapOvr>
     <a:masterClrMapping/>
   </p:clrMapOvr>
-  <mc:AlternateContent xmlns:mc="http://schemas.openxmlformats.org/markup-compatibility/2006">
-    <mc:Choice xmlns:p159="http://schemas.microsoft.com/office/powerpoint/2015/09/main" Requires="p159">
+  <mc:AlternateContent xmlns:mc="http://schemas.openxmlformats.org/markup-compatibility/2006" xmlns:p159="http://schemas.microsoft.com/office/powerpoint/2015/09/main">
+    <mc:Choice Requires="p159">
       <p:transition xmlns:p14="http://schemas.microsoft.com/office/powerpoint/2010/main" spd="slow" p14:dur="2000">
         <p159:morph option="byObject"/>
       </p:transition>
     </mc:Choice>
-    <mc:Fallback>
+    <mc:Fallback xmlns="">
       <p:transition spd="slow">
         <p:fade/>
       </p:transition>
@@ -3871,13 +4455,13 @@
   <p:clrMapOvr>
     <a:masterClrMapping/>
   </p:clrMapOvr>
-  <mc:AlternateContent xmlns:mc="http://schemas.openxmlformats.org/markup-compatibility/2006">
-    <mc:Choice xmlns:p159="http://schemas.microsoft.com/office/powerpoint/2015/09/main" Requires="p159">
+  <mc:AlternateContent xmlns:mc="http://schemas.openxmlformats.org/markup-compatibility/2006" xmlns:p159="http://schemas.microsoft.com/office/powerpoint/2015/09/main">
+    <mc:Choice Requires="p159">
       <p:transition xmlns:p14="http://schemas.microsoft.com/office/powerpoint/2010/main" spd="slow" p14:dur="2000">
         <p159:morph option="byObject"/>
       </p:transition>
     </mc:Choice>
-    <mc:Fallback>
+    <mc:Fallback xmlns="">
       <p:transition spd="slow">
         <p:fade/>
       </p:transition>
@@ -3966,13 +4550,13 @@
   <p:clrMapOvr>
     <a:masterClrMapping/>
   </p:clrMapOvr>
-  <mc:AlternateContent xmlns:mc="http://schemas.openxmlformats.org/markup-compatibility/2006">
-    <mc:Choice xmlns:p159="http://schemas.microsoft.com/office/powerpoint/2015/09/main" Requires="p159">
+  <mc:AlternateContent xmlns:mc="http://schemas.openxmlformats.org/markup-compatibility/2006" xmlns:p159="http://schemas.microsoft.com/office/powerpoint/2015/09/main">
+    <mc:Choice Requires="p159">
       <p:transition xmlns:p14="http://schemas.microsoft.com/office/powerpoint/2010/main" spd="slow" p14:dur="2000">
         <p159:morph option="byObject"/>
       </p:transition>
     </mc:Choice>
-    <mc:Fallback>
+    <mc:Fallback xmlns="">
       <p:transition spd="slow">
         <p:fade/>
       </p:transition>
@@ -4047,7 +4631,66 @@
           <a:bodyPr/>
           <a:lstStyle/>
           <a:p>
-            <a:endParaRPr lang="hu-HU"/>
+            <a:r>
+              <a:rPr lang="hu-HU" dirty="0"/>
+              <a:t>Sok KKV még mindig papíron végzi adminisztrációs feladatait</a:t>
+            </a:r>
+          </a:p>
+          <a:p>
+            <a:r>
+              <a:rPr lang="hu-HU" dirty="0"/>
+              <a:t>Pl.: </a:t>
+            </a:r>
+          </a:p>
+          <a:p>
+            <a:pPr lvl="1"/>
+            <a:r>
+              <a:rPr lang="hu-HU" dirty="0"/>
+              <a:t>rendelések rögzítése</a:t>
+            </a:r>
+          </a:p>
+          <a:p>
+            <a:pPr lvl="1"/>
+            <a:r>
+              <a:rPr lang="hu-HU" dirty="0"/>
+              <a:t>rendelések összekészítése</a:t>
+            </a:r>
+          </a:p>
+          <a:p>
+            <a:pPr lvl="1"/>
+            <a:r>
+              <a:rPr lang="hu-HU" dirty="0"/>
+              <a:t>fuvarlevelek kiállítása</a:t>
+            </a:r>
+          </a:p>
+          <a:p>
+            <a:r>
+              <a:rPr lang="hu-HU" dirty="0">
+                <a:sym typeface="Wingdings" panose="05000000000000000000" pitchFamily="2" charset="2"/>
+              </a:rPr>
+              <a:t> Ezek így:</a:t>
+            </a:r>
+          </a:p>
+          <a:p>
+            <a:pPr lvl="1"/>
+            <a:r>
+              <a:rPr lang="hu-HU" dirty="0"/>
+              <a:t>Időigényesek</a:t>
+            </a:r>
+          </a:p>
+          <a:p>
+            <a:pPr lvl="1"/>
+            <a:r>
+              <a:rPr lang="hu-HU" dirty="0"/>
+              <a:t>Hibalehetőségekkel terheltek</a:t>
+            </a:r>
+          </a:p>
+          <a:p>
+            <a:pPr lvl="1"/>
+            <a:r>
+              <a:rPr lang="hu-HU" dirty="0"/>
+              <a:t>Nehezen átláthatóak</a:t>
+            </a:r>
           </a:p>
         </p:txBody>
       </p:sp>
@@ -4142,7 +4785,28 @@
           <a:bodyPr/>
           <a:lstStyle/>
           <a:p>
-            <a:endParaRPr lang="hu-HU"/>
+            <a:r>
+              <a:rPr lang="hu-HU" dirty="0"/>
+              <a:t>Rendeléskezelés</a:t>
+            </a:r>
+          </a:p>
+          <a:p>
+            <a:r>
+              <a:rPr lang="hu-HU" dirty="0"/>
+              <a:t>Katalóguskezelés</a:t>
+            </a:r>
+          </a:p>
+          <a:p>
+            <a:r>
+              <a:rPr lang="hu-HU" dirty="0"/>
+              <a:t>Készletezés</a:t>
+            </a:r>
+          </a:p>
+          <a:p>
+            <a:r>
+              <a:rPr lang="hu-HU" dirty="0"/>
+              <a:t>Adminisztráció</a:t>
+            </a:r>
           </a:p>
         </p:txBody>
       </p:sp>
@@ -4251,13 +4915,13 @@
   <p:clrMapOvr>
     <a:masterClrMapping/>
   </p:clrMapOvr>
-  <mc:AlternateContent xmlns:mc="http://schemas.openxmlformats.org/markup-compatibility/2006">
-    <mc:Choice xmlns:p159="http://schemas.microsoft.com/office/powerpoint/2015/09/main" Requires="p159">
+  <mc:AlternateContent xmlns:mc="http://schemas.openxmlformats.org/markup-compatibility/2006" xmlns:p159="http://schemas.microsoft.com/office/powerpoint/2015/09/main">
+    <mc:Choice Requires="p159">
       <p:transition xmlns:p14="http://schemas.microsoft.com/office/powerpoint/2010/main" spd="slow" p14:dur="2000">
         <p159:morph option="byObject"/>
       </p:transition>
     </mc:Choice>
-    <mc:Fallback>
+    <mc:Fallback xmlns="">
       <p:transition spd="slow">
         <p:fade/>
       </p:transition>
@@ -4332,7 +4996,22 @@
           <a:bodyPr/>
           <a:lstStyle/>
           <a:p>
-            <a:endParaRPr lang="hu-HU"/>
+            <a:r>
+              <a:rPr lang="hu-HU" dirty="0"/>
+              <a:t>GitHub</a:t>
+            </a:r>
+          </a:p>
+          <a:p>
+            <a:r>
+              <a:rPr lang="hu-HU" dirty="0"/>
+              <a:t>Személyes kapcsolattartás</a:t>
+            </a:r>
+          </a:p>
+          <a:p>
+            <a:r>
+              <a:rPr lang="hu-HU" dirty="0"/>
+              <a:t>Messenger – online kapcsolattartás</a:t>
+            </a:r>
           </a:p>
         </p:txBody>
       </p:sp>
@@ -4346,13 +5025,13 @@
   <p:clrMapOvr>
     <a:masterClrMapping/>
   </p:clrMapOvr>
-  <mc:AlternateContent xmlns:mc="http://schemas.openxmlformats.org/markup-compatibility/2006">
-    <mc:Choice xmlns:p159="http://schemas.microsoft.com/office/powerpoint/2015/09/main" Requires="p159">
+  <mc:AlternateContent xmlns:mc="http://schemas.openxmlformats.org/markup-compatibility/2006" xmlns:p159="http://schemas.microsoft.com/office/powerpoint/2015/09/main">
+    <mc:Choice Requires="p159">
       <p:transition xmlns:p14="http://schemas.microsoft.com/office/powerpoint/2010/main" spd="slow" p14:dur="2000">
         <p159:morph option="byObject"/>
       </p:transition>
     </mc:Choice>
-    <mc:Fallback>
+    <mc:Fallback xmlns="">
       <p:transition spd="slow">
         <p:fade/>
       </p:transition>
@@ -4455,7 +5134,22 @@
           <a:bodyPr/>
           <a:lstStyle/>
           <a:p>
-            <a:endParaRPr lang="hu-HU"/>
+            <a:r>
+              <a:rPr lang="hu-HU" dirty="0"/>
+              <a:t>Frontend</a:t>
+            </a:r>
+          </a:p>
+          <a:p>
+            <a:r>
+              <a:rPr lang="hu-HU" dirty="0"/>
+              <a:t>Design/UI</a:t>
+            </a:r>
+          </a:p>
+          <a:p>
+            <a:r>
+              <a:rPr lang="hu-HU" dirty="0"/>
+              <a:t>Logó</a:t>
+            </a:r>
           </a:p>
         </p:txBody>
       </p:sp>
@@ -4508,7 +5202,22 @@
           <a:bodyPr/>
           <a:lstStyle/>
           <a:p>
-            <a:endParaRPr lang="hu-HU"/>
+            <a:r>
+              <a:rPr lang="hu-HU" dirty="0"/>
+              <a:t>Backend</a:t>
+            </a:r>
+          </a:p>
+          <a:p>
+            <a:r>
+              <a:rPr lang="hu-HU" dirty="0"/>
+              <a:t>Adatbázis</a:t>
+            </a:r>
+          </a:p>
+          <a:p>
+            <a:r>
+              <a:rPr lang="hu-HU" dirty="0"/>
+              <a:t>Dokumentációk</a:t>
+            </a:r>
           </a:p>
         </p:txBody>
       </p:sp>
@@ -4522,13 +5231,13 @@
   <p:clrMapOvr>
     <a:masterClrMapping/>
   </p:clrMapOvr>
-  <mc:AlternateContent xmlns:mc="http://schemas.openxmlformats.org/markup-compatibility/2006">
-    <mc:Choice xmlns:p159="http://schemas.microsoft.com/office/powerpoint/2015/09/main" Requires="p159">
+  <mc:AlternateContent xmlns:mc="http://schemas.openxmlformats.org/markup-compatibility/2006" xmlns:p159="http://schemas.microsoft.com/office/powerpoint/2015/09/main">
+    <mc:Choice Requires="p159">
       <p:transition xmlns:p14="http://schemas.microsoft.com/office/powerpoint/2010/main" spd="slow" p14:dur="2000">
         <p159:morph option="byObject"/>
       </p:transition>
     </mc:Choice>
-    <mc:Fallback>
+    <mc:Fallback xmlns="">
       <p:transition spd="slow">
         <p:fade/>
       </p:transition>
@@ -4617,13 +5326,13 @@
   <p:clrMapOvr>
     <a:masterClrMapping/>
   </p:clrMapOvr>
-  <mc:AlternateContent xmlns:mc="http://schemas.openxmlformats.org/markup-compatibility/2006">
-    <mc:Choice xmlns:p159="http://schemas.microsoft.com/office/powerpoint/2015/09/main" Requires="p159">
+  <mc:AlternateContent xmlns:mc="http://schemas.openxmlformats.org/markup-compatibility/2006" xmlns:p159="http://schemas.microsoft.com/office/powerpoint/2015/09/main">
+    <mc:Choice Requires="p159">
       <p:transition xmlns:p14="http://schemas.microsoft.com/office/powerpoint/2010/main" spd="slow" p14:dur="2000">
         <p159:morph option="byObject"/>
       </p:transition>
     </mc:Choice>
-    <mc:Fallback>
+    <mc:Fallback xmlns="">
       <p:transition spd="slow">
         <p:fade/>
       </p:transition>
@@ -4698,7 +5407,36 @@
           <a:bodyPr/>
           <a:lstStyle/>
           <a:p>
-            <a:endParaRPr lang="hu-HU"/>
+            <a:r>
+              <a:rPr lang="hu-HU" dirty="0" err="1"/>
+              <a:t>Javascript</a:t>
+            </a:r>
+            <a:r>
+              <a:rPr lang="hu-HU" dirty="0"/>
+              <a:t>-keretrendszer: Vue.js</a:t>
+            </a:r>
+          </a:p>
+          <a:p>
+            <a:r>
+              <a:rPr lang="hu-HU" dirty="0"/>
+              <a:t>UI: </a:t>
+            </a:r>
+            <a:r>
+              <a:rPr lang="hu-HU" dirty="0" err="1"/>
+              <a:t>Bootstrap</a:t>
+            </a:r>
+            <a:endParaRPr lang="hu-HU" dirty="0"/>
+          </a:p>
+          <a:p>
+            <a:r>
+              <a:rPr lang="hu-HU" dirty="0"/>
+              <a:t>Backend kapcsolat: </a:t>
+            </a:r>
+            <a:r>
+              <a:rPr lang="hu-HU" dirty="0" err="1"/>
+              <a:t>Axios</a:t>
+            </a:r>
+            <a:endParaRPr lang="hu-HU" dirty="0"/>
           </a:p>
         </p:txBody>
       </p:sp>
@@ -4712,13 +5450,13 @@
   <p:clrMapOvr>
     <a:masterClrMapping/>
   </p:clrMapOvr>
-  <mc:AlternateContent xmlns:mc="http://schemas.openxmlformats.org/markup-compatibility/2006">
-    <mc:Choice xmlns:p159="http://schemas.microsoft.com/office/powerpoint/2015/09/main" Requires="p159">
+  <mc:AlternateContent xmlns:mc="http://schemas.openxmlformats.org/markup-compatibility/2006" xmlns:p159="http://schemas.microsoft.com/office/powerpoint/2015/09/main">
+    <mc:Choice Requires="p159">
       <p:transition xmlns:p14="http://schemas.microsoft.com/office/powerpoint/2010/main" spd="slow" p14:dur="2000">
         <p159:morph option="byObject"/>
       </p:transition>
     </mc:Choice>
-    <mc:Fallback>
+    <mc:Fallback xmlns="">
       <p:transition spd="slow">
         <p:fade/>
       </p:transition>
@@ -4807,13 +5545,13 @@
   <p:clrMapOvr>
     <a:masterClrMapping/>
   </p:clrMapOvr>
-  <mc:AlternateContent xmlns:mc="http://schemas.openxmlformats.org/markup-compatibility/2006">
-    <mc:Choice xmlns:p159="http://schemas.microsoft.com/office/powerpoint/2015/09/main" Requires="p159">
+  <mc:AlternateContent xmlns:mc="http://schemas.openxmlformats.org/markup-compatibility/2006" xmlns:p159="http://schemas.microsoft.com/office/powerpoint/2015/09/main">
+    <mc:Choice Requires="p159">
       <p:transition xmlns:p14="http://schemas.microsoft.com/office/powerpoint/2010/main" spd="slow" p14:dur="2000">
         <p159:morph option="byObject"/>
       </p:transition>
     </mc:Choice>
-    <mc:Fallback>
+    <mc:Fallback xmlns="">
       <p:transition spd="slow">
         <p:fade/>
       </p:transition>
@@ -5084,6 +5822,301 @@
 </a:theme>
 </file>
 
+<file path=ppt/theme/theme2.xml><?xml version="1.0" encoding="utf-8"?>
+<a:theme xmlns:a="http://schemas.openxmlformats.org/drawingml/2006/main" name="Office-téma">
+  <a:themeElements>
+    <a:clrScheme name="Office">
+      <a:dk1>
+        <a:sysClr val="windowText" lastClr="000000"/>
+      </a:dk1>
+      <a:lt1>
+        <a:sysClr val="window" lastClr="FFFFFF"/>
+      </a:lt1>
+      <a:dk2>
+        <a:srgbClr val="44546A"/>
+      </a:dk2>
+      <a:lt2>
+        <a:srgbClr val="E7E6E6"/>
+      </a:lt2>
+      <a:accent1>
+        <a:srgbClr val="4472C4"/>
+      </a:accent1>
+      <a:accent2>
+        <a:srgbClr val="ED7D31"/>
+      </a:accent2>
+      <a:accent3>
+        <a:srgbClr val="A5A5A5"/>
+      </a:accent3>
+      <a:accent4>
+        <a:srgbClr val="FFC000"/>
+      </a:accent4>
+      <a:accent5>
+        <a:srgbClr val="5B9BD5"/>
+      </a:accent5>
+      <a:accent6>
+        <a:srgbClr val="70AD47"/>
+      </a:accent6>
+      <a:hlink>
+        <a:srgbClr val="0563C1"/>
+      </a:hlink>
+      <a:folHlink>
+        <a:srgbClr val="954F72"/>
+      </a:folHlink>
+    </a:clrScheme>
+    <a:fontScheme name="Office">
+      <a:majorFont>
+        <a:latin typeface="Calibri Light" panose="020F0302020204030204"/>
+        <a:ea typeface=""/>
+        <a:cs typeface=""/>
+        <a:font script="Jpan" typeface="游ゴシック Light"/>
+        <a:font script="Hang" typeface="맑은 고딕"/>
+        <a:font script="Hans" typeface="等线 Light"/>
+        <a:font script="Hant" typeface="新細明體"/>
+        <a:font script="Arab" typeface="Times New Roman"/>
+        <a:font script="Hebr" typeface="Times New Roman"/>
+        <a:font script="Thai" typeface="Angsana New"/>
+        <a:font script="Ethi" typeface="Nyala"/>
+        <a:font script="Beng" typeface="Vrinda"/>
+        <a:font script="Gujr" typeface="Shruti"/>
+        <a:font script="Khmr" typeface="MoolBoran"/>
+        <a:font script="Knda" typeface="Tunga"/>
+        <a:font script="Guru" typeface="Raavi"/>
+        <a:font script="Cans" typeface="Euphemia"/>
+        <a:font script="Cher" typeface="Plantagenet Cherokee"/>
+        <a:font script="Yiii" typeface="Microsoft Yi Baiti"/>
+        <a:font script="Tibt" typeface="Microsoft Himalaya"/>
+        <a:font script="Thaa" typeface="MV Boli"/>
+        <a:font script="Deva" typeface="Mangal"/>
+        <a:font script="Telu" typeface="Gautami"/>
+        <a:font script="Taml" typeface="Latha"/>
+        <a:font script="Syrc" typeface="Estrangelo Edessa"/>
+        <a:font script="Orya" typeface="Kalinga"/>
+        <a:font script="Mlym" typeface="Kartika"/>
+        <a:font script="Laoo" typeface="DokChampa"/>
+        <a:font script="Sinh" typeface="Iskoola Pota"/>
+        <a:font script="Mong" typeface="Mongolian Baiti"/>
+        <a:font script="Viet" typeface="Times New Roman"/>
+        <a:font script="Uigh" typeface="Microsoft Uighur"/>
+        <a:font script="Geor" typeface="Sylfaen"/>
+        <a:font script="Armn" typeface="Arial"/>
+        <a:font script="Bugi" typeface="Leelawadee UI"/>
+        <a:font script="Bopo" typeface="Microsoft JhengHei"/>
+        <a:font script="Java" typeface="Javanese Text"/>
+        <a:font script="Lisu" typeface="Segoe UI"/>
+        <a:font script="Mymr" typeface="Myanmar Text"/>
+        <a:font script="Nkoo" typeface="Ebrima"/>
+        <a:font script="Olck" typeface="Nirmala UI"/>
+        <a:font script="Osma" typeface="Ebrima"/>
+        <a:font script="Phag" typeface="Phagspa"/>
+        <a:font script="Syrn" typeface="Estrangelo Edessa"/>
+        <a:font script="Syrj" typeface="Estrangelo Edessa"/>
+        <a:font script="Syre" typeface="Estrangelo Edessa"/>
+        <a:font script="Sora" typeface="Nirmala UI"/>
+        <a:font script="Tale" typeface="Microsoft Tai Le"/>
+        <a:font script="Talu" typeface="Microsoft New Tai Lue"/>
+        <a:font script="Tfng" typeface="Ebrima"/>
+      </a:majorFont>
+      <a:minorFont>
+        <a:latin typeface="Calibri" panose="020F0502020204030204"/>
+        <a:ea typeface=""/>
+        <a:cs typeface=""/>
+        <a:font script="Jpan" typeface="游ゴシック"/>
+        <a:font script="Hang" typeface="맑은 고딕"/>
+        <a:font script="Hans" typeface="等线"/>
+        <a:font script="Hant" typeface="新細明體"/>
+        <a:font script="Arab" typeface="Arial"/>
+        <a:font script="Hebr" typeface="Arial"/>
+        <a:font script="Thai" typeface="Cordia New"/>
+        <a:font script="Ethi" typeface="Nyala"/>
+        <a:font script="Beng" typeface="Vrinda"/>
+        <a:font script="Gujr" typeface="Shruti"/>
+        <a:font script="Khmr" typeface="DaunPenh"/>
+        <a:font script="Knda" typeface="Tunga"/>
+        <a:font script="Guru" typeface="Raavi"/>
+        <a:font script="Cans" typeface="Euphemia"/>
+        <a:font script="Cher" typeface="Plantagenet Cherokee"/>
+        <a:font script="Yiii" typeface="Microsoft Yi Baiti"/>
+        <a:font script="Tibt" typeface="Microsoft Himalaya"/>
+        <a:font script="Thaa" typeface="MV Boli"/>
+        <a:font script="Deva" typeface="Mangal"/>
+        <a:font script="Telu" typeface="Gautami"/>
+        <a:font script="Taml" typeface="Latha"/>
+        <a:font script="Syrc" typeface="Estrangelo Edessa"/>
+        <a:font script="Orya" typeface="Kalinga"/>
+        <a:font script="Mlym" typeface="Kartika"/>
+        <a:font script="Laoo" typeface="DokChampa"/>
+        <a:font script="Sinh" typeface="Iskoola Pota"/>
+        <a:font script="Mong" typeface="Mongolian Baiti"/>
+        <a:font script="Viet" typeface="Arial"/>
+        <a:font script="Uigh" typeface="Microsoft Uighur"/>
+        <a:font script="Geor" typeface="Sylfaen"/>
+        <a:font script="Armn" typeface="Arial"/>
+        <a:font script="Bugi" typeface="Leelawadee UI"/>
+        <a:font script="Bopo" typeface="Microsoft JhengHei"/>
+        <a:font script="Java" typeface="Javanese Text"/>
+        <a:font script="Lisu" typeface="Segoe UI"/>
+        <a:font script="Mymr" typeface="Myanmar Text"/>
+        <a:font script="Nkoo" typeface="Ebrima"/>
+        <a:font script="Olck" typeface="Nirmala UI"/>
+        <a:font script="Osma" typeface="Ebrima"/>
+        <a:font script="Phag" typeface="Phagspa"/>
+        <a:font script="Syrn" typeface="Estrangelo Edessa"/>
+        <a:font script="Syrj" typeface="Estrangelo Edessa"/>
+        <a:font script="Syre" typeface="Estrangelo Edessa"/>
+        <a:font script="Sora" typeface="Nirmala UI"/>
+        <a:font script="Tale" typeface="Microsoft Tai Le"/>
+        <a:font script="Talu" typeface="Microsoft New Tai Lue"/>
+        <a:font script="Tfng" typeface="Ebrima"/>
+      </a:minorFont>
+    </a:fontScheme>
+    <a:fmtScheme name="Office">
+      <a:fillStyleLst>
+        <a:solidFill>
+          <a:schemeClr val="phClr"/>
+        </a:solidFill>
+        <a:gradFill rotWithShape="1">
+          <a:gsLst>
+            <a:gs pos="0">
+              <a:schemeClr val="phClr">
+                <a:lumMod val="110000"/>
+                <a:satMod val="105000"/>
+                <a:tint val="67000"/>
+              </a:schemeClr>
+            </a:gs>
+            <a:gs pos="50000">
+              <a:schemeClr val="phClr">
+                <a:lumMod val="105000"/>
+                <a:satMod val="103000"/>
+                <a:tint val="73000"/>
+              </a:schemeClr>
+            </a:gs>
+            <a:gs pos="100000">
+              <a:schemeClr val="phClr">
+                <a:lumMod val="105000"/>
+                <a:satMod val="109000"/>
+                <a:tint val="81000"/>
+              </a:schemeClr>
+            </a:gs>
+          </a:gsLst>
+          <a:lin ang="5400000" scaled="0"/>
+        </a:gradFill>
+        <a:gradFill rotWithShape="1">
+          <a:gsLst>
+            <a:gs pos="0">
+              <a:schemeClr val="phClr">
+                <a:satMod val="103000"/>
+                <a:lumMod val="102000"/>
+                <a:tint val="94000"/>
+              </a:schemeClr>
+            </a:gs>
+            <a:gs pos="50000">
+              <a:schemeClr val="phClr">
+                <a:satMod val="110000"/>
+                <a:lumMod val="100000"/>
+                <a:shade val="100000"/>
+              </a:schemeClr>
+            </a:gs>
+            <a:gs pos="100000">
+              <a:schemeClr val="phClr">
+                <a:lumMod val="99000"/>
+                <a:satMod val="120000"/>
+                <a:shade val="78000"/>
+              </a:schemeClr>
+            </a:gs>
+          </a:gsLst>
+          <a:lin ang="5400000" scaled="0"/>
+        </a:gradFill>
+      </a:fillStyleLst>
+      <a:lnStyleLst>
+        <a:ln w="6350" cap="flat" cmpd="sng" algn="ctr">
+          <a:solidFill>
+            <a:schemeClr val="phClr"/>
+          </a:solidFill>
+          <a:prstDash val="solid"/>
+          <a:miter lim="800000"/>
+        </a:ln>
+        <a:ln w="12700" cap="flat" cmpd="sng" algn="ctr">
+          <a:solidFill>
+            <a:schemeClr val="phClr"/>
+          </a:solidFill>
+          <a:prstDash val="solid"/>
+          <a:miter lim="800000"/>
+        </a:ln>
+        <a:ln w="19050" cap="flat" cmpd="sng" algn="ctr">
+          <a:solidFill>
+            <a:schemeClr val="phClr"/>
+          </a:solidFill>
+          <a:prstDash val="solid"/>
+          <a:miter lim="800000"/>
+        </a:ln>
+      </a:lnStyleLst>
+      <a:effectStyleLst>
+        <a:effectStyle>
+          <a:effectLst/>
+        </a:effectStyle>
+        <a:effectStyle>
+          <a:effectLst/>
+        </a:effectStyle>
+        <a:effectStyle>
+          <a:effectLst>
+            <a:outerShdw blurRad="57150" dist="19050" dir="5400000" algn="ctr" rotWithShape="0">
+              <a:srgbClr val="000000">
+                <a:alpha val="63000"/>
+              </a:srgbClr>
+            </a:outerShdw>
+          </a:effectLst>
+        </a:effectStyle>
+      </a:effectStyleLst>
+      <a:bgFillStyleLst>
+        <a:solidFill>
+          <a:schemeClr val="phClr"/>
+        </a:solidFill>
+        <a:solidFill>
+          <a:schemeClr val="phClr">
+            <a:tint val="95000"/>
+            <a:satMod val="170000"/>
+          </a:schemeClr>
+        </a:solidFill>
+        <a:gradFill rotWithShape="1">
+          <a:gsLst>
+            <a:gs pos="0">
+              <a:schemeClr val="phClr">
+                <a:tint val="93000"/>
+                <a:satMod val="150000"/>
+                <a:shade val="98000"/>
+                <a:lumMod val="102000"/>
+              </a:schemeClr>
+            </a:gs>
+            <a:gs pos="50000">
+              <a:schemeClr val="phClr">
+                <a:tint val="98000"/>
+                <a:satMod val="130000"/>
+                <a:shade val="90000"/>
+                <a:lumMod val="103000"/>
+              </a:schemeClr>
+            </a:gs>
+            <a:gs pos="100000">
+              <a:schemeClr val="phClr">
+                <a:shade val="63000"/>
+                <a:satMod val="120000"/>
+              </a:schemeClr>
+            </a:gs>
+          </a:gsLst>
+          <a:lin ang="5400000" scaled="0"/>
+        </a:gradFill>
+      </a:bgFillStyleLst>
+    </a:fmtScheme>
+  </a:themeElements>
+  <a:objectDefaults/>
+  <a:extraClrSchemeLst/>
+  <a:extLst>
+    <a:ext uri="{05A4C25C-085E-4340-85A3-A5531E510DB2}">
+      <thm15:themeFamily xmlns:thm15="http://schemas.microsoft.com/office/thememl/2012/main" name="Office Theme" id="{62F939B6-93AF-4DB8-9C6B-D6C7DFDC589F}" vid="{4A3C46E8-61CC-4603-A589-7422A47A8E4A}"/>
+    </a:ext>
+  </a:extLst>
+</a:theme>
+</file>
+
 <file path=ppt/theme/themeOverride1.xml><?xml version="1.0" encoding="utf-8"?>
 <a:themeOverride xmlns:a="http://schemas.openxmlformats.org/drawingml/2006/main">
   <a:clrScheme name="6. egyéni séma">

--- a/szerkesztendo_dokumentumok/prezentacio_REKA.pptx
+++ b/szerkesztendo_dokumentumok/prezentacio_REKA.pptx
@@ -5,23 +5,27 @@
     <p:sldMasterId id="2147483660" r:id="rId1"/>
   </p:sldMasterIdLst>
   <p:notesMasterIdLst>
-    <p:notesMasterId r:id="rId16"/>
+    <p:notesMasterId r:id="rId20"/>
   </p:notesMasterIdLst>
   <p:sldIdLst>
     <p:sldId id="256" r:id="rId2"/>
     <p:sldId id="257" r:id="rId3"/>
-    <p:sldId id="259" r:id="rId4"/>
-    <p:sldId id="263" r:id="rId5"/>
-    <p:sldId id="269" r:id="rId6"/>
-    <p:sldId id="265" r:id="rId7"/>
-    <p:sldId id="258" r:id="rId8"/>
-    <p:sldId id="260" r:id="rId9"/>
-    <p:sldId id="261" r:id="rId10"/>
-    <p:sldId id="262" r:id="rId11"/>
-    <p:sldId id="264" r:id="rId12"/>
-    <p:sldId id="266" r:id="rId13"/>
-    <p:sldId id="267" r:id="rId14"/>
-    <p:sldId id="268" r:id="rId15"/>
+    <p:sldId id="270" r:id="rId4"/>
+    <p:sldId id="259" r:id="rId5"/>
+    <p:sldId id="263" r:id="rId6"/>
+    <p:sldId id="269" r:id="rId7"/>
+    <p:sldId id="265" r:id="rId8"/>
+    <p:sldId id="258" r:id="rId9"/>
+    <p:sldId id="260" r:id="rId10"/>
+    <p:sldId id="261" r:id="rId11"/>
+    <p:sldId id="262" r:id="rId12"/>
+    <p:sldId id="264" r:id="rId13"/>
+    <p:sldId id="266" r:id="rId14"/>
+    <p:sldId id="267" r:id="rId15"/>
+    <p:sldId id="272" r:id="rId16"/>
+    <p:sldId id="273" r:id="rId17"/>
+    <p:sldId id="268" r:id="rId18"/>
+    <p:sldId id="271" r:id="rId19"/>
   </p:sldIdLst>
   <p:sldSz cx="12192000" cy="6858000"/>
   <p:notesSz cx="6858000" cy="9144000"/>
@@ -210,7 +214,7 @@
           <a:p>
             <a:fld id="{5EB04AAB-0187-4F39-A3C3-445085015435}" type="datetimeFigureOut">
               <a:rPr lang="hu-HU" smtClean="0"/>
-              <a:t>2026. 03. 06.</a:t>
+              <a:t>2026. 03. 10.</a:t>
             </a:fld>
             <a:endParaRPr lang="hu-HU"/>
           </a:p>
@@ -631,12 +635,6 @@
           <a:p>
             <a:r>
               <a:rPr lang="hu-HU" dirty="0"/>
-              <a:t>Katalóguskezelés: Termékek adatainak tárolása, Termékkategóriák létrehozása és karbantartása, Keresés és szűrés termékek között </a:t>
-            </a:r>
-          </a:p>
-          <a:p>
-            <a:r>
-              <a:rPr lang="hu-HU" dirty="0"/>
               <a:t>Készletezés: Leltárkezelés, Automatikus készletcsökkentés rendelés teljesítésekor, Minimum készletszint figyelés, riasztás </a:t>
             </a:r>
           </a:p>
@@ -665,7 +663,7 @@
           <a:p>
             <a:fld id="{A6A89ECC-2295-4F7B-B00D-8E6011BB80FB}" type="slidenum">
               <a:rPr lang="hu-HU" smtClean="0"/>
-              <a:t>3</a:t>
+              <a:t>4</a:t>
             </a:fld>
             <a:endParaRPr lang="hu-HU"/>
           </a:p>
@@ -860,7 +858,7 @@
           <a:p>
             <a:fld id="{96DFF08F-DC6B-4601-B491-B0F83F6DD2DA}" type="datetimeFigureOut">
               <a:rPr lang="en-US" smtClean="0"/>
-              <a:t>3/6/2026</a:t>
+              <a:t>3/10/2026</a:t>
             </a:fld>
             <a:endParaRPr lang="en-US" dirty="0"/>
           </a:p>
@@ -1030,7 +1028,7 @@
           <a:p>
             <a:fld id="{96DFF08F-DC6B-4601-B491-B0F83F6DD2DA}" type="datetimeFigureOut">
               <a:rPr lang="en-US" smtClean="0"/>
-              <a:t>3/6/2026</a:t>
+              <a:t>3/10/2026</a:t>
             </a:fld>
             <a:endParaRPr lang="en-US" dirty="0"/>
           </a:p>
@@ -1253,7 +1251,7 @@
           <a:p>
             <a:fld id="{96DFF08F-DC6B-4601-B491-B0F83F6DD2DA}" type="datetimeFigureOut">
               <a:rPr lang="en-US" smtClean="0"/>
-              <a:t>3/6/2026</a:t>
+              <a:t>3/10/2026</a:t>
             </a:fld>
             <a:endParaRPr lang="en-US" dirty="0"/>
           </a:p>
@@ -1433,7 +1431,7 @@
           <a:p>
             <a:fld id="{96DFF08F-DC6B-4601-B491-B0F83F6DD2DA}" type="datetimeFigureOut">
               <a:rPr lang="en-US" smtClean="0"/>
-              <a:t>3/6/2026</a:t>
+              <a:t>3/10/2026</a:t>
             </a:fld>
             <a:endParaRPr lang="en-US" dirty="0"/>
           </a:p>
@@ -1740,7 +1738,7 @@
             <a:fld id="{96DFF08F-DC6B-4601-B491-B0F83F6DD2DA}" type="datetimeFigureOut">
               <a:rPr lang="en-US" smtClean="0"/>
               <a:pPr/>
-              <a:t>3/6/2026</a:t>
+              <a:t>3/10/2026</a:t>
             </a:fld>
             <a:endParaRPr lang="en-US" dirty="0"/>
           </a:p>
@@ -2045,7 +2043,7 @@
           <a:p>
             <a:fld id="{96DFF08F-DC6B-4601-B491-B0F83F6DD2DA}" type="datetimeFigureOut">
               <a:rPr lang="en-US" smtClean="0"/>
-              <a:t>3/6/2026</a:t>
+              <a:t>3/10/2026</a:t>
             </a:fld>
             <a:endParaRPr lang="en-US" dirty="0"/>
           </a:p>
@@ -2467,7 +2465,7 @@
           <a:p>
             <a:fld id="{96DFF08F-DC6B-4601-B491-B0F83F6DD2DA}" type="datetimeFigureOut">
               <a:rPr lang="en-US" smtClean="0"/>
-              <a:t>3/6/2026</a:t>
+              <a:t>3/10/2026</a:t>
             </a:fld>
             <a:endParaRPr lang="en-US" dirty="0"/>
           </a:p>
@@ -2585,7 +2583,7 @@
           <a:p>
             <a:fld id="{96DFF08F-DC6B-4601-B491-B0F83F6DD2DA}" type="datetimeFigureOut">
               <a:rPr lang="en-US" smtClean="0"/>
-              <a:t>3/6/2026</a:t>
+              <a:t>3/10/2026</a:t>
             </a:fld>
             <a:endParaRPr lang="en-US" dirty="0"/>
           </a:p>
@@ -2680,7 +2678,7 @@
           <a:p>
             <a:fld id="{96DFF08F-DC6B-4601-B491-B0F83F6DD2DA}" type="datetimeFigureOut">
               <a:rPr lang="en-US" smtClean="0"/>
-              <a:t>3/6/2026</a:t>
+              <a:t>3/10/2026</a:t>
             </a:fld>
             <a:endParaRPr lang="en-US" dirty="0"/>
           </a:p>
@@ -2953,7 +2951,7 @@
           <a:p>
             <a:fld id="{96DFF08F-DC6B-4601-B491-B0F83F6DD2DA}" type="datetimeFigureOut">
               <a:rPr lang="en-US" smtClean="0"/>
-              <a:t>3/6/2026</a:t>
+              <a:t>3/10/2026</a:t>
             </a:fld>
             <a:endParaRPr lang="en-US" dirty="0"/>
           </a:p>
@@ -3218,7 +3216,7 @@
           <a:p>
             <a:fld id="{96DFF08F-DC6B-4601-B491-B0F83F6DD2DA}" type="datetimeFigureOut">
               <a:rPr lang="en-US" smtClean="0"/>
-              <a:t>3/6/2026</a:t>
+              <a:t>3/10/2026</a:t>
             </a:fld>
             <a:endParaRPr lang="en-US" dirty="0"/>
           </a:p>
@@ -3468,7 +3466,7 @@
             <a:fld id="{96DFF08F-DC6B-4601-B491-B0F83F6DD2DA}" type="datetimeFigureOut">
               <a:rPr lang="en-US" smtClean="0"/>
               <a:pPr/>
-              <a:t>3/6/2026</a:t>
+              <a:t>3/10/2026</a:t>
             </a:fld>
             <a:endParaRPr lang="en-US" dirty="0"/>
           </a:p>
@@ -3926,33 +3924,6 @@
       </p:grpSpPr>
       <p:sp>
         <p:nvSpPr>
-          <p:cNvPr id="2" name="Cím 1">
-            <a:extLst>
-              <a:ext uri="{FF2B5EF4-FFF2-40B4-BE49-F238E27FC236}">
-                <a16:creationId xmlns:a16="http://schemas.microsoft.com/office/drawing/2014/main" id="{84A335D2-33DB-47ED-896A-5E12F4D49BA7}"/>
-              </a:ext>
-            </a:extLst>
-          </p:cNvPr>
-          <p:cNvSpPr>
-            <a:spLocks noGrp="1"/>
-          </p:cNvSpPr>
-          <p:nvPr>
-            <p:ph type="ctrTitle"/>
-          </p:nvPr>
-        </p:nvSpPr>
-        <p:spPr/>
-        <p:txBody>
-          <a:bodyPr/>
-          <a:lstStyle/>
-          <a:p>
-            <a:endParaRPr lang="hu-HU" dirty="0">
-              <a:latin typeface="Century Gothic" panose="020B0502020202020204" pitchFamily="34" charset="0"/>
-            </a:endParaRPr>
-          </a:p>
-        </p:txBody>
-      </p:sp>
-      <p:sp>
-        <p:nvSpPr>
           <p:cNvPr id="3" name="Alcím 2">
             <a:extLst>
               <a:ext uri="{FF2B5EF4-FFF2-40B4-BE49-F238E27FC236}">
@@ -4087,7 +4058,7 @@
           <p:cNvPr id="2" name="Cím 1">
             <a:extLst>
               <a:ext uri="{FF2B5EF4-FFF2-40B4-BE49-F238E27FC236}">
-                <a16:creationId xmlns:a16="http://schemas.microsoft.com/office/drawing/2014/main" id="{6F96F8A1-EA73-49F9-8B46-ADC46DCBF05B}"/>
+                <a16:creationId xmlns:a16="http://schemas.microsoft.com/office/drawing/2014/main" id="{AE7A394C-08C6-4733-8683-DF32A5E3D9A1}"/>
               </a:ext>
             </a:extLst>
           </p:cNvPr>
@@ -4105,7 +4076,7 @@
           <a:p>
             <a:r>
               <a:rPr lang="hu-HU" dirty="0"/>
-              <a:t>Adatbázis</a:t>
+              <a:t>Backend</a:t>
             </a:r>
           </a:p>
         </p:txBody>
@@ -4115,7 +4086,7 @@
           <p:cNvPr id="3" name="Tartalom helye 2">
             <a:extLst>
               <a:ext uri="{FF2B5EF4-FFF2-40B4-BE49-F238E27FC236}">
-                <a16:creationId xmlns:a16="http://schemas.microsoft.com/office/drawing/2014/main" id="{F812DF51-D2E3-4591-B5F0-331637F7C8F8}"/>
+                <a16:creationId xmlns:a16="http://schemas.microsoft.com/office/drawing/2014/main" id="{FE580785-C82D-4D70-8F17-4BD29507C6AB}"/>
               </a:ext>
             </a:extLst>
           </p:cNvPr>
@@ -4131,14 +4102,41 @@
           <a:bodyPr/>
           <a:lstStyle/>
           <a:p>
-            <a:endParaRPr lang="hu-HU"/>
+            <a:r>
+              <a:rPr lang="hu-HU" dirty="0"/>
+              <a:t>Node.js [v22.x]</a:t>
+            </a:r>
+          </a:p>
+          <a:p>
+            <a:r>
+              <a:rPr lang="hu-HU" dirty="0" err="1"/>
+              <a:t>WebAPI</a:t>
+            </a:r>
+            <a:endParaRPr lang="hu-HU" dirty="0"/>
+          </a:p>
+          <a:p>
+            <a:r>
+              <a:rPr lang="hu-HU" dirty="0" err="1"/>
+              <a:t>Autentikáció</a:t>
+            </a:r>
+            <a:r>
+              <a:rPr lang="hu-HU" dirty="0"/>
+              <a:t>:</a:t>
+            </a:r>
+          </a:p>
+          <a:p>
+            <a:pPr lvl="1"/>
+            <a:r>
+              <a:rPr lang="hu-HU" dirty="0"/>
+              <a:t>JWT</a:t>
+            </a:r>
           </a:p>
         </p:txBody>
       </p:sp>
     </p:spTree>
     <p:extLst>
       <p:ext uri="{BB962C8B-B14F-4D97-AF65-F5344CB8AC3E}">
-        <p14:creationId xmlns:p14="http://schemas.microsoft.com/office/powerpoint/2010/main" val="3374574969"/>
+        <p14:creationId xmlns:p14="http://schemas.microsoft.com/office/powerpoint/2010/main" val="2862999257"/>
       </p:ext>
     </p:extLst>
   </p:cSld>
@@ -4182,7 +4180,7 @@
           <p:cNvPr id="2" name="Cím 1">
             <a:extLst>
               <a:ext uri="{FF2B5EF4-FFF2-40B4-BE49-F238E27FC236}">
-                <a16:creationId xmlns:a16="http://schemas.microsoft.com/office/drawing/2014/main" id="{0E90F1C4-F976-42A1-97ED-66D6B6097870}"/>
+                <a16:creationId xmlns:a16="http://schemas.microsoft.com/office/drawing/2014/main" id="{6F96F8A1-EA73-49F9-8B46-ADC46DCBF05B}"/>
               </a:ext>
             </a:extLst>
           </p:cNvPr>
@@ -4200,17 +4198,17 @@
           <a:p>
             <a:r>
               <a:rPr lang="hu-HU" dirty="0"/>
-              <a:t>Teszt</a:t>
-            </a:r>
-          </a:p>
-        </p:txBody>
-      </p:sp>
-      <p:sp>
-        <p:nvSpPr>
-          <p:cNvPr id="4" name="Szöveg helye 3">
+              <a:t>Adatbázis</a:t>
+            </a:r>
+          </a:p>
+        </p:txBody>
+      </p:sp>
+      <p:sp>
+        <p:nvSpPr>
+          <p:cNvPr id="3" name="Tartalom helye 2">
             <a:extLst>
               <a:ext uri="{FF2B5EF4-FFF2-40B4-BE49-F238E27FC236}">
-                <a16:creationId xmlns:a16="http://schemas.microsoft.com/office/drawing/2014/main" id="{23F902DA-9191-4CBE-A40F-1673EBC757F6}"/>
+                <a16:creationId xmlns:a16="http://schemas.microsoft.com/office/drawing/2014/main" id="{F812DF51-D2E3-4591-B5F0-331637F7C8F8}"/>
               </a:ext>
             </a:extLst>
           </p:cNvPr>
@@ -4218,22 +4216,67 @@
             <a:spLocks noGrp="1"/>
           </p:cNvSpPr>
           <p:nvPr>
-            <p:ph type="body" idx="1"/>
-          </p:nvPr>
-        </p:nvSpPr>
-        <p:spPr/>
-        <p:txBody>
-          <a:bodyPr/>
-          <a:lstStyle/>
-          <a:p>
-            <a:endParaRPr lang="hu-HU"/>
-          </a:p>
-        </p:txBody>
-      </p:sp>
+            <p:ph idx="1"/>
+          </p:nvPr>
+        </p:nvSpPr>
+        <p:spPr/>
+        <p:txBody>
+          <a:bodyPr/>
+          <a:lstStyle/>
+          <a:p>
+            <a:r>
+              <a:rPr lang="hu-HU" dirty="0"/>
+              <a:t>Relációs adatbázis</a:t>
+            </a:r>
+          </a:p>
+          <a:p>
+            <a:r>
+              <a:rPr lang="hu-HU" dirty="0"/>
+              <a:t> 9 táblával</a:t>
+            </a:r>
+          </a:p>
+        </p:txBody>
+      </p:sp>
+      <p:pic>
+        <p:nvPicPr>
+          <p:cNvPr id="5" name="Ábra 4">
+            <a:extLst>
+              <a:ext uri="{FF2B5EF4-FFF2-40B4-BE49-F238E27FC236}">
+                <a16:creationId xmlns:a16="http://schemas.microsoft.com/office/drawing/2014/main" id="{4923FCFD-8B78-4EF7-9E5D-8883F28D5546}"/>
+              </a:ext>
+            </a:extLst>
+          </p:cNvPr>
+          <p:cNvPicPr>
+            <a:picLocks noChangeAspect="1"/>
+          </p:cNvPicPr>
+          <p:nvPr/>
+        </p:nvPicPr>
+        <p:blipFill>
+          <a:blip r:embed="rId2">
+            <a:extLst>
+              <a:ext uri="{96DAC541-7B7A-43D3-8B79-37D633B846F1}">
+                <asvg:svgBlip xmlns:asvg="http://schemas.microsoft.com/office/drawing/2016/SVG/main" r:embed="rId3"/>
+              </a:ext>
+            </a:extLst>
+          </a:blip>
+          <a:stretch>
+            <a:fillRect/>
+          </a:stretch>
+        </p:blipFill>
+        <p:spPr>
+          <a:xfrm>
+            <a:off x="6096000" y="-121133"/>
+            <a:ext cx="5861067" cy="6761793"/>
+          </a:xfrm>
+          <a:prstGeom prst="rect">
+            <a:avLst/>
+          </a:prstGeom>
+        </p:spPr>
+      </p:pic>
     </p:spTree>
     <p:extLst>
       <p:ext uri="{BB962C8B-B14F-4D97-AF65-F5344CB8AC3E}">
-        <p14:creationId xmlns:p14="http://schemas.microsoft.com/office/powerpoint/2010/main" val="2929083256"/>
+        <p14:creationId xmlns:p14="http://schemas.microsoft.com/office/powerpoint/2010/main" val="3374574969"/>
       </p:ext>
     </p:extLst>
   </p:cSld>
@@ -4277,7 +4320,7 @@
           <p:cNvPr id="2" name="Cím 1">
             <a:extLst>
               <a:ext uri="{FF2B5EF4-FFF2-40B4-BE49-F238E27FC236}">
-                <a16:creationId xmlns:a16="http://schemas.microsoft.com/office/drawing/2014/main" id="{2B1B7EAA-8ED1-4108-B800-32C6CC05FB05}"/>
+                <a16:creationId xmlns:a16="http://schemas.microsoft.com/office/drawing/2014/main" id="{0E90F1C4-F976-42A1-97ED-66D6B6097870}"/>
               </a:ext>
             </a:extLst>
           </p:cNvPr>
@@ -4295,17 +4338,17 @@
           <a:p>
             <a:r>
               <a:rPr lang="hu-HU" dirty="0"/>
-              <a:t>Frontend</a:t>
-            </a:r>
-          </a:p>
-        </p:txBody>
-      </p:sp>
-      <p:sp>
-        <p:nvSpPr>
-          <p:cNvPr id="3" name="Tartalom helye 2">
+              <a:t>Teszt</a:t>
+            </a:r>
+          </a:p>
+        </p:txBody>
+      </p:sp>
+      <p:sp>
+        <p:nvSpPr>
+          <p:cNvPr id="4" name="Szöveg helye 3">
             <a:extLst>
               <a:ext uri="{FF2B5EF4-FFF2-40B4-BE49-F238E27FC236}">
-                <a16:creationId xmlns:a16="http://schemas.microsoft.com/office/drawing/2014/main" id="{197E9A83-9A18-4295-9977-1301A8B2A1B2}"/>
+                <a16:creationId xmlns:a16="http://schemas.microsoft.com/office/drawing/2014/main" id="{23F902DA-9191-4CBE-A40F-1673EBC757F6}"/>
               </a:ext>
             </a:extLst>
           </p:cNvPr>
@@ -4313,61 +4356,36 @@
             <a:spLocks noGrp="1"/>
           </p:cNvSpPr>
           <p:nvPr>
-            <p:ph idx="1"/>
-          </p:nvPr>
-        </p:nvSpPr>
-        <p:spPr/>
-        <p:txBody>
-          <a:bodyPr/>
-          <a:lstStyle/>
-          <a:p>
-            <a:r>
-              <a:rPr lang="hu-HU" dirty="0" err="1"/>
-              <a:t>Selenium-WebDriver</a:t>
-            </a:r>
-            <a:r>
-              <a:rPr lang="hu-HU" dirty="0"/>
-              <a:t>: automatizált tesztelés</a:t>
-            </a:r>
-          </a:p>
-          <a:p>
-            <a:r>
-              <a:rPr lang="hu-HU" dirty="0"/>
-              <a:t>Firefoxban futó tesztesetek</a:t>
-            </a:r>
-          </a:p>
-          <a:p>
-            <a:r>
-              <a:rPr lang="hu-HU" dirty="0"/>
-              <a:t>Cél: funkciók és a felület tesztelése</a:t>
-            </a:r>
-          </a:p>
-          <a:p>
-            <a:r>
-              <a:rPr lang="hu-HU" dirty="0"/>
-              <a:t>Tesztelésre került pl. regisztráció vagy oldal menüpontok</a:t>
-            </a:r>
+            <p:ph type="body" idx="1"/>
+          </p:nvPr>
+        </p:nvSpPr>
+        <p:spPr/>
+        <p:txBody>
+          <a:bodyPr/>
+          <a:lstStyle/>
+          <a:p>
+            <a:endParaRPr lang="hu-HU"/>
           </a:p>
         </p:txBody>
       </p:sp>
     </p:spTree>
     <p:extLst>
       <p:ext uri="{BB962C8B-B14F-4D97-AF65-F5344CB8AC3E}">
-        <p14:creationId xmlns:p14="http://schemas.microsoft.com/office/powerpoint/2010/main" val="1558163181"/>
+        <p14:creationId xmlns:p14="http://schemas.microsoft.com/office/powerpoint/2010/main" val="2929083256"/>
       </p:ext>
     </p:extLst>
   </p:cSld>
   <p:clrMapOvr>
     <a:masterClrMapping/>
   </p:clrMapOvr>
-  <mc:AlternateContent xmlns:mc="http://schemas.openxmlformats.org/markup-compatibility/2006" xmlns:p159="http://schemas.microsoft.com/office/powerpoint/2015/09/main">
-    <mc:Choice Requires="p159">
-      <p:transition xmlns:p14="http://schemas.microsoft.com/office/powerpoint/2010/main" spd="slow" p14:dur="2000">
+  <mc:AlternateContent xmlns:mc="http://schemas.openxmlformats.org/markup-compatibility/2006">
+    <mc:Choice xmlns:p159="http://schemas.microsoft.com/office/powerpoint/2015/09/main" Requires="p159">
+      <p:transition xmlns:p14="http://schemas.microsoft.com/office/powerpoint/2010/main" spd="slow" p14:dur="2000" advTm="1000">
         <p159:morph option="byObject"/>
       </p:transition>
     </mc:Choice>
-    <mc:Fallback xmlns="">
-      <p:transition spd="slow">
+    <mc:Fallback>
+      <p:transition spd="slow" advTm="1000">
         <p:fade/>
       </p:transition>
     </mc:Fallback>
@@ -4397,7 +4415,7 @@
           <p:cNvPr id="2" name="Cím 1">
             <a:extLst>
               <a:ext uri="{FF2B5EF4-FFF2-40B4-BE49-F238E27FC236}">
-                <a16:creationId xmlns:a16="http://schemas.microsoft.com/office/drawing/2014/main" id="{AE7A394C-08C6-4733-8683-DF32A5E3D9A1}"/>
+                <a16:creationId xmlns:a16="http://schemas.microsoft.com/office/drawing/2014/main" id="{2B1B7EAA-8ED1-4108-B800-32C6CC05FB05}"/>
               </a:ext>
             </a:extLst>
           </p:cNvPr>
@@ -4415,7 +4433,7 @@
           <a:p>
             <a:r>
               <a:rPr lang="hu-HU" dirty="0"/>
-              <a:t>Backend</a:t>
+              <a:t>Frontend</a:t>
             </a:r>
           </a:p>
         </p:txBody>
@@ -4425,7 +4443,7 @@
           <p:cNvPr id="3" name="Tartalom helye 2">
             <a:extLst>
               <a:ext uri="{FF2B5EF4-FFF2-40B4-BE49-F238E27FC236}">
-                <a16:creationId xmlns:a16="http://schemas.microsoft.com/office/drawing/2014/main" id="{FE580785-C82D-4D70-8F17-4BD29507C6AB}"/>
+                <a16:creationId xmlns:a16="http://schemas.microsoft.com/office/drawing/2014/main" id="{197E9A83-9A18-4295-9977-1301A8B2A1B2}"/>
               </a:ext>
             </a:extLst>
           </p:cNvPr>
@@ -4441,14 +4459,39 @@
           <a:bodyPr/>
           <a:lstStyle/>
           <a:p>
-            <a:endParaRPr lang="hu-HU"/>
+            <a:r>
+              <a:rPr lang="hu-HU" dirty="0" err="1"/>
+              <a:t>Selenium-WebDriver</a:t>
+            </a:r>
+            <a:r>
+              <a:rPr lang="hu-HU" dirty="0"/>
+              <a:t>: automatizált tesztelés</a:t>
+            </a:r>
+          </a:p>
+          <a:p>
+            <a:r>
+              <a:rPr lang="hu-HU" dirty="0"/>
+              <a:t>Firefox-ban futó tesztesetek</a:t>
+            </a:r>
+          </a:p>
+          <a:p>
+            <a:r>
+              <a:rPr lang="hu-HU" dirty="0"/>
+              <a:t>Cél: funkciók és a felület tesztelése</a:t>
+            </a:r>
+          </a:p>
+          <a:p>
+            <a:r>
+              <a:rPr lang="hu-HU" dirty="0"/>
+              <a:t>Tesztelésre került pl. regisztráció vagy oldal menüpontok</a:t>
+            </a:r>
           </a:p>
         </p:txBody>
       </p:sp>
     </p:spTree>
     <p:extLst>
       <p:ext uri="{BB962C8B-B14F-4D97-AF65-F5344CB8AC3E}">
-        <p14:creationId xmlns:p14="http://schemas.microsoft.com/office/powerpoint/2010/main" val="2782414"/>
+        <p14:creationId xmlns:p14="http://schemas.microsoft.com/office/powerpoint/2010/main" val="1558163181"/>
       </p:ext>
     </p:extLst>
   </p:cSld>
@@ -4492,6 +4535,312 @@
           <p:cNvPr id="2" name="Cím 1">
             <a:extLst>
               <a:ext uri="{FF2B5EF4-FFF2-40B4-BE49-F238E27FC236}">
+                <a16:creationId xmlns:a16="http://schemas.microsoft.com/office/drawing/2014/main" id="{AE7A394C-08C6-4733-8683-DF32A5E3D9A1}"/>
+              </a:ext>
+            </a:extLst>
+          </p:cNvPr>
+          <p:cNvSpPr>
+            <a:spLocks noGrp="1"/>
+          </p:cNvSpPr>
+          <p:nvPr>
+            <p:ph type="title"/>
+          </p:nvPr>
+        </p:nvSpPr>
+        <p:spPr/>
+        <p:txBody>
+          <a:bodyPr/>
+          <a:lstStyle/>
+          <a:p>
+            <a:r>
+              <a:rPr lang="hu-HU" dirty="0"/>
+              <a:t>Backend</a:t>
+            </a:r>
+          </a:p>
+        </p:txBody>
+      </p:sp>
+      <p:sp>
+        <p:nvSpPr>
+          <p:cNvPr id="3" name="Tartalom helye 2">
+            <a:extLst>
+              <a:ext uri="{FF2B5EF4-FFF2-40B4-BE49-F238E27FC236}">
+                <a16:creationId xmlns:a16="http://schemas.microsoft.com/office/drawing/2014/main" id="{FE580785-C82D-4D70-8F17-4BD29507C6AB}"/>
+              </a:ext>
+            </a:extLst>
+          </p:cNvPr>
+          <p:cNvSpPr>
+            <a:spLocks noGrp="1"/>
+          </p:cNvSpPr>
+          <p:nvPr>
+            <p:ph idx="1"/>
+          </p:nvPr>
+        </p:nvSpPr>
+        <p:spPr/>
+        <p:txBody>
+          <a:bodyPr/>
+          <a:lstStyle/>
+          <a:p>
+            <a:r>
+              <a:rPr lang="hu-HU" dirty="0"/>
+              <a:t>Postman</a:t>
+            </a:r>
+          </a:p>
+          <a:p>
+            <a:r>
+              <a:rPr lang="hu-HU" dirty="0"/>
+              <a:t>Minden végpont</a:t>
+            </a:r>
+          </a:p>
+          <a:p>
+            <a:r>
+              <a:rPr lang="hu-HU" dirty="0"/>
+              <a:t>Ideiglenes adatbázis</a:t>
+            </a:r>
+          </a:p>
+        </p:txBody>
+      </p:sp>
+    </p:spTree>
+    <p:extLst>
+      <p:ext uri="{BB962C8B-B14F-4D97-AF65-F5344CB8AC3E}">
+        <p14:creationId xmlns:p14="http://schemas.microsoft.com/office/powerpoint/2010/main" val="2782414"/>
+      </p:ext>
+    </p:extLst>
+  </p:cSld>
+  <p:clrMapOvr>
+    <a:masterClrMapping/>
+  </p:clrMapOvr>
+  <mc:AlternateContent xmlns:mc="http://schemas.openxmlformats.org/markup-compatibility/2006" xmlns:p159="http://schemas.microsoft.com/office/powerpoint/2015/09/main">
+    <mc:Choice Requires="p159">
+      <p:transition xmlns:p14="http://schemas.microsoft.com/office/powerpoint/2010/main" spd="slow" p14:dur="2000">
+        <p159:morph option="byObject"/>
+      </p:transition>
+    </mc:Choice>
+    <mc:Fallback xmlns="">
+      <p:transition spd="slow">
+        <p:fade/>
+      </p:transition>
+    </mc:Fallback>
+  </mc:AlternateContent>
+</p:sld>
+</file>
+
+<file path=ppt/slides/slide15.xml><?xml version="1.0" encoding="utf-8"?>
+<p:sld xmlns:a="http://schemas.openxmlformats.org/drawingml/2006/main" xmlns:r="http://schemas.openxmlformats.org/officeDocument/2006/relationships" xmlns:p="http://schemas.openxmlformats.org/presentationml/2006/main">
+  <p:cSld>
+    <p:spTree>
+      <p:nvGrpSpPr>
+        <p:cNvPr id="1" name=""/>
+        <p:cNvGrpSpPr/>
+        <p:nvPr/>
+      </p:nvGrpSpPr>
+      <p:grpSpPr>
+        <a:xfrm>
+          <a:off x="0" y="0"/>
+          <a:ext cx="0" cy="0"/>
+          <a:chOff x="0" y="0"/>
+          <a:chExt cx="0" cy="0"/>
+        </a:xfrm>
+      </p:grpSpPr>
+      <p:sp>
+        <p:nvSpPr>
+          <p:cNvPr id="2" name="Cím 1">
+            <a:extLst>
+              <a:ext uri="{FF2B5EF4-FFF2-40B4-BE49-F238E27FC236}">
+                <a16:creationId xmlns:a16="http://schemas.microsoft.com/office/drawing/2014/main" id="{0E90F1C4-F976-42A1-97ED-66D6B6097870}"/>
+              </a:ext>
+            </a:extLst>
+          </p:cNvPr>
+          <p:cNvSpPr>
+            <a:spLocks noGrp="1"/>
+          </p:cNvSpPr>
+          <p:nvPr>
+            <p:ph type="title"/>
+          </p:nvPr>
+        </p:nvSpPr>
+        <p:spPr/>
+        <p:txBody>
+          <a:bodyPr/>
+          <a:lstStyle/>
+          <a:p>
+            <a:r>
+              <a:rPr lang="hu-HU" dirty="0"/>
+              <a:t>Jövőbeli tervek</a:t>
+            </a:r>
+          </a:p>
+        </p:txBody>
+      </p:sp>
+      <p:sp>
+        <p:nvSpPr>
+          <p:cNvPr id="4" name="Szöveg helye 3">
+            <a:extLst>
+              <a:ext uri="{FF2B5EF4-FFF2-40B4-BE49-F238E27FC236}">
+                <a16:creationId xmlns:a16="http://schemas.microsoft.com/office/drawing/2014/main" id="{23F902DA-9191-4CBE-A40F-1673EBC757F6}"/>
+              </a:ext>
+            </a:extLst>
+          </p:cNvPr>
+          <p:cNvSpPr>
+            <a:spLocks noGrp="1"/>
+          </p:cNvSpPr>
+          <p:nvPr>
+            <p:ph type="body" idx="1"/>
+          </p:nvPr>
+        </p:nvSpPr>
+        <p:spPr/>
+        <p:txBody>
+          <a:bodyPr/>
+          <a:lstStyle/>
+          <a:p>
+            <a:endParaRPr lang="hu-HU"/>
+          </a:p>
+        </p:txBody>
+      </p:sp>
+    </p:spTree>
+    <p:extLst>
+      <p:ext uri="{BB962C8B-B14F-4D97-AF65-F5344CB8AC3E}">
+        <p14:creationId xmlns:p14="http://schemas.microsoft.com/office/powerpoint/2010/main" val="2111151108"/>
+      </p:ext>
+    </p:extLst>
+  </p:cSld>
+  <p:clrMapOvr>
+    <a:masterClrMapping/>
+  </p:clrMapOvr>
+  <mc:AlternateContent xmlns:mc="http://schemas.openxmlformats.org/markup-compatibility/2006">
+    <mc:Choice xmlns:p159="http://schemas.microsoft.com/office/powerpoint/2015/09/main" Requires="p159">
+      <p:transition xmlns:p14="http://schemas.microsoft.com/office/powerpoint/2010/main" spd="slow" p14:dur="2000" advTm="1000">
+        <p159:morph option="byObject"/>
+      </p:transition>
+    </mc:Choice>
+    <mc:Fallback>
+      <p:transition spd="slow" advTm="1000">
+        <p:fade/>
+      </p:transition>
+    </mc:Fallback>
+  </mc:AlternateContent>
+</p:sld>
+</file>
+
+<file path=ppt/slides/slide16.xml><?xml version="1.0" encoding="utf-8"?>
+<p:sld xmlns:a="http://schemas.openxmlformats.org/drawingml/2006/main" xmlns:r="http://schemas.openxmlformats.org/officeDocument/2006/relationships" xmlns:p="http://schemas.openxmlformats.org/presentationml/2006/main">
+  <p:cSld>
+    <p:spTree>
+      <p:nvGrpSpPr>
+        <p:cNvPr id="1" name=""/>
+        <p:cNvGrpSpPr/>
+        <p:nvPr/>
+      </p:nvGrpSpPr>
+      <p:grpSpPr>
+        <a:xfrm>
+          <a:off x="0" y="0"/>
+          <a:ext cx="0" cy="0"/>
+          <a:chOff x="0" y="0"/>
+          <a:chExt cx="0" cy="0"/>
+        </a:xfrm>
+      </p:grpSpPr>
+      <p:sp>
+        <p:nvSpPr>
+          <p:cNvPr id="2" name="Cím 1">
+            <a:extLst>
+              <a:ext uri="{FF2B5EF4-FFF2-40B4-BE49-F238E27FC236}">
+                <a16:creationId xmlns:a16="http://schemas.microsoft.com/office/drawing/2014/main" id="{AE7A394C-08C6-4733-8683-DF32A5E3D9A1}"/>
+              </a:ext>
+            </a:extLst>
+          </p:cNvPr>
+          <p:cNvSpPr>
+            <a:spLocks noGrp="1"/>
+          </p:cNvSpPr>
+          <p:nvPr>
+            <p:ph type="title"/>
+          </p:nvPr>
+        </p:nvSpPr>
+        <p:spPr/>
+        <p:txBody>
+          <a:bodyPr/>
+          <a:lstStyle/>
+          <a:p>
+            <a:endParaRPr lang="hu-HU" dirty="0"/>
+          </a:p>
+        </p:txBody>
+      </p:sp>
+      <p:sp>
+        <p:nvSpPr>
+          <p:cNvPr id="3" name="Tartalom helye 2">
+            <a:extLst>
+              <a:ext uri="{FF2B5EF4-FFF2-40B4-BE49-F238E27FC236}">
+                <a16:creationId xmlns:a16="http://schemas.microsoft.com/office/drawing/2014/main" id="{FE580785-C82D-4D70-8F17-4BD29507C6AB}"/>
+              </a:ext>
+            </a:extLst>
+          </p:cNvPr>
+          <p:cNvSpPr>
+            <a:spLocks noGrp="1"/>
+          </p:cNvSpPr>
+          <p:nvPr>
+            <p:ph idx="1"/>
+          </p:nvPr>
+        </p:nvSpPr>
+        <p:spPr/>
+        <p:txBody>
+          <a:bodyPr/>
+          <a:lstStyle/>
+          <a:p>
+            <a:r>
+              <a:rPr lang="hu-HU" dirty="0"/>
+              <a:t>Teljeskörű raktár kezelés</a:t>
+            </a:r>
+          </a:p>
+          <a:p>
+            <a:r>
+              <a:rPr lang="hu-HU" dirty="0"/>
+              <a:t>Nemzeti Adó- és Vámhivatal által elfogadott bármely nemű pénzügyi dokumentum kiállítás</a:t>
+            </a:r>
+          </a:p>
+        </p:txBody>
+      </p:sp>
+    </p:spTree>
+    <p:extLst>
+      <p:ext uri="{BB962C8B-B14F-4D97-AF65-F5344CB8AC3E}">
+        <p14:creationId xmlns:p14="http://schemas.microsoft.com/office/powerpoint/2010/main" val="651599319"/>
+      </p:ext>
+    </p:extLst>
+  </p:cSld>
+  <p:clrMapOvr>
+    <a:masterClrMapping/>
+  </p:clrMapOvr>
+  <mc:AlternateContent xmlns:mc="http://schemas.openxmlformats.org/markup-compatibility/2006" xmlns:p159="http://schemas.microsoft.com/office/powerpoint/2015/09/main">
+    <mc:Choice Requires="p159">
+      <p:transition xmlns:p14="http://schemas.microsoft.com/office/powerpoint/2010/main" spd="slow" p14:dur="2000">
+        <p159:morph option="byObject"/>
+      </p:transition>
+    </mc:Choice>
+    <mc:Fallback xmlns="">
+      <p:transition spd="slow">
+        <p:fade/>
+      </p:transition>
+    </mc:Fallback>
+  </mc:AlternateContent>
+</p:sld>
+</file>
+
+<file path=ppt/slides/slide17.xml><?xml version="1.0" encoding="utf-8"?>
+<p:sld xmlns:a="http://schemas.openxmlformats.org/drawingml/2006/main" xmlns:r="http://schemas.openxmlformats.org/officeDocument/2006/relationships" xmlns:p="http://schemas.openxmlformats.org/presentationml/2006/main">
+  <p:cSld>
+    <p:spTree>
+      <p:nvGrpSpPr>
+        <p:cNvPr id="1" name=""/>
+        <p:cNvGrpSpPr/>
+        <p:nvPr/>
+      </p:nvGrpSpPr>
+      <p:grpSpPr>
+        <a:xfrm>
+          <a:off x="0" y="0"/>
+          <a:ext cx="0" cy="0"/>
+          <a:chOff x="0" y="0"/>
+          <a:chExt cx="0" cy="0"/>
+        </a:xfrm>
+      </p:grpSpPr>
+      <p:sp>
+        <p:nvSpPr>
+          <p:cNvPr id="2" name="Cím 1">
+            <a:extLst>
+              <a:ext uri="{FF2B5EF4-FFF2-40B4-BE49-F238E27FC236}">
                 <a16:creationId xmlns:a16="http://schemas.microsoft.com/office/drawing/2014/main" id="{5284D067-9050-4E87-80B9-A68BE769E3DD}"/>
               </a:ext>
             </a:extLst>
@@ -4565,6 +4914,89 @@
 </p:sld>
 </file>
 
+<file path=ppt/slides/slide18.xml><?xml version="1.0" encoding="utf-8"?>
+<p:sld xmlns:a="http://schemas.openxmlformats.org/drawingml/2006/main" xmlns:r="http://schemas.openxmlformats.org/officeDocument/2006/relationships" xmlns:p="http://schemas.openxmlformats.org/presentationml/2006/main" show="0">
+  <p:cSld>
+    <p:spTree>
+      <p:nvGrpSpPr>
+        <p:cNvPr id="1" name=""/>
+        <p:cNvGrpSpPr/>
+        <p:nvPr/>
+      </p:nvGrpSpPr>
+      <p:grpSpPr>
+        <a:xfrm>
+          <a:off x="0" y="0"/>
+          <a:ext cx="0" cy="0"/>
+          <a:chOff x="0" y="0"/>
+          <a:chExt cx="0" cy="0"/>
+        </a:xfrm>
+      </p:grpSpPr>
+      <p:sp>
+        <p:nvSpPr>
+          <p:cNvPr id="2" name="Cím 1">
+            <a:extLst>
+              <a:ext uri="{FF2B5EF4-FFF2-40B4-BE49-F238E27FC236}">
+                <a16:creationId xmlns:a16="http://schemas.microsoft.com/office/drawing/2014/main" id="{A31EE3CA-320B-4F4D-B4A4-D3460DE5EA5C}"/>
+              </a:ext>
+            </a:extLst>
+          </p:cNvPr>
+          <p:cNvSpPr>
+            <a:spLocks noGrp="1"/>
+          </p:cNvSpPr>
+          <p:nvPr>
+            <p:ph type="title"/>
+          </p:nvPr>
+        </p:nvSpPr>
+        <p:spPr/>
+        <p:txBody>
+          <a:bodyPr/>
+          <a:lstStyle/>
+          <a:p>
+            <a:r>
+              <a:rPr lang="hu-HU" dirty="0"/>
+              <a:t>Források</a:t>
+            </a:r>
+          </a:p>
+        </p:txBody>
+      </p:sp>
+      <p:sp>
+        <p:nvSpPr>
+          <p:cNvPr id="3" name="Tartalom helye 2">
+            <a:extLst>
+              <a:ext uri="{FF2B5EF4-FFF2-40B4-BE49-F238E27FC236}">
+                <a16:creationId xmlns:a16="http://schemas.microsoft.com/office/drawing/2014/main" id="{C59A2973-5702-4609-B1CB-E4ABEEC1D16A}"/>
+              </a:ext>
+            </a:extLst>
+          </p:cNvPr>
+          <p:cNvSpPr>
+            <a:spLocks noGrp="1"/>
+          </p:cNvSpPr>
+          <p:nvPr>
+            <p:ph idx="1"/>
+          </p:nvPr>
+        </p:nvSpPr>
+        <p:spPr/>
+        <p:txBody>
+          <a:bodyPr/>
+          <a:lstStyle/>
+          <a:p>
+            <a:endParaRPr lang="hu-HU"/>
+          </a:p>
+        </p:txBody>
+      </p:sp>
+    </p:spTree>
+    <p:extLst>
+      <p:ext uri="{BB962C8B-B14F-4D97-AF65-F5344CB8AC3E}">
+        <p14:creationId xmlns:p14="http://schemas.microsoft.com/office/powerpoint/2010/main" val="1115102379"/>
+      </p:ext>
+    </p:extLst>
+  </p:cSld>
+  <p:clrMapOvr>
+    <a:masterClrMapping/>
+  </p:clrMapOvr>
+</p:sld>
+</file>
+
 <file path=ppt/slides/slide2.xml><?xml version="1.0" encoding="utf-8"?>
 <p:sld xmlns:a="http://schemas.openxmlformats.org/drawingml/2006/main" xmlns:r="http://schemas.openxmlformats.org/officeDocument/2006/relationships" xmlns:p="http://schemas.openxmlformats.org/presentationml/2006/main">
   <p:cSld>
@@ -4605,7 +5037,7 @@
           <a:p>
             <a:r>
               <a:rPr lang="hu-HU" dirty="0"/>
-              <a:t>Probléma </a:t>
+              <a:t>Probléma</a:t>
             </a:r>
           </a:p>
         </p:txBody>
@@ -4633,63 +5065,28 @@
           <a:p>
             <a:r>
               <a:rPr lang="hu-HU" dirty="0"/>
-              <a:t>Sok KKV még mindig papíron végzi adminisztrációs feladatait</a:t>
-            </a:r>
-          </a:p>
-          <a:p>
+              <a:t>Probléma:</a:t>
+            </a:r>
+          </a:p>
+          <a:p>
+            <a:pPr lvl="1"/>
             <a:r>
               <a:rPr lang="hu-HU" dirty="0"/>
-              <a:t>Pl.: </a:t>
+              <a:t>Sok KKV még papíralapon vagy táblázatokban dolgozik</a:t>
             </a:r>
           </a:p>
           <a:p>
             <a:pPr lvl="1"/>
             <a:r>
               <a:rPr lang="hu-HU" dirty="0"/>
-              <a:t>rendelések rögzítése</a:t>
+              <a:t>Időigényes és hibalehetőségekkel teli folyamatok</a:t>
             </a:r>
           </a:p>
           <a:p>
             <a:pPr lvl="1"/>
             <a:r>
               <a:rPr lang="hu-HU" dirty="0"/>
-              <a:t>rendelések összekészítése</a:t>
-            </a:r>
-          </a:p>
-          <a:p>
-            <a:pPr lvl="1"/>
-            <a:r>
-              <a:rPr lang="hu-HU" dirty="0"/>
-              <a:t>fuvarlevelek kiállítása</a:t>
-            </a:r>
-          </a:p>
-          <a:p>
-            <a:r>
-              <a:rPr lang="hu-HU" dirty="0">
-                <a:sym typeface="Wingdings" panose="05000000000000000000" pitchFamily="2" charset="2"/>
-              </a:rPr>
-              <a:t> Ezek így:</a:t>
-            </a:r>
-          </a:p>
-          <a:p>
-            <a:pPr lvl="1"/>
-            <a:r>
-              <a:rPr lang="hu-HU" dirty="0"/>
-              <a:t>Időigényesek</a:t>
-            </a:r>
-          </a:p>
-          <a:p>
-            <a:pPr lvl="1"/>
-            <a:r>
-              <a:rPr lang="hu-HU" dirty="0"/>
-              <a:t>Hibalehetőségekkel terheltek</a:t>
-            </a:r>
-          </a:p>
-          <a:p>
-            <a:pPr lvl="1"/>
-            <a:r>
-              <a:rPr lang="hu-HU" dirty="0"/>
-              <a:t>Nehezen átláthatóak</a:t>
+              <a:t>Nehezen átlátható működés növekedés esetén</a:t>
             </a:r>
           </a:p>
         </p:txBody>
@@ -4741,7 +5138,7 @@
           <p:cNvPr id="2" name="Cím 1">
             <a:extLst>
               <a:ext uri="{FF2B5EF4-FFF2-40B4-BE49-F238E27FC236}">
-                <a16:creationId xmlns:a16="http://schemas.microsoft.com/office/drawing/2014/main" id="{505BCB00-89DF-4315-B4A5-61166E0A9614}"/>
+                <a16:creationId xmlns:a16="http://schemas.microsoft.com/office/drawing/2014/main" id="{E05B2EF8-01D1-482C-A087-1FC460267696}"/>
               </a:ext>
             </a:extLst>
           </p:cNvPr>
@@ -4759,7 +5156,7 @@
           <a:p>
             <a:r>
               <a:rPr lang="hu-HU" dirty="0"/>
-              <a:t>Funkciók</a:t>
+              <a:t>Cél</a:t>
             </a:r>
           </a:p>
         </p:txBody>
@@ -4769,7 +5166,7 @@
           <p:cNvPr id="3" name="Tartalom helye 2">
             <a:extLst>
               <a:ext uri="{FF2B5EF4-FFF2-40B4-BE49-F238E27FC236}">
-                <a16:creationId xmlns:a16="http://schemas.microsoft.com/office/drawing/2014/main" id="{BA5B71A9-A213-475E-B1EB-4D03D0BC96B6}"/>
+                <a16:creationId xmlns:a16="http://schemas.microsoft.com/office/drawing/2014/main" id="{95213F36-94ED-4E70-AFCF-1EAB5963E29B}"/>
               </a:ext>
             </a:extLst>
           </p:cNvPr>
@@ -4787,46 +5184,46 @@
           <a:p>
             <a:r>
               <a:rPr lang="hu-HU" dirty="0"/>
-              <a:t>Rendeléskezelés</a:t>
-            </a:r>
-          </a:p>
-          <a:p>
+              <a:t>Cél:</a:t>
+            </a:r>
+          </a:p>
+          <a:p>
+            <a:pPr lvl="1"/>
             <a:r>
               <a:rPr lang="hu-HU" dirty="0"/>
-              <a:t>Katalóguskezelés</a:t>
-            </a:r>
-          </a:p>
-          <a:p>
+              <a:t>Egy webalapú rendszer fejlesztése, amely segíti a kereskedelmi </a:t>
+            </a:r>
+            <a:r>
+              <a:rPr lang="hu-HU" b="1" dirty="0"/>
+              <a:t>kis- és középvállalkozások (KKV-k)</a:t>
+            </a:r>
             <a:r>
               <a:rPr lang="hu-HU" dirty="0"/>
-              <a:t>Készletezés</a:t>
-            </a:r>
-          </a:p>
-          <a:p>
-            <a:r>
-              <a:rPr lang="hu-HU" dirty="0"/>
-              <a:t>Adminisztráció</a:t>
-            </a:r>
+              <a:t> adminisztratív és logisztikai folyamatait.</a:t>
+            </a:r>
+          </a:p>
+          <a:p>
+            <a:endParaRPr lang="hu-HU" dirty="0"/>
           </a:p>
         </p:txBody>
       </p:sp>
     </p:spTree>
     <p:extLst>
       <p:ext uri="{BB962C8B-B14F-4D97-AF65-F5344CB8AC3E}">
-        <p14:creationId xmlns:p14="http://schemas.microsoft.com/office/powerpoint/2010/main" val="543448373"/>
+        <p14:creationId xmlns:p14="http://schemas.microsoft.com/office/powerpoint/2010/main" val="1694521706"/>
       </p:ext>
     </p:extLst>
   </p:cSld>
   <p:clrMapOvr>
     <a:masterClrMapping/>
   </p:clrMapOvr>
-  <mc:AlternateContent xmlns:mc="http://schemas.openxmlformats.org/markup-compatibility/2006" xmlns:p159="http://schemas.microsoft.com/office/powerpoint/2015/09/main">
-    <mc:Choice Requires="p159">
+  <mc:AlternateContent xmlns:mc="http://schemas.openxmlformats.org/markup-compatibility/2006">
+    <mc:Choice xmlns:p159="http://schemas.microsoft.com/office/powerpoint/2015/09/main" Requires="p159">
       <p:transition xmlns:p14="http://schemas.microsoft.com/office/powerpoint/2010/main" spd="slow" p14:dur="2000">
         <p159:morph option="byObject"/>
       </p:transition>
     </mc:Choice>
-    <mc:Fallback xmlns="">
+    <mc:Fallback>
       <p:transition spd="slow">
         <p:fade/>
       </p:transition>
@@ -4857,7 +5254,7 @@
           <p:cNvPr id="2" name="Cím 1">
             <a:extLst>
               <a:ext uri="{FF2B5EF4-FFF2-40B4-BE49-F238E27FC236}">
-                <a16:creationId xmlns:a16="http://schemas.microsoft.com/office/drawing/2014/main" id="{87A2C625-E5D0-4D57-9344-D960B3267BAB}"/>
+                <a16:creationId xmlns:a16="http://schemas.microsoft.com/office/drawing/2014/main" id="{505BCB00-89DF-4315-B4A5-61166E0A9614}"/>
               </a:ext>
             </a:extLst>
           </p:cNvPr>
@@ -4875,17 +5272,17 @@
           <a:p>
             <a:r>
               <a:rPr lang="hu-HU" dirty="0"/>
-              <a:t>Csapatmunka</a:t>
-            </a:r>
-          </a:p>
-        </p:txBody>
-      </p:sp>
-      <p:sp>
-        <p:nvSpPr>
-          <p:cNvPr id="3" name="Szöveg helye 2">
+              <a:t>Funkciók</a:t>
+            </a:r>
+          </a:p>
+        </p:txBody>
+      </p:sp>
+      <p:sp>
+        <p:nvSpPr>
+          <p:cNvPr id="3" name="Tartalom helye 2">
             <a:extLst>
               <a:ext uri="{FF2B5EF4-FFF2-40B4-BE49-F238E27FC236}">
-                <a16:creationId xmlns:a16="http://schemas.microsoft.com/office/drawing/2014/main" id="{E41DC482-5184-4D16-8171-23C6C886A424}"/>
+                <a16:creationId xmlns:a16="http://schemas.microsoft.com/office/drawing/2014/main" id="{BA5B71A9-A213-475E-B1EB-4D03D0BC96B6}"/>
               </a:ext>
             </a:extLst>
           </p:cNvPr>
@@ -4893,22 +5290,55 @@
             <a:spLocks noGrp="1"/>
           </p:cNvSpPr>
           <p:nvPr>
-            <p:ph type="body" idx="1"/>
-          </p:nvPr>
-        </p:nvSpPr>
-        <p:spPr/>
-        <p:txBody>
-          <a:bodyPr/>
-          <a:lstStyle/>
-          <a:p>
-            <a:endParaRPr lang="hu-HU"/>
+            <p:ph idx="1"/>
+          </p:nvPr>
+        </p:nvSpPr>
+        <p:spPr/>
+        <p:txBody>
+          <a:bodyPr/>
+          <a:lstStyle/>
+          <a:p>
+            <a:r>
+              <a:rPr lang="hu-HU" dirty="0"/>
+              <a:t>A rendszer három fő területet kezel:</a:t>
+            </a:r>
+          </a:p>
+          <a:p>
+            <a:pPr marL="685800" lvl="1" indent="-457200">
+              <a:buFont typeface="+mj-lt"/>
+              <a:buAutoNum type="arabicPeriod"/>
+            </a:pPr>
+            <a:r>
+              <a:rPr lang="hu-HU" dirty="0"/>
+              <a:t>Rendeléskezelés</a:t>
+            </a:r>
+          </a:p>
+          <a:p>
+            <a:pPr marL="685800" lvl="1" indent="-457200">
+              <a:buFont typeface="+mj-lt"/>
+              <a:buAutoNum type="arabicPeriod"/>
+            </a:pPr>
+            <a:r>
+              <a:rPr lang="hu-HU" dirty="0"/>
+              <a:t>Készletezés</a:t>
+            </a:r>
+          </a:p>
+          <a:p>
+            <a:pPr marL="685800" lvl="1" indent="-457200">
+              <a:buFont typeface="+mj-lt"/>
+              <a:buAutoNum type="arabicPeriod"/>
+            </a:pPr>
+            <a:r>
+              <a:rPr lang="hu-HU" dirty="0"/>
+              <a:t>Adminisztráció</a:t>
+            </a:r>
           </a:p>
         </p:txBody>
       </p:sp>
     </p:spTree>
     <p:extLst>
       <p:ext uri="{BB962C8B-B14F-4D97-AF65-F5344CB8AC3E}">
-        <p14:creationId xmlns:p14="http://schemas.microsoft.com/office/powerpoint/2010/main" val="1091898434"/>
+        <p14:creationId xmlns:p14="http://schemas.microsoft.com/office/powerpoint/2010/main" val="543448373"/>
       </p:ext>
     </p:extLst>
   </p:cSld>
@@ -4952,7 +5382,7 @@
           <p:cNvPr id="2" name="Cím 1">
             <a:extLst>
               <a:ext uri="{FF2B5EF4-FFF2-40B4-BE49-F238E27FC236}">
-                <a16:creationId xmlns:a16="http://schemas.microsoft.com/office/drawing/2014/main" id="{A7B0A38C-899F-4809-9705-76A0B6F226E7}"/>
+                <a16:creationId xmlns:a16="http://schemas.microsoft.com/office/drawing/2014/main" id="{87A2C625-E5D0-4D57-9344-D960B3267BAB}"/>
               </a:ext>
             </a:extLst>
           </p:cNvPr>
@@ -4970,17 +5400,17 @@
           <a:p>
             <a:r>
               <a:rPr lang="hu-HU" dirty="0"/>
-              <a:t>Megvalósítás</a:t>
-            </a:r>
-          </a:p>
-        </p:txBody>
-      </p:sp>
-      <p:sp>
-        <p:nvSpPr>
-          <p:cNvPr id="3" name="Tartalom helye 2">
+              <a:t>Csapatmunka</a:t>
+            </a:r>
+          </a:p>
+        </p:txBody>
+      </p:sp>
+      <p:sp>
+        <p:nvSpPr>
+          <p:cNvPr id="3" name="Szöveg helye 2">
             <a:extLst>
               <a:ext uri="{FF2B5EF4-FFF2-40B4-BE49-F238E27FC236}">
-                <a16:creationId xmlns:a16="http://schemas.microsoft.com/office/drawing/2014/main" id="{6AB234CC-4FAD-4202-B150-304D9532890F}"/>
+                <a16:creationId xmlns:a16="http://schemas.microsoft.com/office/drawing/2014/main" id="{E41DC482-5184-4D16-8171-23C6C886A424}"/>
               </a:ext>
             </a:extLst>
           </p:cNvPr>
@@ -4988,51 +5418,36 @@
             <a:spLocks noGrp="1"/>
           </p:cNvSpPr>
           <p:nvPr>
-            <p:ph idx="1"/>
-          </p:nvPr>
-        </p:nvSpPr>
-        <p:spPr/>
-        <p:txBody>
-          <a:bodyPr/>
-          <a:lstStyle/>
-          <a:p>
-            <a:r>
-              <a:rPr lang="hu-HU" dirty="0"/>
-              <a:t>GitHub</a:t>
-            </a:r>
-          </a:p>
-          <a:p>
-            <a:r>
-              <a:rPr lang="hu-HU" dirty="0"/>
-              <a:t>Személyes kapcsolattartás</a:t>
-            </a:r>
-          </a:p>
-          <a:p>
-            <a:r>
-              <a:rPr lang="hu-HU" dirty="0"/>
-              <a:t>Messenger – online kapcsolattartás</a:t>
-            </a:r>
+            <p:ph type="body" idx="1"/>
+          </p:nvPr>
+        </p:nvSpPr>
+        <p:spPr/>
+        <p:txBody>
+          <a:bodyPr/>
+          <a:lstStyle/>
+          <a:p>
+            <a:endParaRPr lang="hu-HU"/>
           </a:p>
         </p:txBody>
       </p:sp>
     </p:spTree>
     <p:extLst>
       <p:ext uri="{BB962C8B-B14F-4D97-AF65-F5344CB8AC3E}">
-        <p14:creationId xmlns:p14="http://schemas.microsoft.com/office/powerpoint/2010/main" val="2953559893"/>
+        <p14:creationId xmlns:p14="http://schemas.microsoft.com/office/powerpoint/2010/main" val="1091898434"/>
       </p:ext>
     </p:extLst>
   </p:cSld>
   <p:clrMapOvr>
     <a:masterClrMapping/>
   </p:clrMapOvr>
-  <mc:AlternateContent xmlns:mc="http://schemas.openxmlformats.org/markup-compatibility/2006" xmlns:p159="http://schemas.microsoft.com/office/powerpoint/2015/09/main">
-    <mc:Choice Requires="p159">
-      <p:transition xmlns:p14="http://schemas.microsoft.com/office/powerpoint/2010/main" spd="slow" p14:dur="2000">
+  <mc:AlternateContent xmlns:mc="http://schemas.openxmlformats.org/markup-compatibility/2006">
+    <mc:Choice xmlns:p159="http://schemas.microsoft.com/office/powerpoint/2015/09/main" Requires="p159">
+      <p:transition xmlns:p14="http://schemas.microsoft.com/office/powerpoint/2010/main" spd="slow" p14:dur="2000" advTm="1000">
         <p159:morph option="byObject"/>
       </p:transition>
     </mc:Choice>
-    <mc:Fallback xmlns="">
-      <p:transition spd="slow">
+    <mc:Fallback>
+      <p:transition spd="slow" advTm="1000">
         <p:fade/>
       </p:transition>
     </mc:Fallback>
@@ -5062,7 +5477,7 @@
           <p:cNvPr id="2" name="Cím 1">
             <a:extLst>
               <a:ext uri="{FF2B5EF4-FFF2-40B4-BE49-F238E27FC236}">
-                <a16:creationId xmlns:a16="http://schemas.microsoft.com/office/drawing/2014/main" id="{57CCEA94-6D2B-4544-8D09-128CB9A0B3F2}"/>
+                <a16:creationId xmlns:a16="http://schemas.microsoft.com/office/drawing/2014/main" id="{A7B0A38C-899F-4809-9705-76A0B6F226E7}"/>
               </a:ext>
             </a:extLst>
           </p:cNvPr>
@@ -5080,17 +5495,17 @@
           <a:p>
             <a:r>
               <a:rPr lang="hu-HU" dirty="0"/>
-              <a:t>Feladatok felosztása</a:t>
-            </a:r>
-          </a:p>
-        </p:txBody>
-      </p:sp>
-      <p:sp>
-        <p:nvSpPr>
-          <p:cNvPr id="9" name="Szöveg helye 8">
+              <a:t>Megvalósítás</a:t>
+            </a:r>
+          </a:p>
+        </p:txBody>
+      </p:sp>
+      <p:sp>
+        <p:nvSpPr>
+          <p:cNvPr id="3" name="Tartalom helye 2">
             <a:extLst>
               <a:ext uri="{FF2B5EF4-FFF2-40B4-BE49-F238E27FC236}">
-                <a16:creationId xmlns:a16="http://schemas.microsoft.com/office/drawing/2014/main" id="{F7DF4516-0EEF-4AFC-9EC0-BFE62AA0C32B}"/>
+                <a16:creationId xmlns:a16="http://schemas.microsoft.com/office/drawing/2014/main" id="{6AB234CC-4FAD-4202-B150-304D9532890F}"/>
               </a:ext>
             </a:extLst>
           </p:cNvPr>
@@ -5098,7 +5513,7 @@
             <a:spLocks noGrp="1"/>
           </p:cNvSpPr>
           <p:nvPr>
-            <p:ph type="body" idx="1"/>
+            <p:ph idx="1"/>
           </p:nvPr>
         </p:nvSpPr>
         <p:spPr/>
@@ -5108,115 +5523,19 @@
           <a:p>
             <a:r>
               <a:rPr lang="hu-HU" dirty="0"/>
-              <a:t>Csuka Tamás József</a:t>
-            </a:r>
-          </a:p>
-        </p:txBody>
-      </p:sp>
-      <p:sp>
-        <p:nvSpPr>
-          <p:cNvPr id="10" name="Tartalom helye 9">
-            <a:extLst>
-              <a:ext uri="{FF2B5EF4-FFF2-40B4-BE49-F238E27FC236}">
-                <a16:creationId xmlns:a16="http://schemas.microsoft.com/office/drawing/2014/main" id="{B13D6331-A17C-43C2-90FE-C03EDC171D8B}"/>
-              </a:ext>
-            </a:extLst>
-          </p:cNvPr>
-          <p:cNvSpPr>
-            <a:spLocks noGrp="1"/>
-          </p:cNvSpPr>
-          <p:nvPr>
-            <p:ph sz="half" idx="2"/>
-          </p:nvPr>
-        </p:nvSpPr>
-        <p:spPr/>
-        <p:txBody>
-          <a:bodyPr/>
-          <a:lstStyle/>
+              <a:t>GitHub</a:t>
+            </a:r>
+          </a:p>
           <a:p>
             <a:r>
               <a:rPr lang="hu-HU" dirty="0"/>
-              <a:t>Frontend</a:t>
+              <a:t>Személyes kapcsolattartás</a:t>
             </a:r>
           </a:p>
           <a:p>
             <a:r>
               <a:rPr lang="hu-HU" dirty="0"/>
-              <a:t>Design/UI</a:t>
-            </a:r>
-          </a:p>
-          <a:p>
-            <a:r>
-              <a:rPr lang="hu-HU" dirty="0"/>
-              <a:t>Logó</a:t>
-            </a:r>
-          </a:p>
-        </p:txBody>
-      </p:sp>
-      <p:sp>
-        <p:nvSpPr>
-          <p:cNvPr id="11" name="Szöveg helye 10">
-            <a:extLst>
-              <a:ext uri="{FF2B5EF4-FFF2-40B4-BE49-F238E27FC236}">
-                <a16:creationId xmlns:a16="http://schemas.microsoft.com/office/drawing/2014/main" id="{B73DDD0E-4E99-4524-8866-62B68A816A52}"/>
-              </a:ext>
-            </a:extLst>
-          </p:cNvPr>
-          <p:cNvSpPr>
-            <a:spLocks noGrp="1"/>
-          </p:cNvSpPr>
-          <p:nvPr>
-            <p:ph type="body" sz="quarter" idx="3"/>
-          </p:nvPr>
-        </p:nvSpPr>
-        <p:spPr/>
-        <p:txBody>
-          <a:bodyPr/>
-          <a:lstStyle/>
-          <a:p>
-            <a:r>
-              <a:rPr lang="hu-HU" dirty="0"/>
-              <a:t>Paller Péter Décse</a:t>
-            </a:r>
-          </a:p>
-        </p:txBody>
-      </p:sp>
-      <p:sp>
-        <p:nvSpPr>
-          <p:cNvPr id="12" name="Tartalom helye 11">
-            <a:extLst>
-              <a:ext uri="{FF2B5EF4-FFF2-40B4-BE49-F238E27FC236}">
-                <a16:creationId xmlns:a16="http://schemas.microsoft.com/office/drawing/2014/main" id="{A5E46CDC-E251-459C-AF7F-2ECE7D8E2261}"/>
-              </a:ext>
-            </a:extLst>
-          </p:cNvPr>
-          <p:cNvSpPr>
-            <a:spLocks noGrp="1"/>
-          </p:cNvSpPr>
-          <p:nvPr>
-            <p:ph sz="quarter" idx="4"/>
-          </p:nvPr>
-        </p:nvSpPr>
-        <p:spPr/>
-        <p:txBody>
-          <a:bodyPr/>
-          <a:lstStyle/>
-          <a:p>
-            <a:r>
-              <a:rPr lang="hu-HU" dirty="0"/>
-              <a:t>Backend</a:t>
-            </a:r>
-          </a:p>
-          <a:p>
-            <a:r>
-              <a:rPr lang="hu-HU" dirty="0"/>
-              <a:t>Adatbázis</a:t>
-            </a:r>
-          </a:p>
-          <a:p>
-            <a:r>
-              <a:rPr lang="hu-HU" dirty="0"/>
-              <a:t>Dokumentációk</a:t>
+              <a:t>Messenger – online kapcsolattartás</a:t>
             </a:r>
           </a:p>
         </p:txBody>
@@ -5224,7 +5543,7 @@
     </p:spTree>
     <p:extLst>
       <p:ext uri="{BB962C8B-B14F-4D97-AF65-F5344CB8AC3E}">
-        <p14:creationId xmlns:p14="http://schemas.microsoft.com/office/powerpoint/2010/main" val="4048327611"/>
+        <p14:creationId xmlns:p14="http://schemas.microsoft.com/office/powerpoint/2010/main" val="2953559893"/>
       </p:ext>
     </p:extLst>
   </p:cSld>
@@ -5268,7 +5587,7 @@
           <p:cNvPr id="2" name="Cím 1">
             <a:extLst>
               <a:ext uri="{FF2B5EF4-FFF2-40B4-BE49-F238E27FC236}">
-                <a16:creationId xmlns:a16="http://schemas.microsoft.com/office/drawing/2014/main" id="{E9DBFA4C-6CAA-4062-8EE9-523E5349E2EF}"/>
+                <a16:creationId xmlns:a16="http://schemas.microsoft.com/office/drawing/2014/main" id="{57CCEA94-6D2B-4544-8D09-128CB9A0B3F2}"/>
               </a:ext>
             </a:extLst>
           </p:cNvPr>
@@ -5286,17 +5605,17 @@
           <a:p>
             <a:r>
               <a:rPr lang="hu-HU" dirty="0"/>
-              <a:t>Program felépítése</a:t>
-            </a:r>
-          </a:p>
-        </p:txBody>
-      </p:sp>
-      <p:sp>
-        <p:nvSpPr>
-          <p:cNvPr id="4" name="Szöveg helye 3">
+              <a:t>Feladatok felosztása</a:t>
+            </a:r>
+          </a:p>
+        </p:txBody>
+      </p:sp>
+      <p:sp>
+        <p:nvSpPr>
+          <p:cNvPr id="9" name="Szöveg helye 8">
             <a:extLst>
               <a:ext uri="{FF2B5EF4-FFF2-40B4-BE49-F238E27FC236}">
-                <a16:creationId xmlns:a16="http://schemas.microsoft.com/office/drawing/2014/main" id="{50CACD6F-F174-42E1-8AB0-586B6384C31E}"/>
+                <a16:creationId xmlns:a16="http://schemas.microsoft.com/office/drawing/2014/main" id="{F7DF4516-0EEF-4AFC-9EC0-BFE62AA0C32B}"/>
               </a:ext>
             </a:extLst>
           </p:cNvPr>
@@ -5312,14 +5631,125 @@
           <a:bodyPr/>
           <a:lstStyle/>
           <a:p>
-            <a:endParaRPr lang="hu-HU"/>
+            <a:r>
+              <a:rPr lang="hu-HU" dirty="0"/>
+              <a:t>Csuka Tamás József</a:t>
+            </a:r>
+          </a:p>
+        </p:txBody>
+      </p:sp>
+      <p:sp>
+        <p:nvSpPr>
+          <p:cNvPr id="10" name="Tartalom helye 9">
+            <a:extLst>
+              <a:ext uri="{FF2B5EF4-FFF2-40B4-BE49-F238E27FC236}">
+                <a16:creationId xmlns:a16="http://schemas.microsoft.com/office/drawing/2014/main" id="{B13D6331-A17C-43C2-90FE-C03EDC171D8B}"/>
+              </a:ext>
+            </a:extLst>
+          </p:cNvPr>
+          <p:cNvSpPr>
+            <a:spLocks noGrp="1"/>
+          </p:cNvSpPr>
+          <p:nvPr>
+            <p:ph sz="half" idx="2"/>
+          </p:nvPr>
+        </p:nvSpPr>
+        <p:spPr/>
+        <p:txBody>
+          <a:bodyPr/>
+          <a:lstStyle/>
+          <a:p>
+            <a:r>
+              <a:rPr lang="hu-HU" dirty="0"/>
+              <a:t>Frontend</a:t>
+            </a:r>
+          </a:p>
+          <a:p>
+            <a:r>
+              <a:rPr lang="hu-HU" dirty="0"/>
+              <a:t>Design/UI</a:t>
+            </a:r>
+          </a:p>
+          <a:p>
+            <a:r>
+              <a:rPr lang="hu-HU" dirty="0"/>
+              <a:t>Logó</a:t>
+            </a:r>
+          </a:p>
+        </p:txBody>
+      </p:sp>
+      <p:sp>
+        <p:nvSpPr>
+          <p:cNvPr id="11" name="Szöveg helye 10">
+            <a:extLst>
+              <a:ext uri="{FF2B5EF4-FFF2-40B4-BE49-F238E27FC236}">
+                <a16:creationId xmlns:a16="http://schemas.microsoft.com/office/drawing/2014/main" id="{B73DDD0E-4E99-4524-8866-62B68A816A52}"/>
+              </a:ext>
+            </a:extLst>
+          </p:cNvPr>
+          <p:cNvSpPr>
+            <a:spLocks noGrp="1"/>
+          </p:cNvSpPr>
+          <p:nvPr>
+            <p:ph type="body" sz="quarter" idx="3"/>
+          </p:nvPr>
+        </p:nvSpPr>
+        <p:spPr/>
+        <p:txBody>
+          <a:bodyPr/>
+          <a:lstStyle/>
+          <a:p>
+            <a:r>
+              <a:rPr lang="hu-HU" dirty="0"/>
+              <a:t>Paller Péter Décse</a:t>
+            </a:r>
+          </a:p>
+        </p:txBody>
+      </p:sp>
+      <p:sp>
+        <p:nvSpPr>
+          <p:cNvPr id="12" name="Tartalom helye 11">
+            <a:extLst>
+              <a:ext uri="{FF2B5EF4-FFF2-40B4-BE49-F238E27FC236}">
+                <a16:creationId xmlns:a16="http://schemas.microsoft.com/office/drawing/2014/main" id="{A5E46CDC-E251-459C-AF7F-2ECE7D8E2261}"/>
+              </a:ext>
+            </a:extLst>
+          </p:cNvPr>
+          <p:cNvSpPr>
+            <a:spLocks noGrp="1"/>
+          </p:cNvSpPr>
+          <p:nvPr>
+            <p:ph sz="quarter" idx="4"/>
+          </p:nvPr>
+        </p:nvSpPr>
+        <p:spPr/>
+        <p:txBody>
+          <a:bodyPr/>
+          <a:lstStyle/>
+          <a:p>
+            <a:r>
+              <a:rPr lang="hu-HU" dirty="0"/>
+              <a:t>Backend</a:t>
+            </a:r>
+          </a:p>
+          <a:p>
+            <a:r>
+              <a:rPr lang="hu-HU" dirty="0"/>
+              <a:t>Adatbázis</a:t>
+            </a:r>
+          </a:p>
+          <a:p>
+            <a:r>
+              <a:rPr lang="hu-HU" dirty="0"/>
+              <a:t>Dokumentációk</a:t>
+            </a:r>
           </a:p>
         </p:txBody>
       </p:sp>
     </p:spTree>
     <p:extLst>
       <p:ext uri="{BB962C8B-B14F-4D97-AF65-F5344CB8AC3E}">
-        <p14:creationId xmlns:p14="http://schemas.microsoft.com/office/powerpoint/2010/main" val="3144636154"/>
+        <p14:creationId xmlns:p14="http://schemas.microsoft.com/office/powerpoint/2010/main" val="4048327611"/>
       </p:ext>
     </p:extLst>
   </p:cSld>
@@ -5363,7 +5793,7 @@
           <p:cNvPr id="2" name="Cím 1">
             <a:extLst>
               <a:ext uri="{FF2B5EF4-FFF2-40B4-BE49-F238E27FC236}">
-                <a16:creationId xmlns:a16="http://schemas.microsoft.com/office/drawing/2014/main" id="{2B1B7EAA-8ED1-4108-B800-32C6CC05FB05}"/>
+                <a16:creationId xmlns:a16="http://schemas.microsoft.com/office/drawing/2014/main" id="{E9DBFA4C-6CAA-4062-8EE9-523E5349E2EF}"/>
               </a:ext>
             </a:extLst>
           </p:cNvPr>
@@ -5381,17 +5811,17 @@
           <a:p>
             <a:r>
               <a:rPr lang="hu-HU" dirty="0"/>
-              <a:t>Frontend</a:t>
-            </a:r>
-          </a:p>
-        </p:txBody>
-      </p:sp>
-      <p:sp>
-        <p:nvSpPr>
-          <p:cNvPr id="3" name="Tartalom helye 2">
+              <a:t>Program felépítése</a:t>
+            </a:r>
+          </a:p>
+        </p:txBody>
+      </p:sp>
+      <p:sp>
+        <p:nvSpPr>
+          <p:cNvPr id="4" name="Szöveg helye 3">
             <a:extLst>
               <a:ext uri="{FF2B5EF4-FFF2-40B4-BE49-F238E27FC236}">
-                <a16:creationId xmlns:a16="http://schemas.microsoft.com/office/drawing/2014/main" id="{197E9A83-9A18-4295-9977-1301A8B2A1B2}"/>
+                <a16:creationId xmlns:a16="http://schemas.microsoft.com/office/drawing/2014/main" id="{50CACD6F-F174-42E1-8AB0-586B6384C31E}"/>
               </a:ext>
             </a:extLst>
           </p:cNvPr>
@@ -5399,65 +5829,36 @@
             <a:spLocks noGrp="1"/>
           </p:cNvSpPr>
           <p:nvPr>
-            <p:ph idx="1"/>
-          </p:nvPr>
-        </p:nvSpPr>
-        <p:spPr/>
-        <p:txBody>
-          <a:bodyPr/>
-          <a:lstStyle/>
-          <a:p>
-            <a:r>
-              <a:rPr lang="hu-HU" dirty="0" err="1"/>
-              <a:t>Javascript</a:t>
-            </a:r>
-            <a:r>
-              <a:rPr lang="hu-HU" dirty="0"/>
-              <a:t>-keretrendszer: Vue.js</a:t>
-            </a:r>
-          </a:p>
-          <a:p>
-            <a:r>
-              <a:rPr lang="hu-HU" dirty="0"/>
-              <a:t>UI: </a:t>
-            </a:r>
-            <a:r>
-              <a:rPr lang="hu-HU" dirty="0" err="1"/>
-              <a:t>Bootstrap</a:t>
-            </a:r>
-            <a:endParaRPr lang="hu-HU" dirty="0"/>
-          </a:p>
-          <a:p>
-            <a:r>
-              <a:rPr lang="hu-HU" dirty="0"/>
-              <a:t>Backend kapcsolat: </a:t>
-            </a:r>
-            <a:r>
-              <a:rPr lang="hu-HU" dirty="0" err="1"/>
-              <a:t>Axios</a:t>
-            </a:r>
-            <a:endParaRPr lang="hu-HU" dirty="0"/>
+            <p:ph type="body" idx="1"/>
+          </p:nvPr>
+        </p:nvSpPr>
+        <p:spPr/>
+        <p:txBody>
+          <a:bodyPr/>
+          <a:lstStyle/>
+          <a:p>
+            <a:endParaRPr lang="hu-HU"/>
           </a:p>
         </p:txBody>
       </p:sp>
     </p:spTree>
     <p:extLst>
       <p:ext uri="{BB962C8B-B14F-4D97-AF65-F5344CB8AC3E}">
-        <p14:creationId xmlns:p14="http://schemas.microsoft.com/office/powerpoint/2010/main" val="1051907204"/>
+        <p14:creationId xmlns:p14="http://schemas.microsoft.com/office/powerpoint/2010/main" val="3144636154"/>
       </p:ext>
     </p:extLst>
   </p:cSld>
   <p:clrMapOvr>
     <a:masterClrMapping/>
   </p:clrMapOvr>
-  <mc:AlternateContent xmlns:mc="http://schemas.openxmlformats.org/markup-compatibility/2006" xmlns:p159="http://schemas.microsoft.com/office/powerpoint/2015/09/main">
-    <mc:Choice Requires="p159">
-      <p:transition xmlns:p14="http://schemas.microsoft.com/office/powerpoint/2010/main" spd="slow" p14:dur="2000">
+  <mc:AlternateContent xmlns:mc="http://schemas.openxmlformats.org/markup-compatibility/2006">
+    <mc:Choice xmlns:p159="http://schemas.microsoft.com/office/powerpoint/2015/09/main" Requires="p159">
+      <p:transition xmlns:p14="http://schemas.microsoft.com/office/powerpoint/2010/main" spd="slow" p14:dur="2000" advTm="1000">
         <p159:morph option="byObject"/>
       </p:transition>
     </mc:Choice>
-    <mc:Fallback xmlns="">
-      <p:transition spd="slow">
+    <mc:Fallback>
+      <p:transition spd="slow" advTm="1000">
         <p:fade/>
       </p:transition>
     </mc:Fallback>
@@ -5487,7 +5888,7 @@
           <p:cNvPr id="2" name="Cím 1">
             <a:extLst>
               <a:ext uri="{FF2B5EF4-FFF2-40B4-BE49-F238E27FC236}">
-                <a16:creationId xmlns:a16="http://schemas.microsoft.com/office/drawing/2014/main" id="{AE7A394C-08C6-4733-8683-DF32A5E3D9A1}"/>
+                <a16:creationId xmlns:a16="http://schemas.microsoft.com/office/drawing/2014/main" id="{2B1B7EAA-8ED1-4108-B800-32C6CC05FB05}"/>
               </a:ext>
             </a:extLst>
           </p:cNvPr>
@@ -5505,7 +5906,7 @@
           <a:p>
             <a:r>
               <a:rPr lang="hu-HU" dirty="0"/>
-              <a:t>Backend</a:t>
+              <a:t>Frontend</a:t>
             </a:r>
           </a:p>
         </p:txBody>
@@ -5515,7 +5916,7 @@
           <p:cNvPr id="3" name="Tartalom helye 2">
             <a:extLst>
               <a:ext uri="{FF2B5EF4-FFF2-40B4-BE49-F238E27FC236}">
-                <a16:creationId xmlns:a16="http://schemas.microsoft.com/office/drawing/2014/main" id="{FE580785-C82D-4D70-8F17-4BD29507C6AB}"/>
+                <a16:creationId xmlns:a16="http://schemas.microsoft.com/office/drawing/2014/main" id="{197E9A83-9A18-4295-9977-1301A8B2A1B2}"/>
               </a:ext>
             </a:extLst>
           </p:cNvPr>
@@ -5531,14 +5932,43 @@
           <a:bodyPr/>
           <a:lstStyle/>
           <a:p>
-            <a:endParaRPr lang="hu-HU"/>
+            <a:r>
+              <a:rPr lang="hu-HU" dirty="0" err="1"/>
+              <a:t>Javascript</a:t>
+            </a:r>
+            <a:r>
+              <a:rPr lang="hu-HU" dirty="0"/>
+              <a:t>-keretrendszer: Vue.js</a:t>
+            </a:r>
+          </a:p>
+          <a:p>
+            <a:r>
+              <a:rPr lang="hu-HU" dirty="0"/>
+              <a:t>UI: </a:t>
+            </a:r>
+            <a:r>
+              <a:rPr lang="hu-HU" dirty="0" err="1"/>
+              <a:t>Bootstrap</a:t>
+            </a:r>
+            <a:endParaRPr lang="hu-HU" dirty="0"/>
+          </a:p>
+          <a:p>
+            <a:r>
+              <a:rPr lang="hu-HU" dirty="0"/>
+              <a:t>Backend kapcsolat: </a:t>
+            </a:r>
+            <a:r>
+              <a:rPr lang="hu-HU" dirty="0" err="1"/>
+              <a:t>Axios</a:t>
+            </a:r>
+            <a:endParaRPr lang="hu-HU" dirty="0"/>
           </a:p>
         </p:txBody>
       </p:sp>
     </p:spTree>
     <p:extLst>
       <p:ext uri="{BB962C8B-B14F-4D97-AF65-F5344CB8AC3E}">
-        <p14:creationId xmlns:p14="http://schemas.microsoft.com/office/powerpoint/2010/main" val="2862999257"/>
+        <p14:creationId xmlns:p14="http://schemas.microsoft.com/office/powerpoint/2010/main" val="1051907204"/>
       </p:ext>
     </p:extLst>
   </p:cSld>

--- a/szerkesztendo_dokumentumok/prezentacio_REKA.pptx
+++ b/szerkesztendo_dokumentumok/prezentacio_REKA.pptx
@@ -4133,6 +4133,36 @@
           </a:p>
         </p:txBody>
       </p:sp>
+      <p:pic>
+        <p:nvPicPr>
+          <p:cNvPr id="4" name="Kép 3">
+            <a:extLst>
+              <a:ext uri="{FF2B5EF4-FFF2-40B4-BE49-F238E27FC236}">
+                <a16:creationId xmlns:a16="http://schemas.microsoft.com/office/drawing/2014/main" id="{935819B3-278C-4397-A7D1-2FB9090F2871}"/>
+              </a:ext>
+            </a:extLst>
+          </p:cNvPr>
+          <p:cNvPicPr>
+            <a:picLocks noChangeAspect="1"/>
+          </p:cNvPicPr>
+          <p:nvPr/>
+        </p:nvPicPr>
+        <p:blipFill>
+          <a:blip r:embed="rId2"/>
+          <a:stretch>
+            <a:fillRect/>
+          </a:stretch>
+        </p:blipFill>
+        <p:spPr>
+          <a:xfrm>
+            <a:off x="9752142" y="6134043"/>
+            <a:ext cx="2439858" cy="720000"/>
+          </a:xfrm>
+          <a:prstGeom prst="rect">
+            <a:avLst/>
+          </a:prstGeom>
+        </p:spPr>
+      </p:pic>
     </p:spTree>
     <p:extLst>
       <p:ext uri="{BB962C8B-B14F-4D97-AF65-F5344CB8AC3E}">
@@ -4267,6 +4297,36 @@
           <a:xfrm>
             <a:off x="6096000" y="-121133"/>
             <a:ext cx="5861067" cy="6761793"/>
+          </a:xfrm>
+          <a:prstGeom prst="rect">
+            <a:avLst/>
+          </a:prstGeom>
+        </p:spPr>
+      </p:pic>
+      <p:pic>
+        <p:nvPicPr>
+          <p:cNvPr id="6" name="Kép 5">
+            <a:extLst>
+              <a:ext uri="{FF2B5EF4-FFF2-40B4-BE49-F238E27FC236}">
+                <a16:creationId xmlns:a16="http://schemas.microsoft.com/office/drawing/2014/main" id="{F30ED30B-7DED-4781-A72C-69D915F4A392}"/>
+              </a:ext>
+            </a:extLst>
+          </p:cNvPr>
+          <p:cNvPicPr>
+            <a:picLocks noChangeAspect="1"/>
+          </p:cNvPicPr>
+          <p:nvPr/>
+        </p:nvPicPr>
+        <p:blipFill>
+          <a:blip r:embed="rId4"/>
+          <a:stretch>
+            <a:fillRect/>
+          </a:stretch>
+        </p:blipFill>
+        <p:spPr>
+          <a:xfrm>
+            <a:off x="9752142" y="6134043"/>
+            <a:ext cx="2439858" cy="720000"/>
           </a:xfrm>
           <a:prstGeom prst="rect">
             <a:avLst/>
@@ -4368,6 +4428,44 @@
           </a:p>
         </p:txBody>
       </p:sp>
+      <p:pic>
+        <p:nvPicPr>
+          <p:cNvPr id="5" name="Kép 4">
+            <a:extLst>
+              <a:ext uri="{FF2B5EF4-FFF2-40B4-BE49-F238E27FC236}">
+                <a16:creationId xmlns:a16="http://schemas.microsoft.com/office/drawing/2014/main" id="{134D8831-0F99-4888-8E97-41B0AED67DDE}"/>
+              </a:ext>
+            </a:extLst>
+          </p:cNvPr>
+          <p:cNvPicPr>
+            <a:picLocks noChangeAspect="1"/>
+          </p:cNvPicPr>
+          <p:nvPr/>
+        </p:nvPicPr>
+        <p:blipFill>
+          <a:blip r:embed="rId2">
+            <a:duotone>
+              <a:schemeClr val="bg2">
+                <a:shade val="45000"/>
+                <a:satMod val="135000"/>
+              </a:schemeClr>
+              <a:prstClr val="white"/>
+            </a:duotone>
+          </a:blip>
+          <a:stretch>
+            <a:fillRect/>
+          </a:stretch>
+        </p:blipFill>
+        <p:spPr>
+          <a:xfrm>
+            <a:off x="9752142" y="6134043"/>
+            <a:ext cx="2439858" cy="720000"/>
+          </a:xfrm>
+          <a:prstGeom prst="rect">
+            <a:avLst/>
+          </a:prstGeom>
+        </p:spPr>
+      </p:pic>
     </p:spTree>
     <p:extLst>
       <p:ext uri="{BB962C8B-B14F-4D97-AF65-F5344CB8AC3E}">
@@ -4378,13 +4476,13 @@
   <p:clrMapOvr>
     <a:masterClrMapping/>
   </p:clrMapOvr>
-  <mc:AlternateContent xmlns:mc="http://schemas.openxmlformats.org/markup-compatibility/2006">
-    <mc:Choice xmlns:p159="http://schemas.microsoft.com/office/powerpoint/2015/09/main" Requires="p159">
+  <mc:AlternateContent xmlns:mc="http://schemas.openxmlformats.org/markup-compatibility/2006" xmlns:p159="http://schemas.microsoft.com/office/powerpoint/2015/09/main">
+    <mc:Choice Requires="p159">
       <p:transition xmlns:p14="http://schemas.microsoft.com/office/powerpoint/2010/main" spd="slow" p14:dur="2000" advTm="1000">
         <p159:morph option="byObject"/>
       </p:transition>
     </mc:Choice>
-    <mc:Fallback>
+    <mc:Fallback xmlns="">
       <p:transition spd="slow" advTm="1000">
         <p:fade/>
       </p:transition>
@@ -4488,6 +4586,36 @@
           </a:p>
         </p:txBody>
       </p:sp>
+      <p:pic>
+        <p:nvPicPr>
+          <p:cNvPr id="4" name="Kép 3">
+            <a:extLst>
+              <a:ext uri="{FF2B5EF4-FFF2-40B4-BE49-F238E27FC236}">
+                <a16:creationId xmlns:a16="http://schemas.microsoft.com/office/drawing/2014/main" id="{8A4BDCD7-1D4D-4F49-B0DB-B1448C90E95B}"/>
+              </a:ext>
+            </a:extLst>
+          </p:cNvPr>
+          <p:cNvPicPr>
+            <a:picLocks noChangeAspect="1"/>
+          </p:cNvPicPr>
+          <p:nvPr/>
+        </p:nvPicPr>
+        <p:blipFill>
+          <a:blip r:embed="rId2"/>
+          <a:stretch>
+            <a:fillRect/>
+          </a:stretch>
+        </p:blipFill>
+        <p:spPr>
+          <a:xfrm>
+            <a:off x="9752142" y="6134043"/>
+            <a:ext cx="2439858" cy="720000"/>
+          </a:xfrm>
+          <a:prstGeom prst="rect">
+            <a:avLst/>
+          </a:prstGeom>
+        </p:spPr>
+      </p:pic>
     </p:spTree>
     <p:extLst>
       <p:ext uri="{BB962C8B-B14F-4D97-AF65-F5344CB8AC3E}">
@@ -4598,6 +4726,36 @@
           </a:p>
         </p:txBody>
       </p:sp>
+      <p:pic>
+        <p:nvPicPr>
+          <p:cNvPr id="4" name="Kép 3">
+            <a:extLst>
+              <a:ext uri="{FF2B5EF4-FFF2-40B4-BE49-F238E27FC236}">
+                <a16:creationId xmlns:a16="http://schemas.microsoft.com/office/drawing/2014/main" id="{D38059F4-7B76-4626-8745-B91F718A1D38}"/>
+              </a:ext>
+            </a:extLst>
+          </p:cNvPr>
+          <p:cNvPicPr>
+            <a:picLocks noChangeAspect="1"/>
+          </p:cNvPicPr>
+          <p:nvPr/>
+        </p:nvPicPr>
+        <p:blipFill>
+          <a:blip r:embed="rId2"/>
+          <a:stretch>
+            <a:fillRect/>
+          </a:stretch>
+        </p:blipFill>
+        <p:spPr>
+          <a:xfrm>
+            <a:off x="9752142" y="6134043"/>
+            <a:ext cx="2439858" cy="720000"/>
+          </a:xfrm>
+          <a:prstGeom prst="rect">
+            <a:avLst/>
+          </a:prstGeom>
+        </p:spPr>
+      </p:pic>
     </p:spTree>
     <p:extLst>
       <p:ext uri="{BB962C8B-B14F-4D97-AF65-F5344CB8AC3E}">
@@ -4693,6 +4851,44 @@
           </a:p>
         </p:txBody>
       </p:sp>
+      <p:pic>
+        <p:nvPicPr>
+          <p:cNvPr id="5" name="Kép 4">
+            <a:extLst>
+              <a:ext uri="{FF2B5EF4-FFF2-40B4-BE49-F238E27FC236}">
+                <a16:creationId xmlns:a16="http://schemas.microsoft.com/office/drawing/2014/main" id="{100B6B8A-73CC-4A09-B697-1D1E9AAD0EC2}"/>
+              </a:ext>
+            </a:extLst>
+          </p:cNvPr>
+          <p:cNvPicPr>
+            <a:picLocks noChangeAspect="1"/>
+          </p:cNvPicPr>
+          <p:nvPr/>
+        </p:nvPicPr>
+        <p:blipFill>
+          <a:blip r:embed="rId2">
+            <a:duotone>
+              <a:schemeClr val="bg2">
+                <a:shade val="45000"/>
+                <a:satMod val="135000"/>
+              </a:schemeClr>
+              <a:prstClr val="white"/>
+            </a:duotone>
+          </a:blip>
+          <a:stretch>
+            <a:fillRect/>
+          </a:stretch>
+        </p:blipFill>
+        <p:spPr>
+          <a:xfrm>
+            <a:off x="9752142" y="6134043"/>
+            <a:ext cx="2439858" cy="720000"/>
+          </a:xfrm>
+          <a:prstGeom prst="rect">
+            <a:avLst/>
+          </a:prstGeom>
+        </p:spPr>
+      </p:pic>
     </p:spTree>
     <p:extLst>
       <p:ext uri="{BB962C8B-B14F-4D97-AF65-F5344CB8AC3E}">
@@ -4703,13 +4899,13 @@
   <p:clrMapOvr>
     <a:masterClrMapping/>
   </p:clrMapOvr>
-  <mc:AlternateContent xmlns:mc="http://schemas.openxmlformats.org/markup-compatibility/2006">
-    <mc:Choice xmlns:p159="http://schemas.microsoft.com/office/powerpoint/2015/09/main" Requires="p159">
+  <mc:AlternateContent xmlns:mc="http://schemas.openxmlformats.org/markup-compatibility/2006" xmlns:p159="http://schemas.microsoft.com/office/powerpoint/2015/09/main">
+    <mc:Choice Requires="p159">
       <p:transition xmlns:p14="http://schemas.microsoft.com/office/powerpoint/2010/main" spd="slow" p14:dur="2000" advTm="1000">
         <p159:morph option="byObject"/>
       </p:transition>
     </mc:Choice>
-    <mc:Fallback>
+    <mc:Fallback xmlns="">
       <p:transition spd="slow" advTm="1000">
         <p:fade/>
       </p:transition>
@@ -4794,6 +4990,36 @@
           </a:p>
         </p:txBody>
       </p:sp>
+      <p:pic>
+        <p:nvPicPr>
+          <p:cNvPr id="4" name="Kép 3">
+            <a:extLst>
+              <a:ext uri="{FF2B5EF4-FFF2-40B4-BE49-F238E27FC236}">
+                <a16:creationId xmlns:a16="http://schemas.microsoft.com/office/drawing/2014/main" id="{539492B1-CAAA-40F8-82C3-824B359D542C}"/>
+              </a:ext>
+            </a:extLst>
+          </p:cNvPr>
+          <p:cNvPicPr>
+            <a:picLocks noChangeAspect="1"/>
+          </p:cNvPicPr>
+          <p:nvPr/>
+        </p:nvPicPr>
+        <p:blipFill>
+          <a:blip r:embed="rId2"/>
+          <a:stretch>
+            <a:fillRect/>
+          </a:stretch>
+        </p:blipFill>
+        <p:spPr>
+          <a:xfrm>
+            <a:off x="9752142" y="6134043"/>
+            <a:ext cx="2439858" cy="720000"/>
+          </a:xfrm>
+          <a:prstGeom prst="rect">
+            <a:avLst/>
+          </a:prstGeom>
+        </p:spPr>
+      </p:pic>
     </p:spTree>
     <p:extLst>
       <p:ext uri="{BB962C8B-B14F-4D97-AF65-F5344CB8AC3E}">
@@ -5091,6 +5317,36 @@
           </a:p>
         </p:txBody>
       </p:sp>
+      <p:pic>
+        <p:nvPicPr>
+          <p:cNvPr id="4" name="Kép 3">
+            <a:extLst>
+              <a:ext uri="{FF2B5EF4-FFF2-40B4-BE49-F238E27FC236}">
+                <a16:creationId xmlns:a16="http://schemas.microsoft.com/office/drawing/2014/main" id="{287B3420-837D-475D-B53A-0EC2C4693EC4}"/>
+              </a:ext>
+            </a:extLst>
+          </p:cNvPr>
+          <p:cNvPicPr>
+            <a:picLocks noChangeAspect="1"/>
+          </p:cNvPicPr>
+          <p:nvPr/>
+        </p:nvPicPr>
+        <p:blipFill>
+          <a:blip r:embed="rId3"/>
+          <a:stretch>
+            <a:fillRect/>
+          </a:stretch>
+        </p:blipFill>
+        <p:spPr>
+          <a:xfrm>
+            <a:off x="9752142" y="6134043"/>
+            <a:ext cx="2439858" cy="720000"/>
+          </a:xfrm>
+          <a:prstGeom prst="rect">
+            <a:avLst/>
+          </a:prstGeom>
+        </p:spPr>
+      </p:pic>
     </p:spTree>
     <p:extLst>
       <p:ext uri="{BB962C8B-B14F-4D97-AF65-F5344CB8AC3E}">
@@ -5207,6 +5463,36 @@
           </a:p>
         </p:txBody>
       </p:sp>
+      <p:pic>
+        <p:nvPicPr>
+          <p:cNvPr id="4" name="Kép 3">
+            <a:extLst>
+              <a:ext uri="{FF2B5EF4-FFF2-40B4-BE49-F238E27FC236}">
+                <a16:creationId xmlns:a16="http://schemas.microsoft.com/office/drawing/2014/main" id="{3656D3BE-3682-4379-8638-B639411A367B}"/>
+              </a:ext>
+            </a:extLst>
+          </p:cNvPr>
+          <p:cNvPicPr>
+            <a:picLocks noChangeAspect="1"/>
+          </p:cNvPicPr>
+          <p:nvPr/>
+        </p:nvPicPr>
+        <p:blipFill>
+          <a:blip r:embed="rId2"/>
+          <a:stretch>
+            <a:fillRect/>
+          </a:stretch>
+        </p:blipFill>
+        <p:spPr>
+          <a:xfrm>
+            <a:off x="9752142" y="6134043"/>
+            <a:ext cx="2439858" cy="720000"/>
+          </a:xfrm>
+          <a:prstGeom prst="rect">
+            <a:avLst/>
+          </a:prstGeom>
+        </p:spPr>
+      </p:pic>
     </p:spTree>
     <p:extLst>
       <p:ext uri="{BB962C8B-B14F-4D97-AF65-F5344CB8AC3E}">
@@ -5217,13 +5503,13 @@
   <p:clrMapOvr>
     <a:masterClrMapping/>
   </p:clrMapOvr>
-  <mc:AlternateContent xmlns:mc="http://schemas.openxmlformats.org/markup-compatibility/2006">
-    <mc:Choice xmlns:p159="http://schemas.microsoft.com/office/powerpoint/2015/09/main" Requires="p159">
+  <mc:AlternateContent xmlns:mc="http://schemas.openxmlformats.org/markup-compatibility/2006" xmlns:p159="http://schemas.microsoft.com/office/powerpoint/2015/09/main">
+    <mc:Choice Requires="p159">
       <p:transition xmlns:p14="http://schemas.microsoft.com/office/powerpoint/2010/main" spd="slow" p14:dur="2000">
         <p159:morph option="byObject"/>
       </p:transition>
     </mc:Choice>
-    <mc:Fallback>
+    <mc:Fallback xmlns="">
       <p:transition spd="slow">
         <p:fade/>
       </p:transition>
@@ -5335,6 +5621,36 @@
           </a:p>
         </p:txBody>
       </p:sp>
+      <p:pic>
+        <p:nvPicPr>
+          <p:cNvPr id="4" name="Kép 3">
+            <a:extLst>
+              <a:ext uri="{FF2B5EF4-FFF2-40B4-BE49-F238E27FC236}">
+                <a16:creationId xmlns:a16="http://schemas.microsoft.com/office/drawing/2014/main" id="{4766547B-1333-4229-9230-D7BF1CB41288}"/>
+              </a:ext>
+            </a:extLst>
+          </p:cNvPr>
+          <p:cNvPicPr>
+            <a:picLocks noChangeAspect="1"/>
+          </p:cNvPicPr>
+          <p:nvPr/>
+        </p:nvPicPr>
+        <p:blipFill>
+          <a:blip r:embed="rId3"/>
+          <a:stretch>
+            <a:fillRect/>
+          </a:stretch>
+        </p:blipFill>
+        <p:spPr>
+          <a:xfrm>
+            <a:off x="9752142" y="6134043"/>
+            <a:ext cx="2439858" cy="720000"/>
+          </a:xfrm>
+          <a:prstGeom prst="rect">
+            <a:avLst/>
+          </a:prstGeom>
+        </p:spPr>
+      </p:pic>
     </p:spTree>
     <p:extLst>
       <p:ext uri="{BB962C8B-B14F-4D97-AF65-F5344CB8AC3E}">
@@ -5430,6 +5746,44 @@
           </a:p>
         </p:txBody>
       </p:sp>
+      <p:pic>
+        <p:nvPicPr>
+          <p:cNvPr id="4" name="Kép 3">
+            <a:extLst>
+              <a:ext uri="{FF2B5EF4-FFF2-40B4-BE49-F238E27FC236}">
+                <a16:creationId xmlns:a16="http://schemas.microsoft.com/office/drawing/2014/main" id="{AF5AC26D-D79F-454B-8B37-C60CEA5EB9D6}"/>
+              </a:ext>
+            </a:extLst>
+          </p:cNvPr>
+          <p:cNvPicPr>
+            <a:picLocks noChangeAspect="1"/>
+          </p:cNvPicPr>
+          <p:nvPr/>
+        </p:nvPicPr>
+        <p:blipFill>
+          <a:blip r:embed="rId2">
+            <a:duotone>
+              <a:schemeClr val="bg2">
+                <a:shade val="45000"/>
+                <a:satMod val="135000"/>
+              </a:schemeClr>
+              <a:prstClr val="white"/>
+            </a:duotone>
+          </a:blip>
+          <a:stretch>
+            <a:fillRect/>
+          </a:stretch>
+        </p:blipFill>
+        <p:spPr>
+          <a:xfrm>
+            <a:off x="9752142" y="6134043"/>
+            <a:ext cx="2439858" cy="720000"/>
+          </a:xfrm>
+          <a:prstGeom prst="rect">
+            <a:avLst/>
+          </a:prstGeom>
+        </p:spPr>
+      </p:pic>
     </p:spTree>
     <p:extLst>
       <p:ext uri="{BB962C8B-B14F-4D97-AF65-F5344CB8AC3E}">
@@ -5440,13 +5794,13 @@
   <p:clrMapOvr>
     <a:masterClrMapping/>
   </p:clrMapOvr>
-  <mc:AlternateContent xmlns:mc="http://schemas.openxmlformats.org/markup-compatibility/2006">
-    <mc:Choice xmlns:p159="http://schemas.microsoft.com/office/powerpoint/2015/09/main" Requires="p159">
+  <mc:AlternateContent xmlns:mc="http://schemas.openxmlformats.org/markup-compatibility/2006" xmlns:p159="http://schemas.microsoft.com/office/powerpoint/2015/09/main">
+    <mc:Choice Requires="p159">
       <p:transition xmlns:p14="http://schemas.microsoft.com/office/powerpoint/2010/main" spd="slow" p14:dur="2000" advTm="1000">
         <p159:morph option="byObject"/>
       </p:transition>
     </mc:Choice>
-    <mc:Fallback>
+    <mc:Fallback xmlns="">
       <p:transition spd="slow" advTm="1000">
         <p:fade/>
       </p:transition>
@@ -5540,6 +5894,36 @@
           </a:p>
         </p:txBody>
       </p:sp>
+      <p:pic>
+        <p:nvPicPr>
+          <p:cNvPr id="4" name="Kép 3">
+            <a:extLst>
+              <a:ext uri="{FF2B5EF4-FFF2-40B4-BE49-F238E27FC236}">
+                <a16:creationId xmlns:a16="http://schemas.microsoft.com/office/drawing/2014/main" id="{5C484849-DCE8-41E9-833C-48F9C06D0878}"/>
+              </a:ext>
+            </a:extLst>
+          </p:cNvPr>
+          <p:cNvPicPr>
+            <a:picLocks noChangeAspect="1"/>
+          </p:cNvPicPr>
+          <p:nvPr/>
+        </p:nvPicPr>
+        <p:blipFill>
+          <a:blip r:embed="rId2"/>
+          <a:stretch>
+            <a:fillRect/>
+          </a:stretch>
+        </p:blipFill>
+        <p:spPr>
+          <a:xfrm>
+            <a:off x="9752142" y="6134043"/>
+            <a:ext cx="2439858" cy="720000"/>
+          </a:xfrm>
+          <a:prstGeom prst="rect">
+            <a:avLst/>
+          </a:prstGeom>
+        </p:spPr>
+      </p:pic>
     </p:spTree>
     <p:extLst>
       <p:ext uri="{BB962C8B-B14F-4D97-AF65-F5344CB8AC3E}">
@@ -5746,6 +6130,36 @@
           </a:p>
         </p:txBody>
       </p:sp>
+      <p:pic>
+        <p:nvPicPr>
+          <p:cNvPr id="7" name="Kép 6">
+            <a:extLst>
+              <a:ext uri="{FF2B5EF4-FFF2-40B4-BE49-F238E27FC236}">
+                <a16:creationId xmlns:a16="http://schemas.microsoft.com/office/drawing/2014/main" id="{251D7F14-2011-4013-89A1-D02E23E346FA}"/>
+              </a:ext>
+            </a:extLst>
+          </p:cNvPr>
+          <p:cNvPicPr>
+            <a:picLocks noChangeAspect="1"/>
+          </p:cNvPicPr>
+          <p:nvPr/>
+        </p:nvPicPr>
+        <p:blipFill>
+          <a:blip r:embed="rId2"/>
+          <a:stretch>
+            <a:fillRect/>
+          </a:stretch>
+        </p:blipFill>
+        <p:spPr>
+          <a:xfrm>
+            <a:off x="9752142" y="6134043"/>
+            <a:ext cx="2439858" cy="720000"/>
+          </a:xfrm>
+          <a:prstGeom prst="rect">
+            <a:avLst/>
+          </a:prstGeom>
+        </p:spPr>
+      </p:pic>
     </p:spTree>
     <p:extLst>
       <p:ext uri="{BB962C8B-B14F-4D97-AF65-F5344CB8AC3E}">
@@ -5841,6 +6255,44 @@
           </a:p>
         </p:txBody>
       </p:sp>
+      <p:pic>
+        <p:nvPicPr>
+          <p:cNvPr id="5" name="Kép 4">
+            <a:extLst>
+              <a:ext uri="{FF2B5EF4-FFF2-40B4-BE49-F238E27FC236}">
+                <a16:creationId xmlns:a16="http://schemas.microsoft.com/office/drawing/2014/main" id="{F6235907-72D9-48B5-8931-78690103B176}"/>
+              </a:ext>
+            </a:extLst>
+          </p:cNvPr>
+          <p:cNvPicPr>
+            <a:picLocks noChangeAspect="1"/>
+          </p:cNvPicPr>
+          <p:nvPr/>
+        </p:nvPicPr>
+        <p:blipFill>
+          <a:blip r:embed="rId2">
+            <a:duotone>
+              <a:schemeClr val="bg2">
+                <a:shade val="45000"/>
+                <a:satMod val="135000"/>
+              </a:schemeClr>
+              <a:prstClr val="white"/>
+            </a:duotone>
+          </a:blip>
+          <a:stretch>
+            <a:fillRect/>
+          </a:stretch>
+        </p:blipFill>
+        <p:spPr>
+          <a:xfrm>
+            <a:off x="9752142" y="6134043"/>
+            <a:ext cx="2439858" cy="720000"/>
+          </a:xfrm>
+          <a:prstGeom prst="rect">
+            <a:avLst/>
+          </a:prstGeom>
+        </p:spPr>
+      </p:pic>
     </p:spTree>
     <p:extLst>
       <p:ext uri="{BB962C8B-B14F-4D97-AF65-F5344CB8AC3E}">
@@ -5851,13 +6303,13 @@
   <p:clrMapOvr>
     <a:masterClrMapping/>
   </p:clrMapOvr>
-  <mc:AlternateContent xmlns:mc="http://schemas.openxmlformats.org/markup-compatibility/2006">
-    <mc:Choice xmlns:p159="http://schemas.microsoft.com/office/powerpoint/2015/09/main" Requires="p159">
+  <mc:AlternateContent xmlns:mc="http://schemas.openxmlformats.org/markup-compatibility/2006" xmlns:p159="http://schemas.microsoft.com/office/powerpoint/2015/09/main">
+    <mc:Choice Requires="p159">
       <p:transition xmlns:p14="http://schemas.microsoft.com/office/powerpoint/2010/main" spd="slow" p14:dur="2000" advTm="1000">
         <p159:morph option="byObject"/>
       </p:transition>
     </mc:Choice>
-    <mc:Fallback>
+    <mc:Fallback xmlns="">
       <p:transition spd="slow" advTm="1000">
         <p:fade/>
       </p:transition>
@@ -5965,6 +6417,36 @@
           </a:p>
         </p:txBody>
       </p:sp>
+      <p:pic>
+        <p:nvPicPr>
+          <p:cNvPr id="4" name="Kép 3">
+            <a:extLst>
+              <a:ext uri="{FF2B5EF4-FFF2-40B4-BE49-F238E27FC236}">
+                <a16:creationId xmlns:a16="http://schemas.microsoft.com/office/drawing/2014/main" id="{203E23FA-3C9A-4A67-920E-8D88EDB520CD}"/>
+              </a:ext>
+            </a:extLst>
+          </p:cNvPr>
+          <p:cNvPicPr>
+            <a:picLocks noChangeAspect="1"/>
+          </p:cNvPicPr>
+          <p:nvPr/>
+        </p:nvPicPr>
+        <p:blipFill>
+          <a:blip r:embed="rId2"/>
+          <a:stretch>
+            <a:fillRect/>
+          </a:stretch>
+        </p:blipFill>
+        <p:spPr>
+          <a:xfrm>
+            <a:off x="9752142" y="6134043"/>
+            <a:ext cx="2439858" cy="720000"/>
+          </a:xfrm>
+          <a:prstGeom prst="rect">
+            <a:avLst/>
+          </a:prstGeom>
+        </p:spPr>
+      </p:pic>
     </p:spTree>
     <p:extLst>
       <p:ext uri="{BB962C8B-B14F-4D97-AF65-F5344CB8AC3E}">

--- a/szerkesztendo_dokumentumok/prezentacio_REKA.pptx
+++ b/szerkesztendo_dokumentumok/prezentacio_REKA.pptx
@@ -5,7 +5,7 @@
     <p:sldMasterId id="2147483660" r:id="rId1"/>
   </p:sldMasterIdLst>
   <p:notesMasterIdLst>
-    <p:notesMasterId r:id="rId20"/>
+    <p:notesMasterId r:id="rId21"/>
   </p:notesMasterIdLst>
   <p:sldIdLst>
     <p:sldId id="256" r:id="rId2"/>
@@ -13,8 +13,8 @@
     <p:sldId id="270" r:id="rId4"/>
     <p:sldId id="259" r:id="rId5"/>
     <p:sldId id="263" r:id="rId6"/>
-    <p:sldId id="269" r:id="rId7"/>
-    <p:sldId id="265" r:id="rId8"/>
+    <p:sldId id="265" r:id="rId7"/>
+    <p:sldId id="269" r:id="rId8"/>
     <p:sldId id="258" r:id="rId9"/>
     <p:sldId id="260" r:id="rId10"/>
     <p:sldId id="261" r:id="rId11"/>
@@ -24,8 +24,9 @@
     <p:sldId id="267" r:id="rId15"/>
     <p:sldId id="272" r:id="rId16"/>
     <p:sldId id="273" r:id="rId17"/>
-    <p:sldId id="268" r:id="rId18"/>
-    <p:sldId id="271" r:id="rId19"/>
+    <p:sldId id="274" r:id="rId18"/>
+    <p:sldId id="268" r:id="rId19"/>
+    <p:sldId id="271" r:id="rId20"/>
   </p:sldIdLst>
   <p:sldSz cx="12192000" cy="6858000"/>
   <p:notesSz cx="6858000" cy="9144000"/>
@@ -214,7 +215,7 @@
           <a:p>
             <a:fld id="{5EB04AAB-0187-4F39-A3C3-445085015435}" type="datetimeFigureOut">
               <a:rPr lang="hu-HU" smtClean="0"/>
-              <a:t>2026. 03. 10.</a:t>
+              <a:t>2026. 03. 17.</a:t>
             </a:fld>
             <a:endParaRPr lang="hu-HU"/>
           </a:p>
@@ -858,7 +859,7 @@
           <a:p>
             <a:fld id="{96DFF08F-DC6B-4601-B491-B0F83F6DD2DA}" type="datetimeFigureOut">
               <a:rPr lang="en-US" smtClean="0"/>
-              <a:t>3/10/2026</a:t>
+              <a:t>3/17/2026</a:t>
             </a:fld>
             <a:endParaRPr lang="en-US" dirty="0"/>
           </a:p>
@@ -1028,7 +1029,7 @@
           <a:p>
             <a:fld id="{96DFF08F-DC6B-4601-B491-B0F83F6DD2DA}" type="datetimeFigureOut">
               <a:rPr lang="en-US" smtClean="0"/>
-              <a:t>3/10/2026</a:t>
+              <a:t>3/17/2026</a:t>
             </a:fld>
             <a:endParaRPr lang="en-US" dirty="0"/>
           </a:p>
@@ -1251,7 +1252,7 @@
           <a:p>
             <a:fld id="{96DFF08F-DC6B-4601-B491-B0F83F6DD2DA}" type="datetimeFigureOut">
               <a:rPr lang="en-US" smtClean="0"/>
-              <a:t>3/10/2026</a:t>
+              <a:t>3/17/2026</a:t>
             </a:fld>
             <a:endParaRPr lang="en-US" dirty="0"/>
           </a:p>
@@ -1431,7 +1432,7 @@
           <a:p>
             <a:fld id="{96DFF08F-DC6B-4601-B491-B0F83F6DD2DA}" type="datetimeFigureOut">
               <a:rPr lang="en-US" smtClean="0"/>
-              <a:t>3/10/2026</a:t>
+              <a:t>3/17/2026</a:t>
             </a:fld>
             <a:endParaRPr lang="en-US" dirty="0"/>
           </a:p>
@@ -1738,7 +1739,7 @@
             <a:fld id="{96DFF08F-DC6B-4601-B491-B0F83F6DD2DA}" type="datetimeFigureOut">
               <a:rPr lang="en-US" smtClean="0"/>
               <a:pPr/>
-              <a:t>3/10/2026</a:t>
+              <a:t>3/17/2026</a:t>
             </a:fld>
             <a:endParaRPr lang="en-US" dirty="0"/>
           </a:p>
@@ -2043,7 +2044,7 @@
           <a:p>
             <a:fld id="{96DFF08F-DC6B-4601-B491-B0F83F6DD2DA}" type="datetimeFigureOut">
               <a:rPr lang="en-US" smtClean="0"/>
-              <a:t>3/10/2026</a:t>
+              <a:t>3/17/2026</a:t>
             </a:fld>
             <a:endParaRPr lang="en-US" dirty="0"/>
           </a:p>
@@ -2465,7 +2466,7 @@
           <a:p>
             <a:fld id="{96DFF08F-DC6B-4601-B491-B0F83F6DD2DA}" type="datetimeFigureOut">
               <a:rPr lang="en-US" smtClean="0"/>
-              <a:t>3/10/2026</a:t>
+              <a:t>3/17/2026</a:t>
             </a:fld>
             <a:endParaRPr lang="en-US" dirty="0"/>
           </a:p>
@@ -2583,7 +2584,7 @@
           <a:p>
             <a:fld id="{96DFF08F-DC6B-4601-B491-B0F83F6DD2DA}" type="datetimeFigureOut">
               <a:rPr lang="en-US" smtClean="0"/>
-              <a:t>3/10/2026</a:t>
+              <a:t>3/17/2026</a:t>
             </a:fld>
             <a:endParaRPr lang="en-US" dirty="0"/>
           </a:p>
@@ -2678,7 +2679,7 @@
           <a:p>
             <a:fld id="{96DFF08F-DC6B-4601-B491-B0F83F6DD2DA}" type="datetimeFigureOut">
               <a:rPr lang="en-US" smtClean="0"/>
-              <a:t>3/10/2026</a:t>
+              <a:t>3/17/2026</a:t>
             </a:fld>
             <a:endParaRPr lang="en-US" dirty="0"/>
           </a:p>
@@ -2951,7 +2952,7 @@
           <a:p>
             <a:fld id="{96DFF08F-DC6B-4601-B491-B0F83F6DD2DA}" type="datetimeFigureOut">
               <a:rPr lang="en-US" smtClean="0"/>
-              <a:t>3/10/2026</a:t>
+              <a:t>3/17/2026</a:t>
             </a:fld>
             <a:endParaRPr lang="en-US" dirty="0"/>
           </a:p>
@@ -3216,7 +3217,7 @@
           <a:p>
             <a:fld id="{96DFF08F-DC6B-4601-B491-B0F83F6DD2DA}" type="datetimeFigureOut">
               <a:rPr lang="en-US" smtClean="0"/>
-              <a:t>3/10/2026</a:t>
+              <a:t>3/17/2026</a:t>
             </a:fld>
             <a:endParaRPr lang="en-US" dirty="0"/>
           </a:p>
@@ -3466,7 +3467,7 @@
             <a:fld id="{96DFF08F-DC6B-4601-B491-B0F83F6DD2DA}" type="datetimeFigureOut">
               <a:rPr lang="en-US" smtClean="0"/>
               <a:pPr/>
-              <a:t>3/10/2026</a:t>
+              <a:t>3/17/2026</a:t>
             </a:fld>
             <a:endParaRPr lang="en-US" dirty="0"/>
           </a:p>
@@ -3970,13 +3971,24 @@
           </a:p>
           <a:p>
             <a:pPr algn="r"/>
-            <a:endParaRPr lang="hu-HU" dirty="0"/>
-          </a:p>
-          <a:p>
-            <a:pPr algn="r"/>
             <a:r>
               <a:rPr lang="hu-HU" dirty="0"/>
               <a:t>Készítette: Csuka Tamás József, Paller Péter Décse</a:t>
+            </a:r>
+          </a:p>
+          <a:p>
+            <a:pPr algn="r"/>
+            <a:r>
+              <a:rPr lang="hu-HU" dirty="0"/>
+              <a:t>Támogatta: </a:t>
+            </a:r>
+            <a:r>
+              <a:rPr lang="hu-HU" dirty="0" err="1"/>
+              <a:t>WellData</a:t>
+            </a:r>
+            <a:r>
+              <a:rPr lang="hu-HU" dirty="0"/>
+              <a:t> Kft</a:t>
             </a:r>
           </a:p>
         </p:txBody>
@@ -4161,6 +4173,156 @@
           <a:prstGeom prst="rect">
             <a:avLst/>
           </a:prstGeom>
+        </p:spPr>
+      </p:pic>
+      <p:pic>
+        <p:nvPicPr>
+          <p:cNvPr id="8" name="Kép 7">
+            <a:extLst>
+              <a:ext uri="{FF2B5EF4-FFF2-40B4-BE49-F238E27FC236}">
+                <a16:creationId xmlns:a16="http://schemas.microsoft.com/office/drawing/2014/main" id="{532F26E4-F4D6-4F58-ACCD-2BC8DAA97025}"/>
+              </a:ext>
+            </a:extLst>
+          </p:cNvPr>
+          <p:cNvPicPr>
+            <a:picLocks noChangeAspect="1"/>
+          </p:cNvPicPr>
+          <p:nvPr/>
+        </p:nvPicPr>
+        <p:blipFill>
+          <a:blip r:embed="rId3"/>
+          <a:stretch>
+            <a:fillRect/>
+          </a:stretch>
+        </p:blipFill>
+        <p:spPr>
+          <a:xfrm>
+            <a:off x="8353195" y="1792936"/>
+            <a:ext cx="2097038" cy="3832517"/>
+          </a:xfrm>
+          <a:prstGeom prst="rect">
+            <a:avLst/>
+          </a:prstGeom>
+        </p:spPr>
+      </p:pic>
+      <p:pic>
+        <p:nvPicPr>
+          <p:cNvPr id="9" name="Kép 8">
+            <a:extLst>
+              <a:ext uri="{FF2B5EF4-FFF2-40B4-BE49-F238E27FC236}">
+                <a16:creationId xmlns:a16="http://schemas.microsoft.com/office/drawing/2014/main" id="{04E9E175-1AFF-4228-9FFA-AB6AB558D932}"/>
+              </a:ext>
+            </a:extLst>
+          </p:cNvPr>
+          <p:cNvPicPr>
+            <a:picLocks noChangeAspect="1"/>
+          </p:cNvPicPr>
+          <p:nvPr/>
+        </p:nvPicPr>
+        <p:blipFill>
+          <a:blip r:embed="rId4">
+            <a:extLst>
+              <a:ext uri="{BEBA8EAE-BF5A-486C-A8C5-ECC9F3942E4B}">
+                <a14:imgProps xmlns:a14="http://schemas.microsoft.com/office/drawing/2010/main">
+                  <a14:imgLayer r:embed="rId5">
+                    <a14:imgEffect>
+                      <a14:backgroundRemoval t="10000" b="90125" l="10000" r="90000">
+                        <a14:foregroundMark x1="25250" y1="25750" x2="25250" y2="25750"/>
+                        <a14:foregroundMark x1="39375" y1="28250" x2="39375" y2="28250"/>
+                        <a14:foregroundMark x1="56000" y1="28500" x2="56000" y2="28500"/>
+                        <a14:foregroundMark x1="78000" y1="32500" x2="78000" y2="32500"/>
+                        <a14:foregroundMark x1="79875" y1="28875" x2="79875" y2="28875"/>
+                        <a14:foregroundMark x1="84250" y1="43500" x2="84250" y2="43500"/>
+                        <a14:foregroundMark x1="87125" y1="44625" x2="87125" y2="44625"/>
+                        <a14:foregroundMark x1="86750" y1="44250" x2="86750" y2="44250"/>
+                        <a14:foregroundMark x1="61750" y1="71500" x2="61750" y2="71500"/>
+                        <a14:foregroundMark x1="49750" y1="90125" x2="49750" y2="90125"/>
+                        <a14:foregroundMark x1="77875" y1="32375" x2="77875" y2="32375"/>
+                        <a14:foregroundMark x1="79125" y1="33125" x2="75875" y2="29875"/>
+                        <a14:foregroundMark x1="87000" y1="44125" x2="86375" y2="41750"/>
+                        <a14:foregroundMark x1="74625" y1="28500" x2="76500" y2="25500"/>
+                        <a14:foregroundMark x1="86750" y1="45500" x2="86000" y2="46125"/>
+                        <a14:foregroundMark x1="82000" y1="47125" x2="81125" y2="46250"/>
+                        <a14:foregroundMark x1="57500" y1="31750" x2="57500" y2="31750"/>
+                        <a14:foregroundMark x1="57500" y1="31750" x2="54875" y2="28000"/>
+                        <a14:foregroundMark x1="81125" y1="46125" x2="80625" y2="45125"/>
+                        <a14:foregroundMark x1="57375" y1="30500" x2="62375" y2="33000"/>
+                        <a14:foregroundMark x1="80125" y1="43375" x2="80125" y2="43375"/>
+                        <a14:foregroundMark x1="81500" y1="40875" x2="81500" y2="40875"/>
+                        <a14:foregroundMark x1="25250" y1="30250" x2="25250" y2="30250"/>
+                        <a14:foregroundMark x1="23500" y1="26875" x2="23500" y2="26875"/>
+                        <a14:foregroundMark x1="18000" y1="24500" x2="18000" y2="24500"/>
+                        <a14:foregroundMark x1="16000" y1="25000" x2="16000" y2="25000"/>
+                        <a14:foregroundMark x1="84375" y1="40500" x2="84375" y2="40500"/>
+                        <a14:backgroundMark x1="83500" y1="42750" x2="83500" y2="42750"/>
+                        <a14:backgroundMark x1="82000" y1="47375" x2="82000" y2="47375"/>
+                        <a14:backgroundMark x1="81750" y1="47250" x2="81750" y2="47250"/>
+                      </a14:backgroundRemoval>
+                    </a14:imgEffect>
+                  </a14:imgLayer>
+                </a14:imgProps>
+              </a:ext>
+            </a:extLst>
+          </a:blip>
+          <a:stretch>
+            <a:fillRect/>
+          </a:stretch>
+        </p:blipFill>
+        <p:spPr>
+          <a:xfrm>
+            <a:off x="5656162" y="4558726"/>
+            <a:ext cx="1659194" cy="1659194"/>
+          </a:xfrm>
+          <a:prstGeom prst="rect">
+            <a:avLst/>
+          </a:prstGeom>
+        </p:spPr>
+      </p:pic>
+      <p:pic>
+        <p:nvPicPr>
+          <p:cNvPr id="1030" name="Picture 6" descr="Jwt Icons and Symbols - Download Free PNG &amp; SVG">
+            <a:extLst>
+              <a:ext uri="{FF2B5EF4-FFF2-40B4-BE49-F238E27FC236}">
+                <a16:creationId xmlns:a16="http://schemas.microsoft.com/office/drawing/2014/main" id="{6CEF3409-19DA-4AB1-B192-24671628E2AE}"/>
+              </a:ext>
+            </a:extLst>
+          </p:cNvPr>
+          <p:cNvPicPr>
+            <a:picLocks noChangeAspect="1" noChangeArrowheads="1"/>
+          </p:cNvPicPr>
+          <p:nvPr/>
+        </p:nvPicPr>
+        <p:blipFill>
+          <a:blip r:embed="rId6">
+            <a:extLst>
+              <a:ext uri="{28A0092B-C50C-407E-A947-70E740481C1C}">
+                <a14:useLocalDpi xmlns:a14="http://schemas.microsoft.com/office/drawing/2010/main" val="0"/>
+              </a:ext>
+            </a:extLst>
+          </a:blip>
+          <a:srcRect/>
+          <a:stretch>
+            <a:fillRect/>
+          </a:stretch>
+        </p:blipFill>
+        <p:spPr bwMode="auto">
+          <a:xfrm>
+            <a:off x="5656162" y="2329937"/>
+            <a:ext cx="1910532" cy="1910532"/>
+          </a:xfrm>
+          <a:prstGeom prst="rect">
+            <a:avLst/>
+          </a:prstGeom>
+          <a:noFill/>
+          <a:extLst>
+            <a:ext uri="{909E8E84-426E-40DD-AFC4-6F175D3DCCD1}">
+              <a14:hiddenFill xmlns:a14="http://schemas.microsoft.com/office/drawing/2010/main">
+                <a:solidFill>
+                  <a:srgbClr val="FFFFFF"/>
+                </a:solidFill>
+              </a14:hiddenFill>
+            </a:ext>
+          </a:extLst>
         </p:spPr>
       </p:pic>
     </p:spTree>
@@ -4756,6 +4918,133 @@
           </a:prstGeom>
         </p:spPr>
       </p:pic>
+      <p:pic>
+        <p:nvPicPr>
+          <p:cNvPr id="3074" name="Picture 2" descr="Postman Logo Vector Download | Logowik">
+            <a:extLst>
+              <a:ext uri="{FF2B5EF4-FFF2-40B4-BE49-F238E27FC236}">
+                <a16:creationId xmlns:a16="http://schemas.microsoft.com/office/drawing/2014/main" id="{115B8B04-D38E-430D-953F-5F77A4094527}"/>
+              </a:ext>
+            </a:extLst>
+          </p:cNvPr>
+          <p:cNvPicPr>
+            <a:picLocks noChangeAspect="1" noChangeArrowheads="1"/>
+          </p:cNvPicPr>
+          <p:nvPr/>
+        </p:nvPicPr>
+        <p:blipFill>
+          <a:blip r:embed="rId3">
+            <a:extLst>
+              <a:ext uri="{BEBA8EAE-BF5A-486C-A8C5-ECC9F3942E4B}">
+                <a14:imgProps xmlns:a14="http://schemas.microsoft.com/office/drawing/2010/main">
+                  <a14:imgLayer r:embed="rId4">
+                    <a14:imgEffect>
+                      <a14:backgroundRemoval t="10000" b="90000" l="10000" r="90000">
+                        <a14:foregroundMark x1="43187" y1="50308" x2="43187" y2="50308"/>
+                        <a14:foregroundMark x1="49885" y1="51231" x2="49885" y2="51231"/>
+                        <a14:foregroundMark x1="58083" y1="49692" x2="58083" y2="49692"/>
+                        <a14:foregroundMark x1="64896" y1="47692" x2="64896" y2="47692"/>
+                        <a14:foregroundMark x1="69861" y1="49385" x2="69861" y2="49385"/>
+                        <a14:foregroundMark x1="78060" y1="51692" x2="78060" y2="51692"/>
+                        <a14:foregroundMark x1="84758" y1="50769" x2="84758" y2="50769"/>
+                        <a14:foregroundMark x1="29330" y1="40000" x2="29330" y2="40000"/>
+                        <a14:foregroundMark x1="25173" y1="46000" x2="25173" y2="46000"/>
+                        <a14:foregroundMark x1="26328" y1="49077" x2="26328" y2="49077"/>
+                        <a14:foregroundMark x1="25404" y1="52769" x2="25404" y2="52769"/>
+                        <a14:foregroundMark x1="18938" y1="54000" x2="18938" y2="54000"/>
+                        <a14:foregroundMark x1="21363" y1="56308" x2="21363" y2="56308"/>
+                        <a14:foregroundMark x1="32102" y1="41385" x2="32102" y2="41385"/>
+                        <a14:foregroundMark x1="20785" y1="55538" x2="20785" y2="55538"/>
+                        <a14:foregroundMark x1="20439" y1="59538" x2="20439" y2="59538"/>
+                        <a14:foregroundMark x1="13626" y1="66615" x2="13626" y2="66615"/>
+                        <a14:backgroundMark x1="44919" y1="48615" x2="44919" y2="48615"/>
+                        <a14:backgroundMark x1="79330" y1="50615" x2="79330" y2="50615"/>
+                        <a14:backgroundMark x1="87413" y1="51077" x2="87413" y2="51077"/>
+                        <a14:backgroundMark x1="14550" y1="66154" x2="14550" y2="66154"/>
+                        <a14:backgroundMark x1="14203" y1="65692" x2="14203" y2="65692"/>
+                        <a14:backgroundMark x1="19977" y1="60769" x2="19977" y2="60769"/>
+                        <a14:backgroundMark x1="20785" y1="59846" x2="20785" y2="59846"/>
+                        <a14:backgroundMark x1="19400" y1="61538" x2="19400" y2="61538"/>
+                        <a14:backgroundMark x1="21247" y1="59385" x2="21247" y2="59385"/>
+                        <a14:backgroundMark x1="22286" y1="58154" x2="22286" y2="58154"/>
+                        <a14:backgroundMark x1="22864" y1="57385" x2="22864" y2="57385"/>
+                        <a14:backgroundMark x1="26443" y1="52769" x2="26443" y2="52769"/>
+                        <a14:backgroundMark x1="27252" y1="51231" x2="27252" y2="51231"/>
+                        <a14:backgroundMark x1="25289" y1="44000" x2="25289" y2="44000"/>
+                        <a14:backgroundMark x1="24249" y1="45077" x2="24249" y2="45077"/>
+                        <a14:backgroundMark x1="22171" y1="47385" x2="22171" y2="47385"/>
+                        <a14:backgroundMark x1="17436" y1="54308" x2="17436" y2="54308"/>
+                        <a14:backgroundMark x1="22171" y1="56000" x2="22171" y2="56000"/>
+                        <a14:backgroundMark x1="21363" y1="56154" x2="21363" y2="56154"/>
+                        <a14:backgroundMark x1="24018" y1="53538" x2="24018" y2="53538"/>
+                        <a14:backgroundMark x1="32102" y1="45077" x2="32102" y2="45077"/>
+                        <a14:backgroundMark x1="32910" y1="41692" x2="32910" y2="41692"/>
+                        <a14:backgroundMark x1="30831" y1="43385" x2="30831" y2="43385"/>
+                      </a14:backgroundRemoval>
+                    </a14:imgEffect>
+                  </a14:imgLayer>
+                </a14:imgProps>
+              </a:ext>
+              <a:ext uri="{28A0092B-C50C-407E-A947-70E740481C1C}">
+                <a14:useLocalDpi xmlns:a14="http://schemas.microsoft.com/office/drawing/2010/main" val="0"/>
+              </a:ext>
+            </a:extLst>
+          </a:blip>
+          <a:srcRect/>
+          <a:stretch>
+            <a:fillRect/>
+          </a:stretch>
+        </p:blipFill>
+        <p:spPr bwMode="auto">
+          <a:xfrm>
+            <a:off x="6841495" y="4535474"/>
+            <a:ext cx="2715709" cy="2038350"/>
+          </a:xfrm>
+          <a:prstGeom prst="rect">
+            <a:avLst/>
+          </a:prstGeom>
+          <a:noFill/>
+          <a:extLst>
+            <a:ext uri="{909E8E84-426E-40DD-AFC4-6F175D3DCCD1}">
+              <a14:hiddenFill xmlns:a14="http://schemas.microsoft.com/office/drawing/2010/main">
+                <a:solidFill>
+                  <a:srgbClr val="FFFFFF"/>
+                </a:solidFill>
+              </a14:hiddenFill>
+            </a:ext>
+          </a:extLst>
+        </p:spPr>
+      </p:pic>
+      <p:pic>
+        <p:nvPicPr>
+          <p:cNvPr id="6" name="Kép 5">
+            <a:extLst>
+              <a:ext uri="{FF2B5EF4-FFF2-40B4-BE49-F238E27FC236}">
+                <a16:creationId xmlns:a16="http://schemas.microsoft.com/office/drawing/2014/main" id="{EA4B2BF7-1510-4F80-A8DA-F68630B40D1C}"/>
+              </a:ext>
+            </a:extLst>
+          </p:cNvPr>
+          <p:cNvPicPr>
+            <a:picLocks noChangeAspect="1"/>
+          </p:cNvPicPr>
+          <p:nvPr/>
+        </p:nvPicPr>
+        <p:blipFill>
+          <a:blip r:embed="rId5"/>
+          <a:stretch>
+            <a:fillRect/>
+          </a:stretch>
+        </p:blipFill>
+        <p:spPr>
+          <a:xfrm>
+            <a:off x="6646557" y="1871352"/>
+            <a:ext cx="3105583" cy="3000794"/>
+          </a:xfrm>
+          <a:prstGeom prst="rect">
+            <a:avLst/>
+          </a:prstGeom>
+        </p:spPr>
+      </p:pic>
     </p:spTree>
     <p:extLst>
       <p:ext uri="{BB962C8B-B14F-4D97-AF65-F5344CB8AC3E}">
@@ -4821,7 +5110,7 @@
           <a:p>
             <a:r>
               <a:rPr lang="hu-HU" dirty="0"/>
-              <a:t>Jövőbeli tervek</a:t>
+              <a:t>Fejlesztési lehetőségek</a:t>
             </a:r>
           </a:p>
         </p:txBody>
@@ -5067,6 +5356,127 @@
           <p:cNvPr id="2" name="Cím 1">
             <a:extLst>
               <a:ext uri="{FF2B5EF4-FFF2-40B4-BE49-F238E27FC236}">
+                <a16:creationId xmlns:a16="http://schemas.microsoft.com/office/drawing/2014/main" id="{31FF98B5-6FD1-4242-A3B6-AD5E24862E45}"/>
+              </a:ext>
+            </a:extLst>
+          </p:cNvPr>
+          <p:cNvSpPr>
+            <a:spLocks noGrp="1"/>
+          </p:cNvSpPr>
+          <p:nvPr>
+            <p:ph type="title"/>
+          </p:nvPr>
+        </p:nvSpPr>
+        <p:spPr/>
+        <p:txBody>
+          <a:bodyPr/>
+          <a:lstStyle/>
+          <a:p>
+            <a:r>
+              <a:rPr lang="hu-HU" dirty="0"/>
+              <a:t>Fogadjuk a kérdéseket</a:t>
+            </a:r>
+          </a:p>
+        </p:txBody>
+      </p:sp>
+      <p:sp>
+        <p:nvSpPr>
+          <p:cNvPr id="3" name="Szöveg helye 2">
+            <a:extLst>
+              <a:ext uri="{FF2B5EF4-FFF2-40B4-BE49-F238E27FC236}">
+                <a16:creationId xmlns:a16="http://schemas.microsoft.com/office/drawing/2014/main" id="{87CCEB05-908A-485D-89F9-D040950A88BC}"/>
+              </a:ext>
+            </a:extLst>
+          </p:cNvPr>
+          <p:cNvSpPr>
+            <a:spLocks noGrp="1"/>
+          </p:cNvSpPr>
+          <p:nvPr>
+            <p:ph type="body" idx="1"/>
+          </p:nvPr>
+        </p:nvSpPr>
+        <p:spPr/>
+        <p:txBody>
+          <a:bodyPr/>
+          <a:lstStyle/>
+          <a:p>
+            <a:endParaRPr lang="hu-HU"/>
+          </a:p>
+        </p:txBody>
+      </p:sp>
+      <p:pic>
+        <p:nvPicPr>
+          <p:cNvPr id="4" name="Kép 3">
+            <a:extLst>
+              <a:ext uri="{FF2B5EF4-FFF2-40B4-BE49-F238E27FC236}">
+                <a16:creationId xmlns:a16="http://schemas.microsoft.com/office/drawing/2014/main" id="{FA07BEE3-5B58-42E9-B30A-A5B318F31958}"/>
+              </a:ext>
+            </a:extLst>
+          </p:cNvPr>
+          <p:cNvPicPr>
+            <a:picLocks noChangeAspect="1"/>
+          </p:cNvPicPr>
+          <p:nvPr/>
+        </p:nvPicPr>
+        <p:blipFill>
+          <a:blip r:embed="rId2">
+            <a:duotone>
+              <a:schemeClr val="bg2">
+                <a:shade val="45000"/>
+                <a:satMod val="135000"/>
+              </a:schemeClr>
+              <a:prstClr val="white"/>
+            </a:duotone>
+          </a:blip>
+          <a:stretch>
+            <a:fillRect/>
+          </a:stretch>
+        </p:blipFill>
+        <p:spPr>
+          <a:xfrm>
+            <a:off x="9752142" y="6134043"/>
+            <a:ext cx="2439858" cy="720000"/>
+          </a:xfrm>
+          <a:prstGeom prst="rect">
+            <a:avLst/>
+          </a:prstGeom>
+        </p:spPr>
+      </p:pic>
+    </p:spTree>
+    <p:extLst>
+      <p:ext uri="{BB962C8B-B14F-4D97-AF65-F5344CB8AC3E}">
+        <p14:creationId xmlns:p14="http://schemas.microsoft.com/office/powerpoint/2010/main" val="4116463431"/>
+      </p:ext>
+    </p:extLst>
+  </p:cSld>
+  <p:clrMapOvr>
+    <a:masterClrMapping/>
+  </p:clrMapOvr>
+</p:sld>
+</file>
+
+<file path=ppt/slides/slide18.xml><?xml version="1.0" encoding="utf-8"?>
+<p:sld xmlns:a="http://schemas.openxmlformats.org/drawingml/2006/main" xmlns:r="http://schemas.openxmlformats.org/officeDocument/2006/relationships" xmlns:p="http://schemas.openxmlformats.org/presentationml/2006/main">
+  <p:cSld>
+    <p:spTree>
+      <p:nvGrpSpPr>
+        <p:cNvPr id="1" name=""/>
+        <p:cNvGrpSpPr/>
+        <p:nvPr/>
+      </p:nvGrpSpPr>
+      <p:grpSpPr>
+        <a:xfrm>
+          <a:off x="0" y="0"/>
+          <a:ext cx="0" cy="0"/>
+          <a:chOff x="0" y="0"/>
+          <a:chExt cx="0" cy="0"/>
+        </a:xfrm>
+      </p:grpSpPr>
+      <p:sp>
+        <p:nvSpPr>
+          <p:cNvPr id="2" name="Cím 1">
+            <a:extLst>
+              <a:ext uri="{FF2B5EF4-FFF2-40B4-BE49-F238E27FC236}">
                 <a16:creationId xmlns:a16="http://schemas.microsoft.com/office/drawing/2014/main" id="{5284D067-9050-4E87-80B9-A68BE769E3DD}"/>
               </a:ext>
             </a:extLst>
@@ -5115,6 +5525,44 @@
           </a:p>
         </p:txBody>
       </p:sp>
+      <p:pic>
+        <p:nvPicPr>
+          <p:cNvPr id="4" name="Kép 3">
+            <a:extLst>
+              <a:ext uri="{FF2B5EF4-FFF2-40B4-BE49-F238E27FC236}">
+                <a16:creationId xmlns:a16="http://schemas.microsoft.com/office/drawing/2014/main" id="{535999F0-6930-4009-931F-5458DE4643CE}"/>
+              </a:ext>
+            </a:extLst>
+          </p:cNvPr>
+          <p:cNvPicPr>
+            <a:picLocks noChangeAspect="1"/>
+          </p:cNvPicPr>
+          <p:nvPr/>
+        </p:nvPicPr>
+        <p:blipFill>
+          <a:blip r:embed="rId2">
+            <a:duotone>
+              <a:schemeClr val="bg2">
+                <a:shade val="45000"/>
+                <a:satMod val="135000"/>
+              </a:schemeClr>
+              <a:prstClr val="white"/>
+            </a:duotone>
+          </a:blip>
+          <a:stretch>
+            <a:fillRect/>
+          </a:stretch>
+        </p:blipFill>
+        <p:spPr>
+          <a:xfrm>
+            <a:off x="9752142" y="6134043"/>
+            <a:ext cx="2439858" cy="720000"/>
+          </a:xfrm>
+          <a:prstGeom prst="rect">
+            <a:avLst/>
+          </a:prstGeom>
+        </p:spPr>
+      </p:pic>
     </p:spTree>
     <p:extLst>
       <p:ext uri="{BB962C8B-B14F-4D97-AF65-F5344CB8AC3E}">
@@ -5140,7 +5588,7 @@
 </p:sld>
 </file>
 
-<file path=ppt/slides/slide18.xml><?xml version="1.0" encoding="utf-8"?>
+<file path=ppt/slides/slide19.xml><?xml version="1.0" encoding="utf-8"?>
 <p:sld xmlns:a="http://schemas.openxmlformats.org/drawingml/2006/main" xmlns:r="http://schemas.openxmlformats.org/officeDocument/2006/relationships" xmlns:p="http://schemas.openxmlformats.org/presentationml/2006/main" show="0">
   <p:cSld>
     <p:spTree>
@@ -5210,6 +5658,36 @@
           </a:p>
         </p:txBody>
       </p:sp>
+      <p:pic>
+        <p:nvPicPr>
+          <p:cNvPr id="4" name="Kép 3">
+            <a:extLst>
+              <a:ext uri="{FF2B5EF4-FFF2-40B4-BE49-F238E27FC236}">
+                <a16:creationId xmlns:a16="http://schemas.microsoft.com/office/drawing/2014/main" id="{69B76524-D016-47ED-AA5B-330AB814E57E}"/>
+              </a:ext>
+            </a:extLst>
+          </p:cNvPr>
+          <p:cNvPicPr>
+            <a:picLocks noChangeAspect="1"/>
+          </p:cNvPicPr>
+          <p:nvPr/>
+        </p:nvPicPr>
+        <p:blipFill>
+          <a:blip r:embed="rId2"/>
+          <a:stretch>
+            <a:fillRect/>
+          </a:stretch>
+        </p:blipFill>
+        <p:spPr>
+          <a:xfrm>
+            <a:off x="9752142" y="6134043"/>
+            <a:ext cx="2439858" cy="720000"/>
+          </a:xfrm>
+          <a:prstGeom prst="rect">
+            <a:avLst/>
+          </a:prstGeom>
+        </p:spPr>
+      </p:pic>
     </p:spTree>
     <p:extLst>
       <p:ext uri="{BB962C8B-B14F-4D97-AF65-F5344CB8AC3E}">
@@ -5619,6 +6097,12 @@
               <a:t>Adminisztráció</a:t>
             </a:r>
           </a:p>
+          <a:p>
+            <a:r>
+              <a:rPr lang="hu-HU" dirty="0"/>
+              <a:t>Magyarországi cég adatok</a:t>
+            </a:r>
+          </a:p>
         </p:txBody>
       </p:sp>
       <p:pic>
@@ -5649,6 +6133,151 @@
           <a:prstGeom prst="rect">
             <a:avLst/>
           </a:prstGeom>
+        </p:spPr>
+      </p:pic>
+      <p:pic>
+        <p:nvPicPr>
+          <p:cNvPr id="4098" name="Picture 2" descr="Cégadat API – Integrálható cégadatok">
+            <a:extLst>
+              <a:ext uri="{FF2B5EF4-FFF2-40B4-BE49-F238E27FC236}">
+                <a16:creationId xmlns:a16="http://schemas.microsoft.com/office/drawing/2014/main" id="{A494543A-B68E-4BBB-B44D-A378ECCBB42D}"/>
+              </a:ext>
+            </a:extLst>
+          </p:cNvPr>
+          <p:cNvPicPr>
+            <a:picLocks noChangeAspect="1" noChangeArrowheads="1"/>
+          </p:cNvPicPr>
+          <p:nvPr/>
+        </p:nvPicPr>
+        <p:blipFill>
+          <a:blip r:embed="rId4">
+            <a:extLst>
+              <a:ext uri="{28A0092B-C50C-407E-A947-70E740481C1C}">
+                <a14:useLocalDpi xmlns:a14="http://schemas.microsoft.com/office/drawing/2010/main" val="0"/>
+              </a:ext>
+            </a:extLst>
+          </a:blip>
+          <a:srcRect/>
+          <a:stretch>
+            <a:fillRect/>
+          </a:stretch>
+        </p:blipFill>
+        <p:spPr bwMode="auto">
+          <a:xfrm>
+            <a:off x="8144493" y="2748282"/>
+            <a:ext cx="2473731" cy="506986"/>
+          </a:xfrm>
+          <a:prstGeom prst="rect">
+            <a:avLst/>
+          </a:prstGeom>
+          <a:noFill/>
+          <a:extLst>
+            <a:ext uri="{909E8E84-426E-40DD-AFC4-6F175D3DCCD1}">
+              <a14:hiddenFill xmlns:a14="http://schemas.microsoft.com/office/drawing/2010/main">
+                <a:solidFill>
+                  <a:srgbClr val="FFFFFF"/>
+                </a:solidFill>
+              </a14:hiddenFill>
+            </a:ext>
+          </a:extLst>
+        </p:spPr>
+      </p:pic>
+      <p:pic>
+        <p:nvPicPr>
+          <p:cNvPr id="4100" name="Picture 4" descr="WellData – Marketing adatbázisok">
+            <a:extLst>
+              <a:ext uri="{FF2B5EF4-FFF2-40B4-BE49-F238E27FC236}">
+                <a16:creationId xmlns:a16="http://schemas.microsoft.com/office/drawing/2014/main" id="{3CD74FBC-F439-4EF4-BD51-4343BDC3A64E}"/>
+              </a:ext>
+            </a:extLst>
+          </p:cNvPr>
+          <p:cNvPicPr>
+            <a:picLocks noChangeAspect="1" noChangeArrowheads="1"/>
+          </p:cNvPicPr>
+          <p:nvPr/>
+        </p:nvPicPr>
+        <p:blipFill>
+          <a:blip r:embed="rId5">
+            <a:extLst>
+              <a:ext uri="{BEBA8EAE-BF5A-486C-A8C5-ECC9F3942E4B}">
+                <a14:imgProps xmlns:a14="http://schemas.microsoft.com/office/drawing/2010/main">
+                  <a14:imgLayer r:embed="rId6">
+                    <a14:imgEffect>
+                      <a14:backgroundRemoval t="6667" b="89524" l="2092" r="98954">
+                        <a14:foregroundMark x1="47490" y1="62857" x2="47490" y2="62857"/>
+                        <a14:foregroundMark x1="43933" y1="8571" x2="43933" y2="8571"/>
+                        <a14:foregroundMark x1="36192" y1="6667" x2="36192" y2="6667"/>
+                        <a14:foregroundMark x1="30544" y1="6667" x2="30544" y2="6667"/>
+                        <a14:foregroundMark x1="58368" y1="51429" x2="58368" y2="51429"/>
+                        <a14:foregroundMark x1="61925" y1="49524" x2="61925" y2="49524"/>
+                        <a14:foregroundMark x1="66946" y1="55238" x2="66946" y2="55238"/>
+                        <a14:foregroundMark x1="67364" y1="61905" x2="67155" y2="40000"/>
+                        <a14:foregroundMark x1="67573" y1="37143" x2="67573" y2="23810"/>
+                        <a14:foregroundMark x1="67573" y1="18095" x2="67364" y2="13333"/>
+                        <a14:foregroundMark x1="67992" y1="10476" x2="69038" y2="10476"/>
+                        <a14:foregroundMark x1="71339" y1="9524" x2="72176" y2="9524"/>
+                        <a14:foregroundMark x1="73222" y1="12381" x2="73640" y2="30476"/>
+                        <a14:foregroundMark x1="73431" y1="38095" x2="73431" y2="48571"/>
+                        <a14:foregroundMark x1="73013" y1="65714" x2="72803" y2="72381"/>
+                        <a14:foregroundMark x1="78661" y1="68571" x2="80753" y2="70476"/>
+                        <a14:foregroundMark x1="78033" y1="65714" x2="77615" y2="40000"/>
+                        <a14:foregroundMark x1="78661" y1="30476" x2="80335" y2="24762"/>
+                        <a14:foregroundMark x1="81381" y1="27619" x2="81381" y2="27619"/>
+                        <a14:foregroundMark x1="82845" y1="25714" x2="83054" y2="37143"/>
+                        <a14:foregroundMark x1="83054" y1="44762" x2="83264" y2="64762"/>
+                        <a14:foregroundMark x1="83473" y1="23810" x2="83473" y2="23810"/>
+                        <a14:foregroundMark x1="88494" y1="22857" x2="88494" y2="22857"/>
+                        <a14:foregroundMark x1="85983" y1="26667" x2="85983" y2="26667"/>
+                        <a14:foregroundMark x1="94351" y1="64762" x2="93724" y2="38095"/>
+                        <a14:foregroundMark x1="93305" y1="37143" x2="93515" y2="26667"/>
+                        <a14:foregroundMark x1="88075" y1="21905" x2="88285" y2="40952"/>
+                        <a14:foregroundMark x1="87866" y1="52381" x2="88075" y2="67619"/>
+                        <a14:foregroundMark x1="71339" y1="69524" x2="68201" y2="69524"/>
+                        <a14:foregroundMark x1="66736" y1="70476" x2="66736" y2="70476"/>
+                        <a14:foregroundMark x1="89958" y1="25714" x2="89958" y2="25714"/>
+                        <a14:foregroundMark x1="90167" y1="24762" x2="90377" y2="24762"/>
+                        <a14:foregroundMark x1="95188" y1="25714" x2="96025" y2="24762"/>
+                        <a14:foregroundMark x1="98326" y1="26667" x2="98954" y2="68571"/>
+                        <a14:foregroundMark x1="17155" y1="41905" x2="14435" y2="40952"/>
+                        <a14:foregroundMark x1="3975" y1="77143" x2="5439" y2="82857"/>
+                        <a14:foregroundMark x1="19247" y1="42857" x2="11506" y2="43810"/>
+                        <a14:foregroundMark x1="6485" y1="44762" x2="3138" y2="44762"/>
+                        <a14:foregroundMark x1="12134" y1="46667" x2="8996" y2="46667"/>
+                        <a14:foregroundMark x1="3347" y1="42857" x2="2092" y2="40952"/>
+                        <a14:foregroundMark x1="2510" y1="14286" x2="12552" y2="21905"/>
+                      </a14:backgroundRemoval>
+                    </a14:imgEffect>
+                  </a14:imgLayer>
+                </a14:imgProps>
+              </a:ext>
+              <a:ext uri="{28A0092B-C50C-407E-A947-70E740481C1C}">
+                <a14:useLocalDpi xmlns:a14="http://schemas.microsoft.com/office/drawing/2010/main" val="0"/>
+              </a:ext>
+            </a:extLst>
+          </a:blip>
+          <a:srcRect/>
+          <a:stretch>
+            <a:fillRect/>
+          </a:stretch>
+        </p:blipFill>
+        <p:spPr bwMode="auto">
+          <a:xfrm>
+            <a:off x="8144493" y="3429000"/>
+            <a:ext cx="2473731" cy="543393"/>
+          </a:xfrm>
+          <a:prstGeom prst="rect">
+            <a:avLst/>
+          </a:prstGeom>
+          <a:noFill/>
+          <a:extLst>
+            <a:ext uri="{909E8E84-426E-40DD-AFC4-6F175D3DCCD1}">
+              <a14:hiddenFill xmlns:a14="http://schemas.microsoft.com/office/drawing/2010/main">
+                <a:solidFill>
+                  <a:srgbClr val="FFFFFF"/>
+                </a:solidFill>
+              </a14:hiddenFill>
+            </a:ext>
+          </a:extLst>
         </p:spPr>
       </p:pic>
     </p:spTree>
@@ -5831,7 +6460,7 @@
           <p:cNvPr id="2" name="Cím 1">
             <a:extLst>
               <a:ext uri="{FF2B5EF4-FFF2-40B4-BE49-F238E27FC236}">
-                <a16:creationId xmlns:a16="http://schemas.microsoft.com/office/drawing/2014/main" id="{A7B0A38C-899F-4809-9705-76A0B6F226E7}"/>
+                <a16:creationId xmlns:a16="http://schemas.microsoft.com/office/drawing/2014/main" id="{57CCEA94-6D2B-4544-8D09-128CB9A0B3F2}"/>
               </a:ext>
             </a:extLst>
           </p:cNvPr>
@@ -5849,17 +6478,17 @@
           <a:p>
             <a:r>
               <a:rPr lang="hu-HU" dirty="0"/>
-              <a:t>Megvalósítás</a:t>
-            </a:r>
-          </a:p>
-        </p:txBody>
-      </p:sp>
-      <p:sp>
-        <p:nvSpPr>
-          <p:cNvPr id="3" name="Tartalom helye 2">
+              <a:t>Feladatok felosztása</a:t>
+            </a:r>
+          </a:p>
+        </p:txBody>
+      </p:sp>
+      <p:sp>
+        <p:nvSpPr>
+          <p:cNvPr id="9" name="Szöveg helye 8">
             <a:extLst>
               <a:ext uri="{FF2B5EF4-FFF2-40B4-BE49-F238E27FC236}">
-                <a16:creationId xmlns:a16="http://schemas.microsoft.com/office/drawing/2014/main" id="{6AB234CC-4FAD-4202-B150-304D9532890F}"/>
+                <a16:creationId xmlns:a16="http://schemas.microsoft.com/office/drawing/2014/main" id="{F7DF4516-0EEF-4AFC-9EC0-BFE62AA0C32B}"/>
               </a:ext>
             </a:extLst>
           </p:cNvPr>
@@ -5867,39 +6496,159 @@
             <a:spLocks noGrp="1"/>
           </p:cNvSpPr>
           <p:nvPr>
-            <p:ph idx="1"/>
-          </p:nvPr>
-        </p:nvSpPr>
-        <p:spPr/>
-        <p:txBody>
-          <a:bodyPr/>
+            <p:ph type="body" idx="1"/>
+          </p:nvPr>
+        </p:nvSpPr>
+        <p:spPr>
+          <a:xfrm>
+            <a:off x="1202919" y="4055046"/>
+            <a:ext cx="4754880" cy="743094"/>
+          </a:xfrm>
+        </p:spPr>
+        <p:txBody>
+          <a:bodyPr>
+            <a:normAutofit/>
+          </a:bodyPr>
           <a:lstStyle/>
           <a:p>
             <a:r>
               <a:rPr lang="hu-HU" dirty="0"/>
-              <a:t>GitHub</a:t>
-            </a:r>
-          </a:p>
+              <a:t>Csuka Tamás József</a:t>
+            </a:r>
+          </a:p>
+        </p:txBody>
+      </p:sp>
+      <p:sp>
+        <p:nvSpPr>
+          <p:cNvPr id="10" name="Tartalom helye 9">
+            <a:extLst>
+              <a:ext uri="{FF2B5EF4-FFF2-40B4-BE49-F238E27FC236}">
+                <a16:creationId xmlns:a16="http://schemas.microsoft.com/office/drawing/2014/main" id="{B13D6331-A17C-43C2-90FE-C03EDC171D8B}"/>
+              </a:ext>
+            </a:extLst>
+          </p:cNvPr>
+          <p:cNvSpPr>
+            <a:spLocks noGrp="1"/>
+          </p:cNvSpPr>
+          <p:nvPr>
+            <p:ph sz="half" idx="2"/>
+          </p:nvPr>
+        </p:nvSpPr>
+        <p:spPr>
+          <a:xfrm>
+            <a:off x="1207008" y="4798142"/>
+            <a:ext cx="4754880" cy="1424584"/>
+          </a:xfrm>
+        </p:spPr>
+        <p:txBody>
+          <a:bodyPr/>
+          <a:lstStyle/>
           <a:p>
             <a:r>
               <a:rPr lang="hu-HU" dirty="0"/>
-              <a:t>Személyes kapcsolattartás</a:t>
+              <a:t>Frontend</a:t>
             </a:r>
           </a:p>
           <a:p>
             <a:r>
               <a:rPr lang="hu-HU" dirty="0"/>
-              <a:t>Messenger – online kapcsolattartás</a:t>
+              <a:t>Design/UI</a:t>
+            </a:r>
+          </a:p>
+          <a:p>
+            <a:r>
+              <a:rPr lang="hu-HU" dirty="0"/>
+              <a:t>Logó</a:t>
+            </a:r>
+          </a:p>
+        </p:txBody>
+      </p:sp>
+      <p:sp>
+        <p:nvSpPr>
+          <p:cNvPr id="11" name="Szöveg helye 10">
+            <a:extLst>
+              <a:ext uri="{FF2B5EF4-FFF2-40B4-BE49-F238E27FC236}">
+                <a16:creationId xmlns:a16="http://schemas.microsoft.com/office/drawing/2014/main" id="{B73DDD0E-4E99-4524-8866-62B68A816A52}"/>
+              </a:ext>
+            </a:extLst>
+          </p:cNvPr>
+          <p:cNvSpPr>
+            <a:spLocks noGrp="1"/>
+          </p:cNvSpPr>
+          <p:nvPr>
+            <p:ph type="body" sz="quarter" idx="3"/>
+          </p:nvPr>
+        </p:nvSpPr>
+        <p:spPr>
+          <a:xfrm>
+            <a:off x="6231230" y="4055046"/>
+            <a:ext cx="4754880" cy="743094"/>
+          </a:xfrm>
+        </p:spPr>
+        <p:txBody>
+          <a:bodyPr>
+            <a:normAutofit/>
+          </a:bodyPr>
+          <a:lstStyle/>
+          <a:p>
+            <a:r>
+              <a:rPr lang="hu-HU" dirty="0"/>
+              <a:t>Paller Péter Décse</a:t>
+            </a:r>
+          </a:p>
+        </p:txBody>
+      </p:sp>
+      <p:sp>
+        <p:nvSpPr>
+          <p:cNvPr id="12" name="Tartalom helye 11">
+            <a:extLst>
+              <a:ext uri="{FF2B5EF4-FFF2-40B4-BE49-F238E27FC236}">
+                <a16:creationId xmlns:a16="http://schemas.microsoft.com/office/drawing/2014/main" id="{A5E46CDC-E251-459C-AF7F-2ECE7D8E2261}"/>
+              </a:ext>
+            </a:extLst>
+          </p:cNvPr>
+          <p:cNvSpPr>
+            <a:spLocks noGrp="1"/>
+          </p:cNvSpPr>
+          <p:nvPr>
+            <p:ph sz="quarter" idx="4"/>
+          </p:nvPr>
+        </p:nvSpPr>
+        <p:spPr>
+          <a:xfrm>
+            <a:off x="6231230" y="4798140"/>
+            <a:ext cx="4754880" cy="1424584"/>
+          </a:xfrm>
+        </p:spPr>
+        <p:txBody>
+          <a:bodyPr/>
+          <a:lstStyle/>
+          <a:p>
+            <a:r>
+              <a:rPr lang="hu-HU" dirty="0"/>
+              <a:t>Backend</a:t>
+            </a:r>
+          </a:p>
+          <a:p>
+            <a:r>
+              <a:rPr lang="hu-HU" dirty="0"/>
+              <a:t>Adatbázis</a:t>
+            </a:r>
+          </a:p>
+          <a:p>
+            <a:r>
+              <a:rPr lang="hu-HU" dirty="0"/>
+              <a:t>Dokumentációk</a:t>
             </a:r>
           </a:p>
         </p:txBody>
       </p:sp>
       <p:pic>
         <p:nvPicPr>
-          <p:cNvPr id="4" name="Kép 3">
+          <p:cNvPr id="7" name="Kép 6">
             <a:extLst>
               <a:ext uri="{FF2B5EF4-FFF2-40B4-BE49-F238E27FC236}">
-                <a16:creationId xmlns:a16="http://schemas.microsoft.com/office/drawing/2014/main" id="{5C484849-DCE8-41E9-833C-48F9C06D0878}"/>
+                <a16:creationId xmlns:a16="http://schemas.microsoft.com/office/drawing/2014/main" id="{251D7F14-2011-4013-89A1-D02E23E346FA}"/>
               </a:ext>
             </a:extLst>
           </p:cNvPr>
@@ -5924,10 +6673,40 @@
           </a:prstGeom>
         </p:spPr>
       </p:pic>
+      <p:pic>
+        <p:nvPicPr>
+          <p:cNvPr id="4" name="Kép 3">
+            <a:extLst>
+              <a:ext uri="{FF2B5EF4-FFF2-40B4-BE49-F238E27FC236}">
+                <a16:creationId xmlns:a16="http://schemas.microsoft.com/office/drawing/2014/main" id="{E738F2A3-8F0B-4E99-B840-EF3D4A746982}"/>
+              </a:ext>
+            </a:extLst>
+          </p:cNvPr>
+          <p:cNvPicPr>
+            <a:picLocks noChangeAspect="1"/>
+          </p:cNvPicPr>
+          <p:nvPr/>
+        </p:nvPicPr>
+        <p:blipFill>
+          <a:blip r:embed="rId3"/>
+          <a:stretch>
+            <a:fillRect/>
+          </a:stretch>
+        </p:blipFill>
+        <p:spPr>
+          <a:xfrm>
+            <a:off x="1207008" y="1837785"/>
+            <a:ext cx="1496863" cy="2217260"/>
+          </a:xfrm>
+          <a:prstGeom prst="rect">
+            <a:avLst/>
+          </a:prstGeom>
+        </p:spPr>
+      </p:pic>
     </p:spTree>
     <p:extLst>
       <p:ext uri="{BB962C8B-B14F-4D97-AF65-F5344CB8AC3E}">
-        <p14:creationId xmlns:p14="http://schemas.microsoft.com/office/powerpoint/2010/main" val="2953559893"/>
+        <p14:creationId xmlns:p14="http://schemas.microsoft.com/office/powerpoint/2010/main" val="4048327611"/>
       </p:ext>
     </p:extLst>
   </p:cSld>
@@ -5971,7 +6750,7 @@
           <p:cNvPr id="2" name="Cím 1">
             <a:extLst>
               <a:ext uri="{FF2B5EF4-FFF2-40B4-BE49-F238E27FC236}">
-                <a16:creationId xmlns:a16="http://schemas.microsoft.com/office/drawing/2014/main" id="{57CCEA94-6D2B-4544-8D09-128CB9A0B3F2}"/>
+                <a16:creationId xmlns:a16="http://schemas.microsoft.com/office/drawing/2014/main" id="{A7B0A38C-899F-4809-9705-76A0B6F226E7}"/>
               </a:ext>
             </a:extLst>
           </p:cNvPr>
@@ -5989,17 +6768,17 @@
           <a:p>
             <a:r>
               <a:rPr lang="hu-HU" dirty="0"/>
-              <a:t>Feladatok felosztása</a:t>
-            </a:r>
-          </a:p>
-        </p:txBody>
-      </p:sp>
-      <p:sp>
-        <p:nvSpPr>
-          <p:cNvPr id="9" name="Szöveg helye 8">
+              <a:t>Megvalósítás</a:t>
+            </a:r>
+          </a:p>
+        </p:txBody>
+      </p:sp>
+      <p:sp>
+        <p:nvSpPr>
+          <p:cNvPr id="3" name="Tartalom helye 2">
             <a:extLst>
               <a:ext uri="{FF2B5EF4-FFF2-40B4-BE49-F238E27FC236}">
-                <a16:creationId xmlns:a16="http://schemas.microsoft.com/office/drawing/2014/main" id="{F7DF4516-0EEF-4AFC-9EC0-BFE62AA0C32B}"/>
+                <a16:creationId xmlns:a16="http://schemas.microsoft.com/office/drawing/2014/main" id="{6AB234CC-4FAD-4202-B150-304D9532890F}"/>
               </a:ext>
             </a:extLst>
           </p:cNvPr>
@@ -6007,7 +6786,7 @@
             <a:spLocks noGrp="1"/>
           </p:cNvSpPr>
           <p:nvPr>
-            <p:ph type="body" idx="1"/>
+            <p:ph idx="1"/>
           </p:nvPr>
         </p:nvSpPr>
         <p:spPr/>
@@ -6017,125 +6796,42 @@
           <a:p>
             <a:r>
               <a:rPr lang="hu-HU" dirty="0"/>
-              <a:t>Csuka Tamás József</a:t>
-            </a:r>
-          </a:p>
-        </p:txBody>
-      </p:sp>
-      <p:sp>
-        <p:nvSpPr>
-          <p:cNvPr id="10" name="Tartalom helye 9">
+              <a:t>GitHub</a:t>
+            </a:r>
+          </a:p>
+          <a:p>
+            <a:r>
+              <a:rPr lang="hu-HU" dirty="0"/>
+              <a:t>Személyes kapcsolattartás</a:t>
+            </a:r>
+          </a:p>
+          <a:p>
+            <a:r>
+              <a:rPr lang="hu-HU" dirty="0"/>
+              <a:t>Messenger</a:t>
+            </a:r>
+          </a:p>
+          <a:p>
+            <a:r>
+              <a:rPr lang="hu-HU" dirty="0" err="1"/>
+              <a:t>Gmail</a:t>
+            </a:r>
+            <a:endParaRPr lang="hu-HU" dirty="0"/>
+          </a:p>
+          <a:p>
+            <a:endParaRPr lang="hu-HU" dirty="0"/>
+          </a:p>
+          <a:p>
+            <a:endParaRPr lang="hu-HU" dirty="0"/>
+          </a:p>
+        </p:txBody>
+      </p:sp>
+      <p:pic>
+        <p:nvPicPr>
+          <p:cNvPr id="4" name="Kép 3">
             <a:extLst>
               <a:ext uri="{FF2B5EF4-FFF2-40B4-BE49-F238E27FC236}">
-                <a16:creationId xmlns:a16="http://schemas.microsoft.com/office/drawing/2014/main" id="{B13D6331-A17C-43C2-90FE-C03EDC171D8B}"/>
-              </a:ext>
-            </a:extLst>
-          </p:cNvPr>
-          <p:cNvSpPr>
-            <a:spLocks noGrp="1"/>
-          </p:cNvSpPr>
-          <p:nvPr>
-            <p:ph sz="half" idx="2"/>
-          </p:nvPr>
-        </p:nvSpPr>
-        <p:spPr/>
-        <p:txBody>
-          <a:bodyPr/>
-          <a:lstStyle/>
-          <a:p>
-            <a:r>
-              <a:rPr lang="hu-HU" dirty="0"/>
-              <a:t>Frontend</a:t>
-            </a:r>
-          </a:p>
-          <a:p>
-            <a:r>
-              <a:rPr lang="hu-HU" dirty="0"/>
-              <a:t>Design/UI</a:t>
-            </a:r>
-          </a:p>
-          <a:p>
-            <a:r>
-              <a:rPr lang="hu-HU" dirty="0"/>
-              <a:t>Logó</a:t>
-            </a:r>
-          </a:p>
-        </p:txBody>
-      </p:sp>
-      <p:sp>
-        <p:nvSpPr>
-          <p:cNvPr id="11" name="Szöveg helye 10">
-            <a:extLst>
-              <a:ext uri="{FF2B5EF4-FFF2-40B4-BE49-F238E27FC236}">
-                <a16:creationId xmlns:a16="http://schemas.microsoft.com/office/drawing/2014/main" id="{B73DDD0E-4E99-4524-8866-62B68A816A52}"/>
-              </a:ext>
-            </a:extLst>
-          </p:cNvPr>
-          <p:cNvSpPr>
-            <a:spLocks noGrp="1"/>
-          </p:cNvSpPr>
-          <p:nvPr>
-            <p:ph type="body" sz="quarter" idx="3"/>
-          </p:nvPr>
-        </p:nvSpPr>
-        <p:spPr/>
-        <p:txBody>
-          <a:bodyPr/>
-          <a:lstStyle/>
-          <a:p>
-            <a:r>
-              <a:rPr lang="hu-HU" dirty="0"/>
-              <a:t>Paller Péter Décse</a:t>
-            </a:r>
-          </a:p>
-        </p:txBody>
-      </p:sp>
-      <p:sp>
-        <p:nvSpPr>
-          <p:cNvPr id="12" name="Tartalom helye 11">
-            <a:extLst>
-              <a:ext uri="{FF2B5EF4-FFF2-40B4-BE49-F238E27FC236}">
-                <a16:creationId xmlns:a16="http://schemas.microsoft.com/office/drawing/2014/main" id="{A5E46CDC-E251-459C-AF7F-2ECE7D8E2261}"/>
-              </a:ext>
-            </a:extLst>
-          </p:cNvPr>
-          <p:cNvSpPr>
-            <a:spLocks noGrp="1"/>
-          </p:cNvSpPr>
-          <p:nvPr>
-            <p:ph sz="quarter" idx="4"/>
-          </p:nvPr>
-        </p:nvSpPr>
-        <p:spPr/>
-        <p:txBody>
-          <a:bodyPr/>
-          <a:lstStyle/>
-          <a:p>
-            <a:r>
-              <a:rPr lang="hu-HU" dirty="0"/>
-              <a:t>Backend</a:t>
-            </a:r>
-          </a:p>
-          <a:p>
-            <a:r>
-              <a:rPr lang="hu-HU" dirty="0"/>
-              <a:t>Adatbázis</a:t>
-            </a:r>
-          </a:p>
-          <a:p>
-            <a:r>
-              <a:rPr lang="hu-HU" dirty="0"/>
-              <a:t>Dokumentációk</a:t>
-            </a:r>
-          </a:p>
-        </p:txBody>
-      </p:sp>
-      <p:pic>
-        <p:nvPicPr>
-          <p:cNvPr id="7" name="Kép 6">
-            <a:extLst>
-              <a:ext uri="{FF2B5EF4-FFF2-40B4-BE49-F238E27FC236}">
-                <a16:creationId xmlns:a16="http://schemas.microsoft.com/office/drawing/2014/main" id="{251D7F14-2011-4013-89A1-D02E23E346FA}"/>
+                <a16:creationId xmlns:a16="http://schemas.microsoft.com/office/drawing/2014/main" id="{5C484849-DCE8-41E9-833C-48F9C06D0878}"/>
               </a:ext>
             </a:extLst>
           </p:cNvPr>
@@ -6160,10 +6856,176 @@
           </a:prstGeom>
         </p:spPr>
       </p:pic>
+      <p:pic>
+        <p:nvPicPr>
+          <p:cNvPr id="5" name="Kép 4">
+            <a:extLst>
+              <a:ext uri="{FF2B5EF4-FFF2-40B4-BE49-F238E27FC236}">
+                <a16:creationId xmlns:a16="http://schemas.microsoft.com/office/drawing/2014/main" id="{E552BC6B-39BD-4DC1-8F74-351231AB698D}"/>
+              </a:ext>
+            </a:extLst>
+          </p:cNvPr>
+          <p:cNvPicPr>
+            <a:picLocks noChangeAspect="1"/>
+          </p:cNvPicPr>
+          <p:nvPr/>
+        </p:nvPicPr>
+        <p:blipFill>
+          <a:blip r:embed="rId3"/>
+          <a:stretch>
+            <a:fillRect/>
+          </a:stretch>
+        </p:blipFill>
+        <p:spPr>
+          <a:xfrm>
+            <a:off x="9269356" y="1958452"/>
+            <a:ext cx="1374509" cy="1374509"/>
+          </a:xfrm>
+          <a:prstGeom prst="rect">
+            <a:avLst/>
+          </a:prstGeom>
+        </p:spPr>
+      </p:pic>
+      <p:pic>
+        <p:nvPicPr>
+          <p:cNvPr id="2050" name="Picture 2" descr="Messenger Icon. Messenger social media logo. 31737177 PNG">
+            <a:extLst>
+              <a:ext uri="{FF2B5EF4-FFF2-40B4-BE49-F238E27FC236}">
+                <a16:creationId xmlns:a16="http://schemas.microsoft.com/office/drawing/2014/main" id="{CD70CE02-C300-43C0-B1F7-93FCA98F842C}"/>
+              </a:ext>
+            </a:extLst>
+          </p:cNvPr>
+          <p:cNvPicPr>
+            <a:picLocks noChangeAspect="1" noChangeArrowheads="1"/>
+          </p:cNvPicPr>
+          <p:nvPr/>
+        </p:nvPicPr>
+        <p:blipFill>
+          <a:blip r:embed="rId4">
+            <a:extLst>
+              <a:ext uri="{BEBA8EAE-BF5A-486C-A8C5-ECC9F3942E4B}">
+                <a14:imgProps xmlns:a14="http://schemas.microsoft.com/office/drawing/2010/main">
+                  <a14:imgLayer r:embed="rId5">
+                    <a14:imgEffect>
+                      <a14:backgroundRemoval t="10000" b="90000" l="10000" r="90000">
+                        <a14:backgroundMark x1="38878" y1="49898" x2="38878" y2="49898"/>
+                      </a14:backgroundRemoval>
+                    </a14:imgEffect>
+                  </a14:imgLayer>
+                </a14:imgProps>
+              </a:ext>
+              <a:ext uri="{28A0092B-C50C-407E-A947-70E740481C1C}">
+                <a14:useLocalDpi xmlns:a14="http://schemas.microsoft.com/office/drawing/2010/main" val="0"/>
+              </a:ext>
+            </a:extLst>
+          </a:blip>
+          <a:srcRect/>
+          <a:stretch>
+            <a:fillRect/>
+          </a:stretch>
+        </p:blipFill>
+        <p:spPr bwMode="auto">
+          <a:xfrm>
+            <a:off x="7426678" y="2528901"/>
+            <a:ext cx="1800197" cy="1800197"/>
+          </a:xfrm>
+          <a:prstGeom prst="rect">
+            <a:avLst/>
+          </a:prstGeom>
+          <a:noFill/>
+          <a:extLst>
+            <a:ext uri="{909E8E84-426E-40DD-AFC4-6F175D3DCCD1}">
+              <a14:hiddenFill xmlns:a14="http://schemas.microsoft.com/office/drawing/2010/main">
+                <a:solidFill>
+                  <a:srgbClr val="FFFFFF"/>
+                </a:solidFill>
+              </a14:hiddenFill>
+            </a:ext>
+          </a:extLst>
+        </p:spPr>
+      </p:pic>
+      <p:pic>
+        <p:nvPicPr>
+          <p:cNvPr id="2052" name="Picture 4" descr="Gmail Comments - Google Mail Logo Black And White - Free Transparent PNG  Download - PNGkey">
+            <a:extLst>
+              <a:ext uri="{FF2B5EF4-FFF2-40B4-BE49-F238E27FC236}">
+                <a16:creationId xmlns:a16="http://schemas.microsoft.com/office/drawing/2014/main" id="{C4A9D5B6-A2B7-40E7-A3AA-7B21DA1CB15F}"/>
+              </a:ext>
+            </a:extLst>
+          </p:cNvPr>
+          <p:cNvPicPr>
+            <a:picLocks noChangeAspect="1" noChangeArrowheads="1"/>
+          </p:cNvPicPr>
+          <p:nvPr/>
+        </p:nvPicPr>
+        <p:blipFill>
+          <a:blip r:embed="rId6">
+            <a:extLst>
+              <a:ext uri="{BEBA8EAE-BF5A-486C-A8C5-ECC9F3942E4B}">
+                <a14:imgProps xmlns:a14="http://schemas.microsoft.com/office/drawing/2010/main">
+                  <a14:imgLayer r:embed="rId7">
+                    <a14:imgEffect>
+                      <a14:backgroundRemoval t="9652" b="99209" l="2805" r="98049">
+                        <a14:foregroundMark x1="7073" y1="28323" x2="7073" y2="28323"/>
+                        <a14:foregroundMark x1="8049" y1="58386" x2="7317" y2="41614"/>
+                        <a14:foregroundMark x1="5244" y1="74051" x2="4878" y2="62184"/>
+                        <a14:foregroundMark x1="5976" y1="84019" x2="7195" y2="68987"/>
+                        <a14:foregroundMark x1="6220" y1="91297" x2="6551" y2="96665"/>
+                        <a14:foregroundMark x1="7561" y1="89873" x2="7317" y2="89082"/>
+                        <a14:foregroundMark x1="7439" y1="91930" x2="6341" y2="90348"/>
+                        <a14:foregroundMark x1="7927" y1="93829" x2="4268" y2="87342"/>
+                        <a14:foregroundMark x1="4512" y1="92563" x2="6341" y2="26582"/>
+                        <a14:foregroundMark x1="6341" y1="26582" x2="8537" y2="19304"/>
+                        <a14:foregroundMark x1="8537" y1="19304" x2="49024" y2="52057"/>
+                        <a14:foregroundMark x1="49024" y1="52057" x2="60244" y2="48734"/>
+                        <a14:foregroundMark x1="60244" y1="48734" x2="83659" y2="26424"/>
+                        <a14:foregroundMark x1="83659" y1="26424" x2="90854" y2="25791"/>
+                        <a14:foregroundMark x1="90854" y1="25791" x2="94634" y2="56487"/>
+                        <a14:foregroundMark x1="94634" y1="56487" x2="94268" y2="84652"/>
+                        <a14:foregroundMark x1="97561" y1="89399" x2="98049" y2="87975"/>
+                        <a14:foregroundMark x1="5366" y1="87500" x2="2805" y2="81804"/>
+                        <a14:backgroundMark x1="32927" y1="66614" x2="32927" y2="66614"/>
+                        <a14:backgroundMark x1="6220" y1="98259" x2="7073" y2="98259"/>
+                        <a14:backgroundMark x1="5732" y1="98101" x2="6829" y2="98418"/>
+                      </a14:backgroundRemoval>
+                    </a14:imgEffect>
+                  </a14:imgLayer>
+                </a14:imgProps>
+              </a:ext>
+              <a:ext uri="{28A0092B-C50C-407E-A947-70E740481C1C}">
+                <a14:useLocalDpi xmlns:a14="http://schemas.microsoft.com/office/drawing/2010/main" val="0"/>
+              </a:ext>
+            </a:extLst>
+          </a:blip>
+          <a:srcRect/>
+          <a:stretch>
+            <a:fillRect/>
+          </a:stretch>
+        </p:blipFill>
+        <p:spPr bwMode="auto">
+          <a:xfrm>
+            <a:off x="9226875" y="3551705"/>
+            <a:ext cx="1459472" cy="1124862"/>
+          </a:xfrm>
+          <a:prstGeom prst="rect">
+            <a:avLst/>
+          </a:prstGeom>
+          <a:noFill/>
+          <a:extLst>
+            <a:ext uri="{909E8E84-426E-40DD-AFC4-6F175D3DCCD1}">
+              <a14:hiddenFill xmlns:a14="http://schemas.microsoft.com/office/drawing/2010/main">
+                <a:solidFill>
+                  <a:srgbClr val="FFFFFF"/>
+                </a:solidFill>
+              </a14:hiddenFill>
+            </a:ext>
+          </a:extLst>
+        </p:spPr>
+      </p:pic>
     </p:spTree>
     <p:extLst>
       <p:ext uri="{BB962C8B-B14F-4D97-AF65-F5344CB8AC3E}">
-        <p14:creationId xmlns:p14="http://schemas.microsoft.com/office/powerpoint/2010/main" val="4048327611"/>
+        <p14:creationId xmlns:p14="http://schemas.microsoft.com/office/powerpoint/2010/main" val="2953559893"/>
       </p:ext>
     </p:extLst>
   </p:cSld>

--- a/szerkesztendo_dokumentumok/prezentacio_REKA.pptx
+++ b/szerkesztendo_dokumentumok/prezentacio_REKA.pptx
@@ -215,7 +215,7 @@
           <a:p>
             <a:fld id="{5EB04AAB-0187-4F39-A3C3-445085015435}" type="datetimeFigureOut">
               <a:rPr lang="hu-HU" smtClean="0"/>
-              <a:t>2026. 03. 17.</a:t>
+              <a:t>2026. 03. 27.</a:t>
             </a:fld>
             <a:endParaRPr lang="hu-HU"/>
           </a:p>
@@ -859,7 +859,7 @@
           <a:p>
             <a:fld id="{96DFF08F-DC6B-4601-B491-B0F83F6DD2DA}" type="datetimeFigureOut">
               <a:rPr lang="en-US" smtClean="0"/>
-              <a:t>3/17/2026</a:t>
+              <a:t>3/27/2026</a:t>
             </a:fld>
             <a:endParaRPr lang="en-US" dirty="0"/>
           </a:p>
@@ -1029,7 +1029,7 @@
           <a:p>
             <a:fld id="{96DFF08F-DC6B-4601-B491-B0F83F6DD2DA}" type="datetimeFigureOut">
               <a:rPr lang="en-US" smtClean="0"/>
-              <a:t>3/17/2026</a:t>
+              <a:t>3/27/2026</a:t>
             </a:fld>
             <a:endParaRPr lang="en-US" dirty="0"/>
           </a:p>
@@ -1252,7 +1252,7 @@
           <a:p>
             <a:fld id="{96DFF08F-DC6B-4601-B491-B0F83F6DD2DA}" type="datetimeFigureOut">
               <a:rPr lang="en-US" smtClean="0"/>
-              <a:t>3/17/2026</a:t>
+              <a:t>3/27/2026</a:t>
             </a:fld>
             <a:endParaRPr lang="en-US" dirty="0"/>
           </a:p>
@@ -1432,7 +1432,7 @@
           <a:p>
             <a:fld id="{96DFF08F-DC6B-4601-B491-B0F83F6DD2DA}" type="datetimeFigureOut">
               <a:rPr lang="en-US" smtClean="0"/>
-              <a:t>3/17/2026</a:t>
+              <a:t>3/27/2026</a:t>
             </a:fld>
             <a:endParaRPr lang="en-US" dirty="0"/>
           </a:p>
@@ -1739,7 +1739,7 @@
             <a:fld id="{96DFF08F-DC6B-4601-B491-B0F83F6DD2DA}" type="datetimeFigureOut">
               <a:rPr lang="en-US" smtClean="0"/>
               <a:pPr/>
-              <a:t>3/17/2026</a:t>
+              <a:t>3/27/2026</a:t>
             </a:fld>
             <a:endParaRPr lang="en-US" dirty="0"/>
           </a:p>
@@ -2044,7 +2044,7 @@
           <a:p>
             <a:fld id="{96DFF08F-DC6B-4601-B491-B0F83F6DD2DA}" type="datetimeFigureOut">
               <a:rPr lang="en-US" smtClean="0"/>
-              <a:t>3/17/2026</a:t>
+              <a:t>3/27/2026</a:t>
             </a:fld>
             <a:endParaRPr lang="en-US" dirty="0"/>
           </a:p>
@@ -2466,7 +2466,7 @@
           <a:p>
             <a:fld id="{96DFF08F-DC6B-4601-B491-B0F83F6DD2DA}" type="datetimeFigureOut">
               <a:rPr lang="en-US" smtClean="0"/>
-              <a:t>3/17/2026</a:t>
+              <a:t>3/27/2026</a:t>
             </a:fld>
             <a:endParaRPr lang="en-US" dirty="0"/>
           </a:p>
@@ -2584,7 +2584,7 @@
           <a:p>
             <a:fld id="{96DFF08F-DC6B-4601-B491-B0F83F6DD2DA}" type="datetimeFigureOut">
               <a:rPr lang="en-US" smtClean="0"/>
-              <a:t>3/17/2026</a:t>
+              <a:t>3/27/2026</a:t>
             </a:fld>
             <a:endParaRPr lang="en-US" dirty="0"/>
           </a:p>
@@ -2679,7 +2679,7 @@
           <a:p>
             <a:fld id="{96DFF08F-DC6B-4601-B491-B0F83F6DD2DA}" type="datetimeFigureOut">
               <a:rPr lang="en-US" smtClean="0"/>
-              <a:t>3/17/2026</a:t>
+              <a:t>3/27/2026</a:t>
             </a:fld>
             <a:endParaRPr lang="en-US" dirty="0"/>
           </a:p>
@@ -2952,7 +2952,7 @@
           <a:p>
             <a:fld id="{96DFF08F-DC6B-4601-B491-B0F83F6DD2DA}" type="datetimeFigureOut">
               <a:rPr lang="en-US" smtClean="0"/>
-              <a:t>3/17/2026</a:t>
+              <a:t>3/27/2026</a:t>
             </a:fld>
             <a:endParaRPr lang="en-US" dirty="0"/>
           </a:p>
@@ -3217,7 +3217,7 @@
           <a:p>
             <a:fld id="{96DFF08F-DC6B-4601-B491-B0F83F6DD2DA}" type="datetimeFigureOut">
               <a:rPr lang="en-US" smtClean="0"/>
-              <a:t>3/17/2026</a:t>
+              <a:t>3/27/2026</a:t>
             </a:fld>
             <a:endParaRPr lang="en-US" dirty="0"/>
           </a:p>
@@ -3467,7 +3467,7 @@
             <a:fld id="{96DFF08F-DC6B-4601-B491-B0F83F6DD2DA}" type="datetimeFigureOut">
               <a:rPr lang="en-US" smtClean="0"/>
               <a:pPr/>
-              <a:t>3/17/2026</a:t>
+              <a:t>3/27/2026</a:t>
             </a:fld>
             <a:endParaRPr lang="en-US" dirty="0"/>
           </a:p>
@@ -4778,6 +4778,83 @@
           </a:prstGeom>
         </p:spPr>
       </p:pic>
+      <p:pic>
+        <p:nvPicPr>
+          <p:cNvPr id="2050" name="Picture 2">
+            <a:extLst>
+              <a:ext uri="{FF2B5EF4-FFF2-40B4-BE49-F238E27FC236}">
+                <a16:creationId xmlns:a16="http://schemas.microsoft.com/office/drawing/2014/main" id="{6C1DFF61-A5A7-4DCD-A522-FB2F179E976B}"/>
+              </a:ext>
+            </a:extLst>
+          </p:cNvPr>
+          <p:cNvPicPr>
+            <a:picLocks noChangeAspect="1" noChangeArrowheads="1"/>
+          </p:cNvPicPr>
+          <p:nvPr/>
+        </p:nvPicPr>
+        <p:blipFill>
+          <a:blip r:embed="rId3">
+            <a:extLst>
+              <a:ext uri="{28A0092B-C50C-407E-A947-70E740481C1C}">
+                <a14:useLocalDpi xmlns:a14="http://schemas.microsoft.com/office/drawing/2010/main" val="0"/>
+              </a:ext>
+            </a:extLst>
+          </a:blip>
+          <a:srcRect/>
+          <a:stretch>
+            <a:fillRect/>
+          </a:stretch>
+        </p:blipFill>
+        <p:spPr bwMode="auto">
+          <a:xfrm>
+            <a:off x="9521872" y="4113573"/>
+            <a:ext cx="1324743" cy="1384347"/>
+          </a:xfrm>
+          <a:prstGeom prst="rect">
+            <a:avLst/>
+          </a:prstGeom>
+          <a:noFill/>
+          <a:extLst>
+            <a:ext uri="{909E8E84-426E-40DD-AFC4-6F175D3DCCD1}">
+              <a14:hiddenFill xmlns:a14="http://schemas.microsoft.com/office/drawing/2010/main">
+                <a:solidFill>
+                  <a:srgbClr val="FFFFFF"/>
+                </a:solidFill>
+              </a14:hiddenFill>
+            </a:ext>
+          </a:extLst>
+        </p:spPr>
+      </p:pic>
+      <p:pic>
+        <p:nvPicPr>
+          <p:cNvPr id="6" name="Kép 5">
+            <a:extLst>
+              <a:ext uri="{FF2B5EF4-FFF2-40B4-BE49-F238E27FC236}">
+                <a16:creationId xmlns:a16="http://schemas.microsoft.com/office/drawing/2014/main" id="{C31EEAB4-9AA2-42A2-A713-6C9AF3F21972}"/>
+              </a:ext>
+            </a:extLst>
+          </p:cNvPr>
+          <p:cNvPicPr>
+            <a:picLocks noChangeAspect="1"/>
+          </p:cNvPicPr>
+          <p:nvPr/>
+        </p:nvPicPr>
+        <p:blipFill>
+          <a:blip r:embed="rId4"/>
+          <a:stretch>
+            <a:fillRect/>
+          </a:stretch>
+        </p:blipFill>
+        <p:spPr>
+          <a:xfrm>
+            <a:off x="9522455" y="2360801"/>
+            <a:ext cx="1324160" cy="1467055"/>
+          </a:xfrm>
+          <a:prstGeom prst="rect">
+            <a:avLst/>
+          </a:prstGeom>
+        </p:spPr>
+      </p:pic>
     </p:spTree>
     <p:extLst>
       <p:ext uri="{BB962C8B-B14F-4D97-AF65-F5344CB8AC3E}">
@@ -7303,6 +7380,102 @@
           <a:xfrm>
             <a:off x="9752142" y="6134043"/>
             <a:ext cx="2439858" cy="720000"/>
+          </a:xfrm>
+          <a:prstGeom prst="rect">
+            <a:avLst/>
+          </a:prstGeom>
+        </p:spPr>
+      </p:pic>
+      <p:pic>
+        <p:nvPicPr>
+          <p:cNvPr id="6" name="Kép 5">
+            <a:extLst>
+              <a:ext uri="{FF2B5EF4-FFF2-40B4-BE49-F238E27FC236}">
+                <a16:creationId xmlns:a16="http://schemas.microsoft.com/office/drawing/2014/main" id="{E714C03C-29B3-4C39-A3C6-B32A22E0A2B8}"/>
+              </a:ext>
+            </a:extLst>
+          </p:cNvPr>
+          <p:cNvPicPr>
+            <a:picLocks noChangeAspect="1"/>
+          </p:cNvPicPr>
+          <p:nvPr/>
+        </p:nvPicPr>
+        <p:blipFill>
+          <a:blip r:embed="rId3"/>
+          <a:stretch>
+            <a:fillRect/>
+          </a:stretch>
+        </p:blipFill>
+        <p:spPr>
+          <a:xfrm>
+            <a:off x="6365741" y="2470846"/>
+            <a:ext cx="2369575" cy="1184788"/>
+          </a:xfrm>
+          <a:prstGeom prst="rect">
+            <a:avLst/>
+          </a:prstGeom>
+        </p:spPr>
+      </p:pic>
+      <p:pic>
+        <p:nvPicPr>
+          <p:cNvPr id="9" name="Ábra 8">
+            <a:extLst>
+              <a:ext uri="{FF2B5EF4-FFF2-40B4-BE49-F238E27FC236}">
+                <a16:creationId xmlns:a16="http://schemas.microsoft.com/office/drawing/2014/main" id="{B7BBBCC1-D587-4274-BE3A-030C7CE2D15D}"/>
+              </a:ext>
+            </a:extLst>
+          </p:cNvPr>
+          <p:cNvPicPr>
+            <a:picLocks noChangeAspect="1"/>
+          </p:cNvPicPr>
+          <p:nvPr/>
+        </p:nvPicPr>
+        <p:blipFill>
+          <a:blip r:embed="rId4">
+            <a:extLst>
+              <a:ext uri="{96DAC541-7B7A-43D3-8B79-37D633B846F1}">
+                <asvg:svgBlip xmlns:asvg="http://schemas.microsoft.com/office/drawing/2016/SVG/main" r:embed="rId5"/>
+              </a:ext>
+            </a:extLst>
+          </a:blip>
+          <a:stretch>
+            <a:fillRect/>
+          </a:stretch>
+        </p:blipFill>
+        <p:spPr>
+          <a:xfrm>
+            <a:off x="7072373" y="4114800"/>
+            <a:ext cx="1554143" cy="1238458"/>
+          </a:xfrm>
+          <a:prstGeom prst="rect">
+            <a:avLst/>
+          </a:prstGeom>
+        </p:spPr>
+      </p:pic>
+      <p:pic>
+        <p:nvPicPr>
+          <p:cNvPr id="11" name="Kép 10">
+            <a:extLst>
+              <a:ext uri="{FF2B5EF4-FFF2-40B4-BE49-F238E27FC236}">
+                <a16:creationId xmlns:a16="http://schemas.microsoft.com/office/drawing/2014/main" id="{B35FEE0C-208C-4560-A344-3102C7D2772C}"/>
+              </a:ext>
+            </a:extLst>
+          </p:cNvPr>
+          <p:cNvPicPr>
+            <a:picLocks noChangeAspect="1"/>
+          </p:cNvPicPr>
+          <p:nvPr/>
+        </p:nvPicPr>
+        <p:blipFill>
+          <a:blip r:embed="rId6"/>
+          <a:stretch>
+            <a:fillRect/>
+          </a:stretch>
+        </p:blipFill>
+        <p:spPr>
+          <a:xfrm>
+            <a:off x="9564244" y="1872516"/>
+            <a:ext cx="1422755" cy="3999331"/>
           </a:xfrm>
           <a:prstGeom prst="rect">
             <a:avLst/>

--- a/szerkesztendo_dokumentumok/prezentacio_REKA.pptx
+++ b/szerkesztendo_dokumentumok/prezentacio_REKA.pptx
@@ -215,7 +215,7 @@
           <a:p>
             <a:fld id="{5EB04AAB-0187-4F39-A3C3-445085015435}" type="datetimeFigureOut">
               <a:rPr lang="hu-HU" smtClean="0"/>
-              <a:t>2026. 03. 17.</a:t>
+              <a:t>2026. 03. 27.</a:t>
             </a:fld>
             <a:endParaRPr lang="hu-HU"/>
           </a:p>
@@ -859,7 +859,7 @@
           <a:p>
             <a:fld id="{96DFF08F-DC6B-4601-B491-B0F83F6DD2DA}" type="datetimeFigureOut">
               <a:rPr lang="en-US" smtClean="0"/>
-              <a:t>3/17/2026</a:t>
+              <a:t>3/27/2026</a:t>
             </a:fld>
             <a:endParaRPr lang="en-US" dirty="0"/>
           </a:p>
@@ -1029,7 +1029,7 @@
           <a:p>
             <a:fld id="{96DFF08F-DC6B-4601-B491-B0F83F6DD2DA}" type="datetimeFigureOut">
               <a:rPr lang="en-US" smtClean="0"/>
-              <a:t>3/17/2026</a:t>
+              <a:t>3/27/2026</a:t>
             </a:fld>
             <a:endParaRPr lang="en-US" dirty="0"/>
           </a:p>
@@ -1252,7 +1252,7 @@
           <a:p>
             <a:fld id="{96DFF08F-DC6B-4601-B491-B0F83F6DD2DA}" type="datetimeFigureOut">
               <a:rPr lang="en-US" smtClean="0"/>
-              <a:t>3/17/2026</a:t>
+              <a:t>3/27/2026</a:t>
             </a:fld>
             <a:endParaRPr lang="en-US" dirty="0"/>
           </a:p>
@@ -1432,7 +1432,7 @@
           <a:p>
             <a:fld id="{96DFF08F-DC6B-4601-B491-B0F83F6DD2DA}" type="datetimeFigureOut">
               <a:rPr lang="en-US" smtClean="0"/>
-              <a:t>3/17/2026</a:t>
+              <a:t>3/27/2026</a:t>
             </a:fld>
             <a:endParaRPr lang="en-US" dirty="0"/>
           </a:p>
@@ -1739,7 +1739,7 @@
             <a:fld id="{96DFF08F-DC6B-4601-B491-B0F83F6DD2DA}" type="datetimeFigureOut">
               <a:rPr lang="en-US" smtClean="0"/>
               <a:pPr/>
-              <a:t>3/17/2026</a:t>
+              <a:t>3/27/2026</a:t>
             </a:fld>
             <a:endParaRPr lang="en-US" dirty="0"/>
           </a:p>
@@ -2044,7 +2044,7 @@
           <a:p>
             <a:fld id="{96DFF08F-DC6B-4601-B491-B0F83F6DD2DA}" type="datetimeFigureOut">
               <a:rPr lang="en-US" smtClean="0"/>
-              <a:t>3/17/2026</a:t>
+              <a:t>3/27/2026</a:t>
             </a:fld>
             <a:endParaRPr lang="en-US" dirty="0"/>
           </a:p>
@@ -2466,7 +2466,7 @@
           <a:p>
             <a:fld id="{96DFF08F-DC6B-4601-B491-B0F83F6DD2DA}" type="datetimeFigureOut">
               <a:rPr lang="en-US" smtClean="0"/>
-              <a:t>3/17/2026</a:t>
+              <a:t>3/27/2026</a:t>
             </a:fld>
             <a:endParaRPr lang="en-US" dirty="0"/>
           </a:p>
@@ -2584,7 +2584,7 @@
           <a:p>
             <a:fld id="{96DFF08F-DC6B-4601-B491-B0F83F6DD2DA}" type="datetimeFigureOut">
               <a:rPr lang="en-US" smtClean="0"/>
-              <a:t>3/17/2026</a:t>
+              <a:t>3/27/2026</a:t>
             </a:fld>
             <a:endParaRPr lang="en-US" dirty="0"/>
           </a:p>
@@ -2679,7 +2679,7 @@
           <a:p>
             <a:fld id="{96DFF08F-DC6B-4601-B491-B0F83F6DD2DA}" type="datetimeFigureOut">
               <a:rPr lang="en-US" smtClean="0"/>
-              <a:t>3/17/2026</a:t>
+              <a:t>3/27/2026</a:t>
             </a:fld>
             <a:endParaRPr lang="en-US" dirty="0"/>
           </a:p>
@@ -2952,7 +2952,7 @@
           <a:p>
             <a:fld id="{96DFF08F-DC6B-4601-B491-B0F83F6DD2DA}" type="datetimeFigureOut">
               <a:rPr lang="en-US" smtClean="0"/>
-              <a:t>3/17/2026</a:t>
+              <a:t>3/27/2026</a:t>
             </a:fld>
             <a:endParaRPr lang="en-US" dirty="0"/>
           </a:p>
@@ -3217,7 +3217,7 @@
           <a:p>
             <a:fld id="{96DFF08F-DC6B-4601-B491-B0F83F6DD2DA}" type="datetimeFigureOut">
               <a:rPr lang="en-US" smtClean="0"/>
-              <a:t>3/17/2026</a:t>
+              <a:t>3/27/2026</a:t>
             </a:fld>
             <a:endParaRPr lang="en-US" dirty="0"/>
           </a:p>
@@ -3467,7 +3467,7 @@
             <a:fld id="{96DFF08F-DC6B-4601-B491-B0F83F6DD2DA}" type="datetimeFigureOut">
               <a:rPr lang="en-US" smtClean="0"/>
               <a:pPr/>
-              <a:t>3/17/2026</a:t>
+              <a:t>3/27/2026</a:t>
             </a:fld>
             <a:endParaRPr lang="en-US" dirty="0"/>
           </a:p>
@@ -6697,6 +6697,36 @@
           <a:xfrm>
             <a:off x="1207008" y="1837785"/>
             <a:ext cx="1496863" cy="2217260"/>
+          </a:xfrm>
+          <a:prstGeom prst="rect">
+            <a:avLst/>
+          </a:prstGeom>
+        </p:spPr>
+      </p:pic>
+      <p:pic>
+        <p:nvPicPr>
+          <p:cNvPr id="5" name="Kép 4">
+            <a:extLst>
+              <a:ext uri="{FF2B5EF4-FFF2-40B4-BE49-F238E27FC236}">
+                <a16:creationId xmlns:a16="http://schemas.microsoft.com/office/drawing/2014/main" id="{32649F75-54CB-AD31-EAF7-08904494B4BC}"/>
+              </a:ext>
+            </a:extLst>
+          </p:cNvPr>
+          <p:cNvPicPr>
+            <a:picLocks noChangeAspect="1"/>
+          </p:cNvPicPr>
+          <p:nvPr/>
+        </p:nvPicPr>
+        <p:blipFill>
+          <a:blip r:embed="rId4"/>
+          <a:stretch>
+            <a:fillRect/>
+          </a:stretch>
+        </p:blipFill>
+        <p:spPr>
+          <a:xfrm>
+            <a:off x="6234203" y="1836695"/>
+            <a:ext cx="1497600" cy="2218350"/>
           </a:xfrm>
           <a:prstGeom prst="rect">
             <a:avLst/>

--- a/szerkesztendo_dokumentumok/prezentacio_REKA.pptx
+++ b/szerkesztendo_dokumentumok/prezentacio_REKA.pptx
@@ -215,7 +215,7 @@
           <a:p>
             <a:fld id="{5EB04AAB-0187-4F39-A3C3-445085015435}" type="datetimeFigureOut">
               <a:rPr lang="hu-HU" smtClean="0"/>
-              <a:t>2026. 03. 27.</a:t>
+              <a:t>2026. 04. 14.</a:t>
             </a:fld>
             <a:endParaRPr lang="hu-HU"/>
           </a:p>
@@ -859,7 +859,7 @@
           <a:p>
             <a:fld id="{96DFF08F-DC6B-4601-B491-B0F83F6DD2DA}" type="datetimeFigureOut">
               <a:rPr lang="en-US" smtClean="0"/>
-              <a:t>3/27/2026</a:t>
+              <a:t>4/14/2026</a:t>
             </a:fld>
             <a:endParaRPr lang="en-US" dirty="0"/>
           </a:p>
@@ -1029,7 +1029,7 @@
           <a:p>
             <a:fld id="{96DFF08F-DC6B-4601-B491-B0F83F6DD2DA}" type="datetimeFigureOut">
               <a:rPr lang="en-US" smtClean="0"/>
-              <a:t>3/27/2026</a:t>
+              <a:t>4/14/2026</a:t>
             </a:fld>
             <a:endParaRPr lang="en-US" dirty="0"/>
           </a:p>
@@ -1252,7 +1252,7 @@
           <a:p>
             <a:fld id="{96DFF08F-DC6B-4601-B491-B0F83F6DD2DA}" type="datetimeFigureOut">
               <a:rPr lang="en-US" smtClean="0"/>
-              <a:t>3/27/2026</a:t>
+              <a:t>4/14/2026</a:t>
             </a:fld>
             <a:endParaRPr lang="en-US" dirty="0"/>
           </a:p>
@@ -1432,7 +1432,7 @@
           <a:p>
             <a:fld id="{96DFF08F-DC6B-4601-B491-B0F83F6DD2DA}" type="datetimeFigureOut">
               <a:rPr lang="en-US" smtClean="0"/>
-              <a:t>3/27/2026</a:t>
+              <a:t>4/14/2026</a:t>
             </a:fld>
             <a:endParaRPr lang="en-US" dirty="0"/>
           </a:p>
@@ -1739,7 +1739,7 @@
             <a:fld id="{96DFF08F-DC6B-4601-B491-B0F83F6DD2DA}" type="datetimeFigureOut">
               <a:rPr lang="en-US" smtClean="0"/>
               <a:pPr/>
-              <a:t>3/27/2026</a:t>
+              <a:t>4/14/2026</a:t>
             </a:fld>
             <a:endParaRPr lang="en-US" dirty="0"/>
           </a:p>
@@ -2044,7 +2044,7 @@
           <a:p>
             <a:fld id="{96DFF08F-DC6B-4601-B491-B0F83F6DD2DA}" type="datetimeFigureOut">
               <a:rPr lang="en-US" smtClean="0"/>
-              <a:t>3/27/2026</a:t>
+              <a:t>4/14/2026</a:t>
             </a:fld>
             <a:endParaRPr lang="en-US" dirty="0"/>
           </a:p>
@@ -2466,7 +2466,7 @@
           <a:p>
             <a:fld id="{96DFF08F-DC6B-4601-B491-B0F83F6DD2DA}" type="datetimeFigureOut">
               <a:rPr lang="en-US" smtClean="0"/>
-              <a:t>3/27/2026</a:t>
+              <a:t>4/14/2026</a:t>
             </a:fld>
             <a:endParaRPr lang="en-US" dirty="0"/>
           </a:p>
@@ -2584,7 +2584,7 @@
           <a:p>
             <a:fld id="{96DFF08F-DC6B-4601-B491-B0F83F6DD2DA}" type="datetimeFigureOut">
               <a:rPr lang="en-US" smtClean="0"/>
-              <a:t>3/27/2026</a:t>
+              <a:t>4/14/2026</a:t>
             </a:fld>
             <a:endParaRPr lang="en-US" dirty="0"/>
           </a:p>
@@ -2679,7 +2679,7 @@
           <a:p>
             <a:fld id="{96DFF08F-DC6B-4601-B491-B0F83F6DD2DA}" type="datetimeFigureOut">
               <a:rPr lang="en-US" smtClean="0"/>
-              <a:t>3/27/2026</a:t>
+              <a:t>4/14/2026</a:t>
             </a:fld>
             <a:endParaRPr lang="en-US" dirty="0"/>
           </a:p>
@@ -2952,7 +2952,7 @@
           <a:p>
             <a:fld id="{96DFF08F-DC6B-4601-B491-B0F83F6DD2DA}" type="datetimeFigureOut">
               <a:rPr lang="en-US" smtClean="0"/>
-              <a:t>3/27/2026</a:t>
+              <a:t>4/14/2026</a:t>
             </a:fld>
             <a:endParaRPr lang="en-US" dirty="0"/>
           </a:p>
@@ -3217,7 +3217,7 @@
           <a:p>
             <a:fld id="{96DFF08F-DC6B-4601-B491-B0F83F6DD2DA}" type="datetimeFigureOut">
               <a:rPr lang="en-US" smtClean="0"/>
-              <a:t>3/27/2026</a:t>
+              <a:t>4/14/2026</a:t>
             </a:fld>
             <a:endParaRPr lang="en-US" dirty="0"/>
           </a:p>
@@ -3467,7 +3467,7 @@
             <a:fld id="{96DFF08F-DC6B-4601-B491-B0F83F6DD2DA}" type="datetimeFigureOut">
               <a:rPr lang="en-US" smtClean="0"/>
               <a:pPr/>
-              <a:t>3/27/2026</a:t>
+              <a:t>4/14/2026</a:t>
             </a:fld>
             <a:endParaRPr lang="en-US" dirty="0"/>
           </a:p>
@@ -4778,6 +4778,66 @@
           </a:prstGeom>
         </p:spPr>
       </p:pic>
+      <p:pic>
+        <p:nvPicPr>
+          <p:cNvPr id="6" name="Kép 5">
+            <a:extLst>
+              <a:ext uri="{FF2B5EF4-FFF2-40B4-BE49-F238E27FC236}">
+                <a16:creationId xmlns:a16="http://schemas.microsoft.com/office/drawing/2014/main" id="{C2A525F8-9C40-436D-9717-02FD195559D8}"/>
+              </a:ext>
+            </a:extLst>
+          </p:cNvPr>
+          <p:cNvPicPr>
+            <a:picLocks noChangeAspect="1"/>
+          </p:cNvPicPr>
+          <p:nvPr/>
+        </p:nvPicPr>
+        <p:blipFill>
+          <a:blip r:embed="rId3"/>
+          <a:stretch>
+            <a:fillRect/>
+          </a:stretch>
+        </p:blipFill>
+        <p:spPr>
+          <a:xfrm>
+            <a:off x="9048854" y="2011680"/>
+            <a:ext cx="1693764" cy="1851042"/>
+          </a:xfrm>
+          <a:prstGeom prst="rect">
+            <a:avLst/>
+          </a:prstGeom>
+        </p:spPr>
+      </p:pic>
+      <p:pic>
+        <p:nvPicPr>
+          <p:cNvPr id="8" name="Kép 7">
+            <a:extLst>
+              <a:ext uri="{FF2B5EF4-FFF2-40B4-BE49-F238E27FC236}">
+                <a16:creationId xmlns:a16="http://schemas.microsoft.com/office/drawing/2014/main" id="{8F09C4B7-2EB4-43EC-B7B7-7319B181A10D}"/>
+              </a:ext>
+            </a:extLst>
+          </p:cNvPr>
+          <p:cNvPicPr>
+            <a:picLocks noChangeAspect="1"/>
+          </p:cNvPicPr>
+          <p:nvPr/>
+        </p:nvPicPr>
+        <p:blipFill>
+          <a:blip r:embed="rId4"/>
+          <a:stretch>
+            <a:fillRect/>
+          </a:stretch>
+        </p:blipFill>
+        <p:spPr>
+          <a:xfrm>
+            <a:off x="9341801" y="4064257"/>
+            <a:ext cx="1107869" cy="1107869"/>
+          </a:xfrm>
+          <a:prstGeom prst="rect">
+            <a:avLst/>
+          </a:prstGeom>
+        </p:spPr>
+      </p:pic>
     </p:spTree>
     <p:extLst>
       <p:ext uri="{BB962C8B-B14F-4D97-AF65-F5344CB8AC3E}">
@@ -7333,6 +7393,139 @@
           <a:xfrm>
             <a:off x="9752142" y="6134043"/>
             <a:ext cx="2439858" cy="720000"/>
+          </a:xfrm>
+          <a:prstGeom prst="rect">
+            <a:avLst/>
+          </a:prstGeom>
+        </p:spPr>
+      </p:pic>
+      <p:pic>
+        <p:nvPicPr>
+          <p:cNvPr id="8" name="Kép 7">
+            <a:extLst>
+              <a:ext uri="{FF2B5EF4-FFF2-40B4-BE49-F238E27FC236}">
+                <a16:creationId xmlns:a16="http://schemas.microsoft.com/office/drawing/2014/main" id="{CFFEA45A-FA84-41A8-8B3B-4E591A575045}"/>
+              </a:ext>
+            </a:extLst>
+          </p:cNvPr>
+          <p:cNvPicPr>
+            <a:picLocks noChangeAspect="1"/>
+          </p:cNvPicPr>
+          <p:nvPr/>
+        </p:nvPicPr>
+        <p:blipFill>
+          <a:blip r:embed="rId3">
+            <a:extLst>
+              <a:ext uri="{BEBA8EAE-BF5A-486C-A8C5-ECC9F3942E4B}">
+                <a14:imgProps xmlns:a14="http://schemas.microsoft.com/office/drawing/2010/main">
+                  <a14:imgLayer r:embed="rId4">
+                    <a14:imgEffect>
+                      <a14:backgroundRemoval t="10000" b="90000" l="7667" r="93167">
+                        <a14:foregroundMark x1="10333" y1="37500" x2="7667" y2="35000"/>
+                        <a14:foregroundMark x1="48500" y1="44833" x2="48500" y2="44833"/>
+                        <a14:foregroundMark x1="55833" y1="46333" x2="55833" y2="46333"/>
+                        <a14:foregroundMark x1="55833" y1="46333" x2="55833" y2="46333"/>
+                        <a14:foregroundMark x1="59833" y1="49333" x2="59833" y2="49333"/>
+                        <a14:foregroundMark x1="60000" y1="50833" x2="60000" y2="50833"/>
+                        <a14:foregroundMark x1="59500" y1="51500" x2="59500" y2="51500"/>
+                        <a14:foregroundMark x1="59500" y1="53500" x2="59500" y2="53500"/>
+                        <a14:foregroundMark x1="55833" y1="45333" x2="55500" y2="46167"/>
+                        <a14:foregroundMark x1="55000" y1="48000" x2="54667" y2="49167"/>
+                        <a14:foregroundMark x1="50000" y1="48000" x2="50333" y2="49667"/>
+                        <a14:foregroundMark x1="48167" y1="45333" x2="48833" y2="46167"/>
+                        <a14:foregroundMark x1="47833" y1="42667" x2="48167" y2="44000"/>
+                        <a14:foregroundMark x1="60333" y1="55000" x2="61167" y2="55333"/>
+                        <a14:foregroundMark x1="70167" y1="50833" x2="70833" y2="52833"/>
+                        <a14:foregroundMark x1="81167" y1="55167" x2="80667" y2="55500"/>
+                        <a14:foregroundMark x1="84833" y1="51167" x2="84667" y2="53833"/>
+                        <a14:foregroundMark x1="85000" y1="41667" x2="84500" y2="41500"/>
+                        <a14:foregroundMark x1="88000" y1="48500" x2="89500" y2="50333"/>
+                        <a14:foregroundMark x1="89333" y1="47000" x2="88500" y2="47500"/>
+                        <a14:foregroundMark x1="93000" y1="46667" x2="93167" y2="46833"/>
+                        <a14:foregroundMark x1="47833" y1="42833" x2="48667" y2="45167"/>
+                        <a14:foregroundMark x1="51667" y1="53833" x2="52667" y2="54500"/>
+                        <a14:foregroundMark x1="23833" y1="41833" x2="22833" y2="41833"/>
+                      </a14:backgroundRemoval>
+                    </a14:imgEffect>
+                  </a14:imgLayer>
+                </a14:imgProps>
+              </a:ext>
+            </a:extLst>
+          </a:blip>
+          <a:stretch>
+            <a:fillRect/>
+          </a:stretch>
+        </p:blipFill>
+        <p:spPr>
+          <a:xfrm>
+            <a:off x="6753461" y="1979725"/>
+            <a:ext cx="2085737" cy="2085737"/>
+          </a:xfrm>
+          <a:prstGeom prst="rect">
+            <a:avLst/>
+          </a:prstGeom>
+        </p:spPr>
+      </p:pic>
+      <p:pic>
+        <p:nvPicPr>
+          <p:cNvPr id="14" name="Ábra 13">
+            <a:extLst>
+              <a:ext uri="{FF2B5EF4-FFF2-40B4-BE49-F238E27FC236}">
+                <a16:creationId xmlns:a16="http://schemas.microsoft.com/office/drawing/2014/main" id="{EDED1B2F-3101-4A69-8BA5-8A026CD1BA99}"/>
+              </a:ext>
+            </a:extLst>
+          </p:cNvPr>
+          <p:cNvPicPr>
+            <a:picLocks noChangeAspect="1"/>
+          </p:cNvPicPr>
+          <p:nvPr/>
+        </p:nvPicPr>
+        <p:blipFill>
+          <a:blip r:embed="rId5">
+            <a:extLst>
+              <a:ext uri="{96DAC541-7B7A-43D3-8B79-37D633B846F1}">
+                <asvg:svgBlip xmlns:asvg="http://schemas.microsoft.com/office/drawing/2016/SVG/main" r:embed="rId6"/>
+              </a:ext>
+            </a:extLst>
+          </a:blip>
+          <a:stretch>
+            <a:fillRect/>
+          </a:stretch>
+        </p:blipFill>
+        <p:spPr>
+          <a:xfrm>
+            <a:off x="7294774" y="4001137"/>
+            <a:ext cx="1431283" cy="1140554"/>
+          </a:xfrm>
+          <a:prstGeom prst="rect">
+            <a:avLst/>
+          </a:prstGeom>
+        </p:spPr>
+      </p:pic>
+      <p:pic>
+        <p:nvPicPr>
+          <p:cNvPr id="16" name="Kép 15">
+            <a:extLst>
+              <a:ext uri="{FF2B5EF4-FFF2-40B4-BE49-F238E27FC236}">
+                <a16:creationId xmlns:a16="http://schemas.microsoft.com/office/drawing/2014/main" id="{315D4603-0A62-4BDB-AA5C-558FB9190D05}"/>
+              </a:ext>
+            </a:extLst>
+          </p:cNvPr>
+          <p:cNvPicPr>
+            <a:picLocks noChangeAspect="1"/>
+          </p:cNvPicPr>
+          <p:nvPr/>
+        </p:nvPicPr>
+        <p:blipFill>
+          <a:blip r:embed="rId7"/>
+          <a:stretch>
+            <a:fillRect/>
+          </a:stretch>
+        </p:blipFill>
+        <p:spPr>
+          <a:xfrm>
+            <a:off x="9487314" y="1794814"/>
+            <a:ext cx="1556255" cy="4152976"/>
           </a:xfrm>
           <a:prstGeom prst="rect">
             <a:avLst/>

--- a/szerkesztendo_dokumentumok/prezentacio_REKA.pptx
+++ b/szerkesztendo_dokumentumok/prezentacio_REKA.pptx
@@ -5,7 +5,7 @@
     <p:sldMasterId id="2147483660" r:id="rId1"/>
   </p:sldMasterIdLst>
   <p:notesMasterIdLst>
-    <p:notesMasterId r:id="rId21"/>
+    <p:notesMasterId r:id="rId20"/>
   </p:notesMasterIdLst>
   <p:sldIdLst>
     <p:sldId id="256" r:id="rId2"/>
@@ -24,9 +24,8 @@
     <p:sldId id="267" r:id="rId15"/>
     <p:sldId id="272" r:id="rId16"/>
     <p:sldId id="273" r:id="rId17"/>
-    <p:sldId id="274" r:id="rId18"/>
-    <p:sldId id="268" r:id="rId19"/>
-    <p:sldId id="271" r:id="rId20"/>
+    <p:sldId id="268" r:id="rId18"/>
+    <p:sldId id="271" r:id="rId19"/>
   </p:sldIdLst>
   <p:sldSz cx="12192000" cy="6858000"/>
   <p:notesSz cx="6858000" cy="9144000"/>
@@ -215,7 +214,7 @@
           <a:p>
             <a:fld id="{5EB04AAB-0187-4F39-A3C3-445085015435}" type="datetimeFigureOut">
               <a:rPr lang="hu-HU" smtClean="0"/>
-              <a:t>2026. 04. 14.</a:t>
+              <a:t>2026. 04. 17.</a:t>
             </a:fld>
             <a:endParaRPr lang="hu-HU"/>
           </a:p>
@@ -859,7 +858,7 @@
           <a:p>
             <a:fld id="{96DFF08F-DC6B-4601-B491-B0F83F6DD2DA}" type="datetimeFigureOut">
               <a:rPr lang="en-US" smtClean="0"/>
-              <a:t>4/14/2026</a:t>
+              <a:t>4/17/2026</a:t>
             </a:fld>
             <a:endParaRPr lang="en-US" dirty="0"/>
           </a:p>
@@ -1029,7 +1028,7 @@
           <a:p>
             <a:fld id="{96DFF08F-DC6B-4601-B491-B0F83F6DD2DA}" type="datetimeFigureOut">
               <a:rPr lang="en-US" smtClean="0"/>
-              <a:t>4/14/2026</a:t>
+              <a:t>4/17/2026</a:t>
             </a:fld>
             <a:endParaRPr lang="en-US" dirty="0"/>
           </a:p>
@@ -1252,7 +1251,7 @@
           <a:p>
             <a:fld id="{96DFF08F-DC6B-4601-B491-B0F83F6DD2DA}" type="datetimeFigureOut">
               <a:rPr lang="en-US" smtClean="0"/>
-              <a:t>4/14/2026</a:t>
+              <a:t>4/17/2026</a:t>
             </a:fld>
             <a:endParaRPr lang="en-US" dirty="0"/>
           </a:p>
@@ -1432,7 +1431,7 @@
           <a:p>
             <a:fld id="{96DFF08F-DC6B-4601-B491-B0F83F6DD2DA}" type="datetimeFigureOut">
               <a:rPr lang="en-US" smtClean="0"/>
-              <a:t>4/14/2026</a:t>
+              <a:t>4/17/2026</a:t>
             </a:fld>
             <a:endParaRPr lang="en-US" dirty="0"/>
           </a:p>
@@ -1739,7 +1738,7 @@
             <a:fld id="{96DFF08F-DC6B-4601-B491-B0F83F6DD2DA}" type="datetimeFigureOut">
               <a:rPr lang="en-US" smtClean="0"/>
               <a:pPr/>
-              <a:t>4/14/2026</a:t>
+              <a:t>4/17/2026</a:t>
             </a:fld>
             <a:endParaRPr lang="en-US" dirty="0"/>
           </a:p>
@@ -2044,7 +2043,7 @@
           <a:p>
             <a:fld id="{96DFF08F-DC6B-4601-B491-B0F83F6DD2DA}" type="datetimeFigureOut">
               <a:rPr lang="en-US" smtClean="0"/>
-              <a:t>4/14/2026</a:t>
+              <a:t>4/17/2026</a:t>
             </a:fld>
             <a:endParaRPr lang="en-US" dirty="0"/>
           </a:p>
@@ -2466,7 +2465,7 @@
           <a:p>
             <a:fld id="{96DFF08F-DC6B-4601-B491-B0F83F6DD2DA}" type="datetimeFigureOut">
               <a:rPr lang="en-US" smtClean="0"/>
-              <a:t>4/14/2026</a:t>
+              <a:t>4/17/2026</a:t>
             </a:fld>
             <a:endParaRPr lang="en-US" dirty="0"/>
           </a:p>
@@ -2584,7 +2583,7 @@
           <a:p>
             <a:fld id="{96DFF08F-DC6B-4601-B491-B0F83F6DD2DA}" type="datetimeFigureOut">
               <a:rPr lang="en-US" smtClean="0"/>
-              <a:t>4/14/2026</a:t>
+              <a:t>4/17/2026</a:t>
             </a:fld>
             <a:endParaRPr lang="en-US" dirty="0"/>
           </a:p>
@@ -2679,7 +2678,7 @@
           <a:p>
             <a:fld id="{96DFF08F-DC6B-4601-B491-B0F83F6DD2DA}" type="datetimeFigureOut">
               <a:rPr lang="en-US" smtClean="0"/>
-              <a:t>4/14/2026</a:t>
+              <a:t>4/17/2026</a:t>
             </a:fld>
             <a:endParaRPr lang="en-US" dirty="0"/>
           </a:p>
@@ -2952,7 +2951,7 @@
           <a:p>
             <a:fld id="{96DFF08F-DC6B-4601-B491-B0F83F6DD2DA}" type="datetimeFigureOut">
               <a:rPr lang="en-US" smtClean="0"/>
-              <a:t>4/14/2026</a:t>
+              <a:t>4/17/2026</a:t>
             </a:fld>
             <a:endParaRPr lang="en-US" dirty="0"/>
           </a:p>
@@ -3217,7 +3216,7 @@
           <a:p>
             <a:fld id="{96DFF08F-DC6B-4601-B491-B0F83F6DD2DA}" type="datetimeFigureOut">
               <a:rPr lang="en-US" smtClean="0"/>
-              <a:t>4/14/2026</a:t>
+              <a:t>4/17/2026</a:t>
             </a:fld>
             <a:endParaRPr lang="en-US" dirty="0"/>
           </a:p>
@@ -3467,7 +3466,7 @@
             <a:fld id="{96DFF08F-DC6B-4601-B491-B0F83F6DD2DA}" type="datetimeFigureOut">
               <a:rPr lang="en-US" smtClean="0"/>
               <a:pPr/>
-              <a:t>4/14/2026</a:t>
+              <a:t>4/17/2026</a:t>
             </a:fld>
             <a:endParaRPr lang="en-US" dirty="0"/>
           </a:p>
@@ -5416,127 +5415,6 @@
           <p:cNvPr id="2" name="Cím 1">
             <a:extLst>
               <a:ext uri="{FF2B5EF4-FFF2-40B4-BE49-F238E27FC236}">
-                <a16:creationId xmlns:a16="http://schemas.microsoft.com/office/drawing/2014/main" id="{31FF98B5-6FD1-4242-A3B6-AD5E24862E45}"/>
-              </a:ext>
-            </a:extLst>
-          </p:cNvPr>
-          <p:cNvSpPr>
-            <a:spLocks noGrp="1"/>
-          </p:cNvSpPr>
-          <p:nvPr>
-            <p:ph type="title"/>
-          </p:nvPr>
-        </p:nvSpPr>
-        <p:spPr/>
-        <p:txBody>
-          <a:bodyPr/>
-          <a:lstStyle/>
-          <a:p>
-            <a:r>
-              <a:rPr lang="hu-HU" dirty="0"/>
-              <a:t>Fogadjuk a kérdéseket</a:t>
-            </a:r>
-          </a:p>
-        </p:txBody>
-      </p:sp>
-      <p:sp>
-        <p:nvSpPr>
-          <p:cNvPr id="3" name="Szöveg helye 2">
-            <a:extLst>
-              <a:ext uri="{FF2B5EF4-FFF2-40B4-BE49-F238E27FC236}">
-                <a16:creationId xmlns:a16="http://schemas.microsoft.com/office/drawing/2014/main" id="{87CCEB05-908A-485D-89F9-D040950A88BC}"/>
-              </a:ext>
-            </a:extLst>
-          </p:cNvPr>
-          <p:cNvSpPr>
-            <a:spLocks noGrp="1"/>
-          </p:cNvSpPr>
-          <p:nvPr>
-            <p:ph type="body" idx="1"/>
-          </p:nvPr>
-        </p:nvSpPr>
-        <p:spPr/>
-        <p:txBody>
-          <a:bodyPr/>
-          <a:lstStyle/>
-          <a:p>
-            <a:endParaRPr lang="hu-HU"/>
-          </a:p>
-        </p:txBody>
-      </p:sp>
-      <p:pic>
-        <p:nvPicPr>
-          <p:cNvPr id="4" name="Kép 3">
-            <a:extLst>
-              <a:ext uri="{FF2B5EF4-FFF2-40B4-BE49-F238E27FC236}">
-                <a16:creationId xmlns:a16="http://schemas.microsoft.com/office/drawing/2014/main" id="{FA07BEE3-5B58-42E9-B30A-A5B318F31958}"/>
-              </a:ext>
-            </a:extLst>
-          </p:cNvPr>
-          <p:cNvPicPr>
-            <a:picLocks noChangeAspect="1"/>
-          </p:cNvPicPr>
-          <p:nvPr/>
-        </p:nvPicPr>
-        <p:blipFill>
-          <a:blip r:embed="rId2">
-            <a:duotone>
-              <a:schemeClr val="bg2">
-                <a:shade val="45000"/>
-                <a:satMod val="135000"/>
-              </a:schemeClr>
-              <a:prstClr val="white"/>
-            </a:duotone>
-          </a:blip>
-          <a:stretch>
-            <a:fillRect/>
-          </a:stretch>
-        </p:blipFill>
-        <p:spPr>
-          <a:xfrm>
-            <a:off x="9752142" y="6134043"/>
-            <a:ext cx="2439858" cy="720000"/>
-          </a:xfrm>
-          <a:prstGeom prst="rect">
-            <a:avLst/>
-          </a:prstGeom>
-        </p:spPr>
-      </p:pic>
-    </p:spTree>
-    <p:extLst>
-      <p:ext uri="{BB962C8B-B14F-4D97-AF65-F5344CB8AC3E}">
-        <p14:creationId xmlns:p14="http://schemas.microsoft.com/office/powerpoint/2010/main" val="4116463431"/>
-      </p:ext>
-    </p:extLst>
-  </p:cSld>
-  <p:clrMapOvr>
-    <a:masterClrMapping/>
-  </p:clrMapOvr>
-</p:sld>
-</file>
-
-<file path=ppt/slides/slide18.xml><?xml version="1.0" encoding="utf-8"?>
-<p:sld xmlns:a="http://schemas.openxmlformats.org/drawingml/2006/main" xmlns:r="http://schemas.openxmlformats.org/officeDocument/2006/relationships" xmlns:p="http://schemas.openxmlformats.org/presentationml/2006/main">
-  <p:cSld>
-    <p:spTree>
-      <p:nvGrpSpPr>
-        <p:cNvPr id="1" name=""/>
-        <p:cNvGrpSpPr/>
-        <p:nvPr/>
-      </p:nvGrpSpPr>
-      <p:grpSpPr>
-        <a:xfrm>
-          <a:off x="0" y="0"/>
-          <a:ext cx="0" cy="0"/>
-          <a:chOff x="0" y="0"/>
-          <a:chExt cx="0" cy="0"/>
-        </a:xfrm>
-      </p:grpSpPr>
-      <p:sp>
-        <p:nvSpPr>
-          <p:cNvPr id="2" name="Cím 1">
-            <a:extLst>
-              <a:ext uri="{FF2B5EF4-FFF2-40B4-BE49-F238E27FC236}">
                 <a16:creationId xmlns:a16="http://schemas.microsoft.com/office/drawing/2014/main" id="{5284D067-9050-4E87-80B9-A68BE769E3DD}"/>
               </a:ext>
             </a:extLst>
@@ -5648,7 +5526,7 @@
 </p:sld>
 </file>
 
-<file path=ppt/slides/slide19.xml><?xml version="1.0" encoding="utf-8"?>
+<file path=ppt/slides/slide18.xml><?xml version="1.0" encoding="utf-8"?>
 <p:sld xmlns:a="http://schemas.openxmlformats.org/drawingml/2006/main" xmlns:r="http://schemas.openxmlformats.org/officeDocument/2006/relationships" xmlns:p="http://schemas.openxmlformats.org/presentationml/2006/main" show="0">
   <p:cSld>
     <p:spTree>

--- a/szerkesztendo_dokumentumok/prezentacio_REKA.pptx
+++ b/szerkesztendo_dokumentumok/prezentacio_REKA.pptx
@@ -7231,6 +7231,14 @@
             <a:r>
               <a:rPr lang="hu-HU" dirty="0" err="1"/>
               <a:t>Bootstrap</a:t>
+            </a:r>
+            <a:r>
+              <a:rPr lang="hu-HU" dirty="0"/>
+              <a:t>, </a:t>
+            </a:r>
+            <a:r>
+              <a:rPr lang="hu-HU" dirty="0" err="1"/>
+              <a:t>Heroicons</a:t>
             </a:r>
             <a:endParaRPr lang="hu-HU" dirty="0"/>
           </a:p>
